--- a/Improving Robustness of Deepfake Detectors through Gradient Regularization.pptx
+++ b/Improving Robustness of Deepfake Detectors through Gradient Regularization.pptx
@@ -5,10 +5,10 @@
     <p:sldMasterId id="2147483673" r:id="rId1"/>
   </p:sldMasterIdLst>
   <p:notesMasterIdLst>
-    <p:notesMasterId r:id="rId25"/>
+    <p:notesMasterId r:id="rId27"/>
   </p:notesMasterIdLst>
   <p:handoutMasterIdLst>
-    <p:handoutMasterId r:id="rId26"/>
+    <p:handoutMasterId r:id="rId28"/>
   </p:handoutMasterIdLst>
   <p:sldIdLst>
     <p:sldId id="256" r:id="rId2"/>
@@ -29,11 +29,13 @@
     <p:sldId id="274" r:id="rId17"/>
     <p:sldId id="275" r:id="rId18"/>
     <p:sldId id="271" r:id="rId19"/>
-    <p:sldId id="262" r:id="rId20"/>
-    <p:sldId id="277" r:id="rId21"/>
-    <p:sldId id="276" r:id="rId22"/>
-    <p:sldId id="261" r:id="rId23"/>
-    <p:sldId id="278" r:id="rId24"/>
+    <p:sldId id="279" r:id="rId20"/>
+    <p:sldId id="280" r:id="rId21"/>
+    <p:sldId id="262" r:id="rId22"/>
+    <p:sldId id="277" r:id="rId23"/>
+    <p:sldId id="276" r:id="rId24"/>
+    <p:sldId id="261" r:id="rId25"/>
+    <p:sldId id="278" r:id="rId26"/>
   </p:sldIdLst>
   <p:sldSz cx="12192000" cy="6858000"/>
   <p:notesSz cx="6858000" cy="9144000"/>
@@ -2610,10 +2612,110 @@
             <a:defRPr cap="all"/>
           </a:pPr>
           <a:r>
-            <a:rPr lang="it-IT"/>
-            <a:t>Indeed DFDs are been used more and more in high stakes cases, such as journalism, court evidence verification, identity protection and many more.</a:t>
+            <a:rPr lang="it-IT" dirty="0" err="1"/>
+            <a:t>Indeed</a:t>
           </a:r>
-          <a:endParaRPr lang="en-US"/>
+          <a:r>
+            <a:rPr lang="it-IT" dirty="0"/>
+            <a:t> </a:t>
+          </a:r>
+          <a:r>
+            <a:rPr lang="it-IT" dirty="0" err="1"/>
+            <a:t>DFDs</a:t>
+          </a:r>
+          <a:r>
+            <a:rPr lang="it-IT" dirty="0"/>
+            <a:t> are </a:t>
+          </a:r>
+          <a:r>
+            <a:rPr lang="it-IT" dirty="0" err="1"/>
+            <a:t>been</a:t>
+          </a:r>
+          <a:r>
+            <a:rPr lang="it-IT" dirty="0"/>
+            <a:t> </a:t>
+          </a:r>
+          <a:r>
+            <a:rPr lang="it-IT" dirty="0" err="1"/>
+            <a:t>used</a:t>
+          </a:r>
+          <a:r>
+            <a:rPr lang="it-IT" dirty="0"/>
+            <a:t> more and more in high </a:t>
+          </a:r>
+          <a:r>
+            <a:rPr lang="it-IT" dirty="0" err="1"/>
+            <a:t>stakes</a:t>
+          </a:r>
+          <a:r>
+            <a:rPr lang="it-IT" dirty="0"/>
+            <a:t> </a:t>
+          </a:r>
+          <a:r>
+            <a:rPr lang="it-IT" dirty="0" err="1"/>
+            <a:t>cases</a:t>
+          </a:r>
+          <a:r>
+            <a:rPr lang="it-IT" dirty="0"/>
+            <a:t>, </a:t>
+          </a:r>
+          <a:r>
+            <a:rPr lang="it-IT" dirty="0" err="1"/>
+            <a:t>such</a:t>
+          </a:r>
+          <a:r>
+            <a:rPr lang="it-IT" dirty="0"/>
+            <a:t> </a:t>
+          </a:r>
+          <a:r>
+            <a:rPr lang="it-IT" dirty="0" err="1"/>
+            <a:t>as</a:t>
+          </a:r>
+          <a:r>
+            <a:rPr lang="it-IT" dirty="0"/>
+            <a:t> journalism, court </a:t>
+          </a:r>
+          <a:r>
+            <a:rPr lang="it-IT" dirty="0" err="1"/>
+            <a:t>evidence</a:t>
+          </a:r>
+          <a:r>
+            <a:rPr lang="it-IT" dirty="0"/>
+            <a:t> </a:t>
+          </a:r>
+          <a:r>
+            <a:rPr lang="it-IT" dirty="0" err="1"/>
+            <a:t>verification</a:t>
+          </a:r>
+          <a:r>
+            <a:rPr lang="it-IT" dirty="0"/>
+            <a:t>, </a:t>
+          </a:r>
+          <a:r>
+            <a:rPr lang="it-IT" dirty="0" err="1"/>
+            <a:t>identity</a:t>
+          </a:r>
+          <a:r>
+            <a:rPr lang="it-IT" dirty="0"/>
+            <a:t> </a:t>
+          </a:r>
+          <a:r>
+            <a:rPr lang="it-IT" dirty="0" err="1"/>
+            <a:t>protection</a:t>
+          </a:r>
+          <a:r>
+            <a:rPr lang="it-IT" dirty="0"/>
+            <a:t> and </a:t>
+          </a:r>
+          <a:r>
+            <a:rPr lang="it-IT" dirty="0" err="1"/>
+            <a:t>many</a:t>
+          </a:r>
+          <a:r>
+            <a:rPr lang="it-IT" dirty="0"/>
+            <a:t> more.</a:t>
+          </a:r>
+          <a:endParaRPr lang="en-US" dirty="0"/>
         </a:p>
       </dgm:t>
     </dgm:pt>
@@ -3415,10 +3517,130 @@
         <a:lstStyle/>
         <a:p>
           <a:r>
-            <a:rPr lang="it-IT"/>
-            <a:t>The experiments, tested on different seeds, have shown that there is no real improvement in robustness by applying the gradient regularization. </a:t>
+            <a:rPr lang="it-IT" dirty="0"/>
+            <a:t>The </a:t>
           </a:r>
-          <a:endParaRPr lang="en-US"/>
+          <a:r>
+            <a:rPr lang="it-IT" dirty="0" err="1"/>
+            <a:t>experiments</a:t>
+          </a:r>
+          <a:r>
+            <a:rPr lang="it-IT" dirty="0"/>
+            <a:t>, </a:t>
+          </a:r>
+          <a:r>
+            <a:rPr lang="it-IT" dirty="0" err="1"/>
+            <a:t>tested</a:t>
+          </a:r>
+          <a:r>
+            <a:rPr lang="it-IT" dirty="0"/>
+            <a:t> on </a:t>
+          </a:r>
+          <a:r>
+            <a:rPr lang="it-IT" dirty="0" err="1"/>
+            <a:t>different</a:t>
+          </a:r>
+          <a:r>
+            <a:rPr lang="it-IT" dirty="0"/>
+            <a:t> </a:t>
+          </a:r>
+          <a:r>
+            <a:rPr lang="it-IT" dirty="0" err="1"/>
+            <a:t>seeds</a:t>
+          </a:r>
+          <a:r>
+            <a:rPr lang="it-IT" dirty="0"/>
+            <a:t>, </a:t>
+          </a:r>
+          <a:r>
+            <a:rPr lang="it-IT" dirty="0" err="1"/>
+            <a:t>have</a:t>
+          </a:r>
+          <a:r>
+            <a:rPr lang="it-IT" dirty="0"/>
+            <a:t> </a:t>
+          </a:r>
+          <a:r>
+            <a:rPr lang="it-IT" dirty="0" err="1"/>
+            <a:t>shown</a:t>
+          </a:r>
+          <a:r>
+            <a:rPr lang="it-IT" dirty="0"/>
+            <a:t> </a:t>
+          </a:r>
+          <a:r>
+            <a:rPr lang="it-IT" dirty="0" err="1"/>
+            <a:t>that</a:t>
+          </a:r>
+          <a:r>
+            <a:rPr lang="it-IT" dirty="0"/>
+            <a:t> </a:t>
+          </a:r>
+          <a:r>
+            <a:rPr lang="it-IT" dirty="0" err="1"/>
+            <a:t>there</a:t>
+          </a:r>
+          <a:r>
+            <a:rPr lang="it-IT" dirty="0"/>
+            <a:t> </a:t>
+          </a:r>
+          <a:r>
+            <a:rPr lang="it-IT" dirty="0" err="1"/>
+            <a:t>is</a:t>
+          </a:r>
+          <a:r>
+            <a:rPr lang="it-IT" dirty="0"/>
+            <a:t> no </a:t>
+          </a:r>
+          <a:r>
+            <a:rPr lang="it-IT" dirty="0" err="1"/>
+            <a:t>real</a:t>
+          </a:r>
+          <a:r>
+            <a:rPr lang="it-IT" dirty="0"/>
+            <a:t> </a:t>
+          </a:r>
+          <a:r>
+            <a:rPr lang="it-IT" dirty="0" err="1"/>
+            <a:t>improvement</a:t>
+          </a:r>
+          <a:r>
+            <a:rPr lang="it-IT" dirty="0"/>
+            <a:t> in </a:t>
+          </a:r>
+          <a:r>
+            <a:rPr lang="it-IT" dirty="0" err="1"/>
+            <a:t>robustness</a:t>
+          </a:r>
+          <a:r>
+            <a:rPr lang="it-IT" dirty="0"/>
+            <a:t> by </a:t>
+          </a:r>
+          <a:r>
+            <a:rPr lang="it-IT" dirty="0" err="1"/>
+            <a:t>applying</a:t>
+          </a:r>
+          <a:r>
+            <a:rPr lang="it-IT" dirty="0"/>
+            <a:t> the </a:t>
+          </a:r>
+          <a:r>
+            <a:rPr lang="it-IT" dirty="0" err="1"/>
+            <a:t>gradient</a:t>
+          </a:r>
+          <a:r>
+            <a:rPr lang="it-IT" dirty="0"/>
+            <a:t> </a:t>
+          </a:r>
+          <a:r>
+            <a:rPr lang="it-IT" dirty="0" err="1"/>
+            <a:t>regularization</a:t>
+          </a:r>
+          <a:r>
+            <a:rPr lang="it-IT" dirty="0"/>
+            <a:t>. </a:t>
+          </a:r>
+          <a:endParaRPr lang="en-US" dirty="0"/>
         </a:p>
       </dgm:t>
     </dgm:pt>
@@ -3452,14 +3674,130 @@
         <a:lstStyle/>
         <a:p>
           <a:r>
-            <a:rPr lang="it-IT" b="1"/>
+            <a:rPr lang="it-IT" b="1" dirty="0"/>
             <a:t>Future works </a:t>
           </a:r>
           <a:r>
-            <a:rPr lang="it-IT"/>
-            <a:t>may consider simplier models, possibly without attention mechanisms, to check if the gradient regularization is actually capable of improving robustness. </a:t>
+            <a:rPr lang="it-IT" dirty="0" err="1"/>
+            <a:t>may</a:t>
           </a:r>
-          <a:endParaRPr lang="en-US"/>
+          <a:r>
+            <a:rPr lang="it-IT" dirty="0"/>
+            <a:t> </a:t>
+          </a:r>
+          <a:r>
+            <a:rPr lang="it-IT" dirty="0" err="1"/>
+            <a:t>consider</a:t>
+          </a:r>
+          <a:r>
+            <a:rPr lang="it-IT" dirty="0"/>
+            <a:t> </a:t>
+          </a:r>
+          <a:r>
+            <a:rPr lang="it-IT" dirty="0" err="1"/>
+            <a:t>simplier</a:t>
+          </a:r>
+          <a:r>
+            <a:rPr lang="it-IT" dirty="0"/>
+            <a:t> models, </a:t>
+          </a:r>
+          <a:r>
+            <a:rPr lang="it-IT" dirty="0" err="1"/>
+            <a:t>possibly</a:t>
+          </a:r>
+          <a:r>
+            <a:rPr lang="it-IT" dirty="0"/>
+            <a:t> </a:t>
+          </a:r>
+          <a:r>
+            <a:rPr lang="it-IT" dirty="0" err="1"/>
+            <a:t>without</a:t>
+          </a:r>
+          <a:r>
+            <a:rPr lang="it-IT" dirty="0"/>
+            <a:t> </a:t>
+          </a:r>
+          <a:r>
+            <a:rPr lang="it-IT" dirty="0" err="1"/>
+            <a:t>attention</a:t>
+          </a:r>
+          <a:r>
+            <a:rPr lang="it-IT" dirty="0"/>
+            <a:t> </a:t>
+          </a:r>
+          <a:r>
+            <a:rPr lang="it-IT" dirty="0" err="1"/>
+            <a:t>mechanisms</a:t>
+          </a:r>
+          <a:r>
+            <a:rPr lang="it-IT" dirty="0"/>
+            <a:t>, to check </a:t>
+          </a:r>
+          <a:r>
+            <a:rPr lang="it-IT" dirty="0" err="1"/>
+            <a:t>if</a:t>
+          </a:r>
+          <a:r>
+            <a:rPr lang="it-IT" dirty="0"/>
+            <a:t> the </a:t>
+          </a:r>
+          <a:r>
+            <a:rPr lang="it-IT" dirty="0" err="1"/>
+            <a:t>gradient</a:t>
+          </a:r>
+          <a:r>
+            <a:rPr lang="it-IT" dirty="0"/>
+            <a:t> </a:t>
+          </a:r>
+          <a:r>
+            <a:rPr lang="it-IT" dirty="0" err="1"/>
+            <a:t>regularization</a:t>
+          </a:r>
+          <a:r>
+            <a:rPr lang="it-IT" dirty="0"/>
+            <a:t> </a:t>
+          </a:r>
+          <a:r>
+            <a:rPr lang="it-IT" dirty="0" err="1"/>
+            <a:t>is</a:t>
+          </a:r>
+          <a:r>
+            <a:rPr lang="it-IT" dirty="0"/>
+            <a:t> </a:t>
+          </a:r>
+          <a:r>
+            <a:rPr lang="it-IT" dirty="0" err="1"/>
+            <a:t>actually</a:t>
+          </a:r>
+          <a:r>
+            <a:rPr lang="it-IT" dirty="0"/>
+            <a:t> </a:t>
+          </a:r>
+          <a:r>
+            <a:rPr lang="it-IT" dirty="0" err="1"/>
+            <a:t>capable</a:t>
+          </a:r>
+          <a:r>
+            <a:rPr lang="it-IT" dirty="0"/>
+            <a:t> of </a:t>
+          </a:r>
+          <a:r>
+            <a:rPr lang="it-IT" dirty="0" err="1"/>
+            <a:t>improving</a:t>
+          </a:r>
+          <a:r>
+            <a:rPr lang="it-IT" dirty="0"/>
+            <a:t> </a:t>
+          </a:r>
+          <a:r>
+            <a:rPr lang="it-IT" dirty="0" err="1"/>
+            <a:t>robustness</a:t>
+          </a:r>
+          <a:r>
+            <a:rPr lang="it-IT" dirty="0"/>
+            <a:t>. </a:t>
+          </a:r>
+          <a:endParaRPr lang="en-US" dirty="0"/>
         </a:p>
       </dgm:t>
     </dgm:pt>
@@ -3958,10 +4296,110 @@
             <a:defRPr cap="all"/>
           </a:pPr>
           <a:r>
-            <a:rPr lang="it-IT" sz="1100" kern="1200"/>
-            <a:t>Indeed DFDs are been used more and more in high stakes cases, such as journalism, court evidence verification, identity protection and many more.</a:t>
+            <a:rPr lang="it-IT" sz="1100" kern="1200" dirty="0" err="1"/>
+            <a:t>Indeed</a:t>
           </a:r>
-          <a:endParaRPr lang="en-US" sz="1100" kern="1200"/>
+          <a:r>
+            <a:rPr lang="it-IT" sz="1100" kern="1200" dirty="0"/>
+            <a:t> </a:t>
+          </a:r>
+          <a:r>
+            <a:rPr lang="it-IT" sz="1100" kern="1200" dirty="0" err="1"/>
+            <a:t>DFDs</a:t>
+          </a:r>
+          <a:r>
+            <a:rPr lang="it-IT" sz="1100" kern="1200" dirty="0"/>
+            <a:t> are </a:t>
+          </a:r>
+          <a:r>
+            <a:rPr lang="it-IT" sz="1100" kern="1200" dirty="0" err="1"/>
+            <a:t>been</a:t>
+          </a:r>
+          <a:r>
+            <a:rPr lang="it-IT" sz="1100" kern="1200" dirty="0"/>
+            <a:t> </a:t>
+          </a:r>
+          <a:r>
+            <a:rPr lang="it-IT" sz="1100" kern="1200" dirty="0" err="1"/>
+            <a:t>used</a:t>
+          </a:r>
+          <a:r>
+            <a:rPr lang="it-IT" sz="1100" kern="1200" dirty="0"/>
+            <a:t> more and more in high </a:t>
+          </a:r>
+          <a:r>
+            <a:rPr lang="it-IT" sz="1100" kern="1200" dirty="0" err="1"/>
+            <a:t>stakes</a:t>
+          </a:r>
+          <a:r>
+            <a:rPr lang="it-IT" sz="1100" kern="1200" dirty="0"/>
+            <a:t> </a:t>
+          </a:r>
+          <a:r>
+            <a:rPr lang="it-IT" sz="1100" kern="1200" dirty="0" err="1"/>
+            <a:t>cases</a:t>
+          </a:r>
+          <a:r>
+            <a:rPr lang="it-IT" sz="1100" kern="1200" dirty="0"/>
+            <a:t>, </a:t>
+          </a:r>
+          <a:r>
+            <a:rPr lang="it-IT" sz="1100" kern="1200" dirty="0" err="1"/>
+            <a:t>such</a:t>
+          </a:r>
+          <a:r>
+            <a:rPr lang="it-IT" sz="1100" kern="1200" dirty="0"/>
+            <a:t> </a:t>
+          </a:r>
+          <a:r>
+            <a:rPr lang="it-IT" sz="1100" kern="1200" dirty="0" err="1"/>
+            <a:t>as</a:t>
+          </a:r>
+          <a:r>
+            <a:rPr lang="it-IT" sz="1100" kern="1200" dirty="0"/>
+            <a:t> journalism, court </a:t>
+          </a:r>
+          <a:r>
+            <a:rPr lang="it-IT" sz="1100" kern="1200" dirty="0" err="1"/>
+            <a:t>evidence</a:t>
+          </a:r>
+          <a:r>
+            <a:rPr lang="it-IT" sz="1100" kern="1200" dirty="0"/>
+            <a:t> </a:t>
+          </a:r>
+          <a:r>
+            <a:rPr lang="it-IT" sz="1100" kern="1200" dirty="0" err="1"/>
+            <a:t>verification</a:t>
+          </a:r>
+          <a:r>
+            <a:rPr lang="it-IT" sz="1100" kern="1200" dirty="0"/>
+            <a:t>, </a:t>
+          </a:r>
+          <a:r>
+            <a:rPr lang="it-IT" sz="1100" kern="1200" dirty="0" err="1"/>
+            <a:t>identity</a:t>
+          </a:r>
+          <a:r>
+            <a:rPr lang="it-IT" sz="1100" kern="1200" dirty="0"/>
+            <a:t> </a:t>
+          </a:r>
+          <a:r>
+            <a:rPr lang="it-IT" sz="1100" kern="1200" dirty="0" err="1"/>
+            <a:t>protection</a:t>
+          </a:r>
+          <a:r>
+            <a:rPr lang="it-IT" sz="1100" kern="1200" dirty="0"/>
+            <a:t> and </a:t>
+          </a:r>
+          <a:r>
+            <a:rPr lang="it-IT" sz="1100" kern="1200" dirty="0" err="1"/>
+            <a:t>many</a:t>
+          </a:r>
+          <a:r>
+            <a:rPr lang="it-IT" sz="1100" kern="1200" dirty="0"/>
+            <a:t> more.</a:t>
+          </a:r>
+          <a:endParaRPr lang="en-US" sz="1100" kern="1200" dirty="0"/>
         </a:p>
       </dsp:txBody>
       <dsp:txXfrm>
@@ -5095,10 +5533,130 @@
             <a:buNone/>
           </a:pPr>
           <a:r>
-            <a:rPr lang="it-IT" sz="2700" kern="1200"/>
-            <a:t>The experiments, tested on different seeds, have shown that there is no real improvement in robustness by applying the gradient regularization. </a:t>
+            <a:rPr lang="it-IT" sz="2700" kern="1200" dirty="0"/>
+            <a:t>The </a:t>
           </a:r>
-          <a:endParaRPr lang="en-US" sz="2700" kern="1200"/>
+          <a:r>
+            <a:rPr lang="it-IT" sz="2700" kern="1200" dirty="0" err="1"/>
+            <a:t>experiments</a:t>
+          </a:r>
+          <a:r>
+            <a:rPr lang="it-IT" sz="2700" kern="1200" dirty="0"/>
+            <a:t>, </a:t>
+          </a:r>
+          <a:r>
+            <a:rPr lang="it-IT" sz="2700" kern="1200" dirty="0" err="1"/>
+            <a:t>tested</a:t>
+          </a:r>
+          <a:r>
+            <a:rPr lang="it-IT" sz="2700" kern="1200" dirty="0"/>
+            <a:t> on </a:t>
+          </a:r>
+          <a:r>
+            <a:rPr lang="it-IT" sz="2700" kern="1200" dirty="0" err="1"/>
+            <a:t>different</a:t>
+          </a:r>
+          <a:r>
+            <a:rPr lang="it-IT" sz="2700" kern="1200" dirty="0"/>
+            <a:t> </a:t>
+          </a:r>
+          <a:r>
+            <a:rPr lang="it-IT" sz="2700" kern="1200" dirty="0" err="1"/>
+            <a:t>seeds</a:t>
+          </a:r>
+          <a:r>
+            <a:rPr lang="it-IT" sz="2700" kern="1200" dirty="0"/>
+            <a:t>, </a:t>
+          </a:r>
+          <a:r>
+            <a:rPr lang="it-IT" sz="2700" kern="1200" dirty="0" err="1"/>
+            <a:t>have</a:t>
+          </a:r>
+          <a:r>
+            <a:rPr lang="it-IT" sz="2700" kern="1200" dirty="0"/>
+            <a:t> </a:t>
+          </a:r>
+          <a:r>
+            <a:rPr lang="it-IT" sz="2700" kern="1200" dirty="0" err="1"/>
+            <a:t>shown</a:t>
+          </a:r>
+          <a:r>
+            <a:rPr lang="it-IT" sz="2700" kern="1200" dirty="0"/>
+            <a:t> </a:t>
+          </a:r>
+          <a:r>
+            <a:rPr lang="it-IT" sz="2700" kern="1200" dirty="0" err="1"/>
+            <a:t>that</a:t>
+          </a:r>
+          <a:r>
+            <a:rPr lang="it-IT" sz="2700" kern="1200" dirty="0"/>
+            <a:t> </a:t>
+          </a:r>
+          <a:r>
+            <a:rPr lang="it-IT" sz="2700" kern="1200" dirty="0" err="1"/>
+            <a:t>there</a:t>
+          </a:r>
+          <a:r>
+            <a:rPr lang="it-IT" sz="2700" kern="1200" dirty="0"/>
+            <a:t> </a:t>
+          </a:r>
+          <a:r>
+            <a:rPr lang="it-IT" sz="2700" kern="1200" dirty="0" err="1"/>
+            <a:t>is</a:t>
+          </a:r>
+          <a:r>
+            <a:rPr lang="it-IT" sz="2700" kern="1200" dirty="0"/>
+            <a:t> no </a:t>
+          </a:r>
+          <a:r>
+            <a:rPr lang="it-IT" sz="2700" kern="1200" dirty="0" err="1"/>
+            <a:t>real</a:t>
+          </a:r>
+          <a:r>
+            <a:rPr lang="it-IT" sz="2700" kern="1200" dirty="0"/>
+            <a:t> </a:t>
+          </a:r>
+          <a:r>
+            <a:rPr lang="it-IT" sz="2700" kern="1200" dirty="0" err="1"/>
+            <a:t>improvement</a:t>
+          </a:r>
+          <a:r>
+            <a:rPr lang="it-IT" sz="2700" kern="1200" dirty="0"/>
+            <a:t> in </a:t>
+          </a:r>
+          <a:r>
+            <a:rPr lang="it-IT" sz="2700" kern="1200" dirty="0" err="1"/>
+            <a:t>robustness</a:t>
+          </a:r>
+          <a:r>
+            <a:rPr lang="it-IT" sz="2700" kern="1200" dirty="0"/>
+            <a:t> by </a:t>
+          </a:r>
+          <a:r>
+            <a:rPr lang="it-IT" sz="2700" kern="1200" dirty="0" err="1"/>
+            <a:t>applying</a:t>
+          </a:r>
+          <a:r>
+            <a:rPr lang="it-IT" sz="2700" kern="1200" dirty="0"/>
+            <a:t> the </a:t>
+          </a:r>
+          <a:r>
+            <a:rPr lang="it-IT" sz="2700" kern="1200" dirty="0" err="1"/>
+            <a:t>gradient</a:t>
+          </a:r>
+          <a:r>
+            <a:rPr lang="it-IT" sz="2700" kern="1200" dirty="0"/>
+            <a:t> </a:t>
+          </a:r>
+          <a:r>
+            <a:rPr lang="it-IT" sz="2700" kern="1200" dirty="0" err="1"/>
+            <a:t>regularization</a:t>
+          </a:r>
+          <a:r>
+            <a:rPr lang="it-IT" sz="2700" kern="1200" dirty="0"/>
+            <a:t>. </a:t>
+          </a:r>
+          <a:endParaRPr lang="en-US" sz="2700" kern="1200" dirty="0"/>
         </a:p>
       </dsp:txBody>
       <dsp:txXfrm>
@@ -5222,14 +5780,130 @@
             <a:buNone/>
           </a:pPr>
           <a:r>
-            <a:rPr lang="it-IT" sz="2700" b="1" kern="1200"/>
+            <a:rPr lang="it-IT" sz="2700" b="1" kern="1200" dirty="0"/>
             <a:t>Future works </a:t>
           </a:r>
           <a:r>
-            <a:rPr lang="it-IT" sz="2700" kern="1200"/>
-            <a:t>may consider simplier models, possibly without attention mechanisms, to check if the gradient regularization is actually capable of improving robustness. </a:t>
+            <a:rPr lang="it-IT" sz="2700" kern="1200" dirty="0" err="1"/>
+            <a:t>may</a:t>
           </a:r>
-          <a:endParaRPr lang="en-US" sz="2700" kern="1200"/>
+          <a:r>
+            <a:rPr lang="it-IT" sz="2700" kern="1200" dirty="0"/>
+            <a:t> </a:t>
+          </a:r>
+          <a:r>
+            <a:rPr lang="it-IT" sz="2700" kern="1200" dirty="0" err="1"/>
+            <a:t>consider</a:t>
+          </a:r>
+          <a:r>
+            <a:rPr lang="it-IT" sz="2700" kern="1200" dirty="0"/>
+            <a:t> </a:t>
+          </a:r>
+          <a:r>
+            <a:rPr lang="it-IT" sz="2700" kern="1200" dirty="0" err="1"/>
+            <a:t>simplier</a:t>
+          </a:r>
+          <a:r>
+            <a:rPr lang="it-IT" sz="2700" kern="1200" dirty="0"/>
+            <a:t> models, </a:t>
+          </a:r>
+          <a:r>
+            <a:rPr lang="it-IT" sz="2700" kern="1200" dirty="0" err="1"/>
+            <a:t>possibly</a:t>
+          </a:r>
+          <a:r>
+            <a:rPr lang="it-IT" sz="2700" kern="1200" dirty="0"/>
+            <a:t> </a:t>
+          </a:r>
+          <a:r>
+            <a:rPr lang="it-IT" sz="2700" kern="1200" dirty="0" err="1"/>
+            <a:t>without</a:t>
+          </a:r>
+          <a:r>
+            <a:rPr lang="it-IT" sz="2700" kern="1200" dirty="0"/>
+            <a:t> </a:t>
+          </a:r>
+          <a:r>
+            <a:rPr lang="it-IT" sz="2700" kern="1200" dirty="0" err="1"/>
+            <a:t>attention</a:t>
+          </a:r>
+          <a:r>
+            <a:rPr lang="it-IT" sz="2700" kern="1200" dirty="0"/>
+            <a:t> </a:t>
+          </a:r>
+          <a:r>
+            <a:rPr lang="it-IT" sz="2700" kern="1200" dirty="0" err="1"/>
+            <a:t>mechanisms</a:t>
+          </a:r>
+          <a:r>
+            <a:rPr lang="it-IT" sz="2700" kern="1200" dirty="0"/>
+            <a:t>, to check </a:t>
+          </a:r>
+          <a:r>
+            <a:rPr lang="it-IT" sz="2700" kern="1200" dirty="0" err="1"/>
+            <a:t>if</a:t>
+          </a:r>
+          <a:r>
+            <a:rPr lang="it-IT" sz="2700" kern="1200" dirty="0"/>
+            <a:t> the </a:t>
+          </a:r>
+          <a:r>
+            <a:rPr lang="it-IT" sz="2700" kern="1200" dirty="0" err="1"/>
+            <a:t>gradient</a:t>
+          </a:r>
+          <a:r>
+            <a:rPr lang="it-IT" sz="2700" kern="1200" dirty="0"/>
+            <a:t> </a:t>
+          </a:r>
+          <a:r>
+            <a:rPr lang="it-IT" sz="2700" kern="1200" dirty="0" err="1"/>
+            <a:t>regularization</a:t>
+          </a:r>
+          <a:r>
+            <a:rPr lang="it-IT" sz="2700" kern="1200" dirty="0"/>
+            <a:t> </a:t>
+          </a:r>
+          <a:r>
+            <a:rPr lang="it-IT" sz="2700" kern="1200" dirty="0" err="1"/>
+            <a:t>is</a:t>
+          </a:r>
+          <a:r>
+            <a:rPr lang="it-IT" sz="2700" kern="1200" dirty="0"/>
+            <a:t> </a:t>
+          </a:r>
+          <a:r>
+            <a:rPr lang="it-IT" sz="2700" kern="1200" dirty="0" err="1"/>
+            <a:t>actually</a:t>
+          </a:r>
+          <a:r>
+            <a:rPr lang="it-IT" sz="2700" kern="1200" dirty="0"/>
+            <a:t> </a:t>
+          </a:r>
+          <a:r>
+            <a:rPr lang="it-IT" sz="2700" kern="1200" dirty="0" err="1"/>
+            <a:t>capable</a:t>
+          </a:r>
+          <a:r>
+            <a:rPr lang="it-IT" sz="2700" kern="1200" dirty="0"/>
+            <a:t> of </a:t>
+          </a:r>
+          <a:r>
+            <a:rPr lang="it-IT" sz="2700" kern="1200" dirty="0" err="1"/>
+            <a:t>improving</a:t>
+          </a:r>
+          <a:r>
+            <a:rPr lang="it-IT" sz="2700" kern="1200" dirty="0"/>
+            <a:t> </a:t>
+          </a:r>
+          <a:r>
+            <a:rPr lang="it-IT" sz="2700" kern="1200" dirty="0" err="1"/>
+            <a:t>robustness</a:t>
+          </a:r>
+          <a:r>
+            <a:rPr lang="it-IT" sz="2700" kern="1200" dirty="0"/>
+            <a:t>. </a:t>
+          </a:r>
+          <a:endParaRPr lang="en-US" sz="2700" kern="1200" dirty="0"/>
         </a:p>
       </dsp:txBody>
       <dsp:txXfrm>
@@ -9778,7 +10452,7 @@
           <a:p>
             <a:fld id="{141175B9-E39C-42E0-B6CC-63D1DFA43D1A}" type="datetimeFigureOut">
               <a:rPr lang="it-IT" smtClean="0"/>
-              <a:t>06/06/2025</a:t>
+              <a:t>15/06/2025</a:t>
             </a:fld>
             <a:endParaRPr lang="it-IT"/>
           </a:p>
@@ -9956,7 +10630,7 @@
           <a:p>
             <a:fld id="{1BEDFC1C-1464-4AA7-ADC8-617BBF2A616C}" type="datetimeFigureOut">
               <a:rPr lang="it-IT" smtClean="0"/>
-              <a:t>06/06/2025</a:t>
+              <a:t>15/06/2025</a:t>
             </a:fld>
             <a:endParaRPr lang="it-IT"/>
           </a:p>
@@ -10377,7 +11051,7 @@
           <a:p>
             <a:fld id="{0A7AEB39-4EB4-46F0-B79B-9651DB25992F}" type="datetime1">
               <a:rPr lang="en-US" smtClean="0"/>
-              <a:t>6/6/2025</a:t>
+              <a:t>6/15/2025</a:t>
             </a:fld>
             <a:endParaRPr lang="en-US"/>
           </a:p>
@@ -10581,7 +11255,7 @@
           <a:p>
             <a:fld id="{FE675B69-AE4C-4B96-9681-0657EA256625}" type="datetime1">
               <a:rPr lang="en-US" smtClean="0"/>
-              <a:t>6/6/2025</a:t>
+              <a:t>6/15/2025</a:t>
             </a:fld>
             <a:endParaRPr lang="en-US"/>
           </a:p>
@@ -10795,7 +11469,7 @@
           <a:p>
             <a:fld id="{FA42949B-2980-4851-BE50-25F06AAEB566}" type="datetime1">
               <a:rPr lang="en-US" smtClean="0"/>
-              <a:t>6/6/2025</a:t>
+              <a:t>6/15/2025</a:t>
             </a:fld>
             <a:endParaRPr lang="en-US"/>
           </a:p>
@@ -10999,7 +11673,7 @@
           <a:p>
             <a:fld id="{7E496969-8FFB-47C7-98ED-8020C88DA1F4}" type="datetime1">
               <a:rPr lang="en-US" smtClean="0"/>
-              <a:t>6/6/2025</a:t>
+              <a:t>6/15/2025</a:t>
             </a:fld>
             <a:endParaRPr lang="en-US"/>
           </a:p>
@@ -11279,7 +11953,7 @@
           <a:p>
             <a:fld id="{4FC415DA-4CD7-43F8-AB7E-6B07B8EDDB2E}" type="datetime1">
               <a:rPr lang="en-US" smtClean="0"/>
-              <a:t>6/6/2025</a:t>
+              <a:t>6/15/2025</a:t>
             </a:fld>
             <a:endParaRPr lang="en-US"/>
           </a:p>
@@ -11556,7 +12230,7 @@
           <a:p>
             <a:fld id="{CE643685-F7F2-43E1-8738-3F7457DAD190}" type="datetime1">
               <a:rPr lang="en-US" smtClean="0"/>
-              <a:t>6/6/2025</a:t>
+              <a:t>6/15/2025</a:t>
             </a:fld>
             <a:endParaRPr lang="en-US"/>
           </a:p>
@@ -11983,7 +12657,7 @@
           <a:p>
             <a:fld id="{498249C0-2FBE-44CA-AB33-93582E56C3C9}" type="datetime1">
               <a:rPr lang="en-US" smtClean="0"/>
-              <a:t>6/6/2025</a:t>
+              <a:t>6/15/2025</a:t>
             </a:fld>
             <a:endParaRPr lang="en-US"/>
           </a:p>
@@ -12129,7 +12803,7 @@
           <a:p>
             <a:fld id="{5FED4A6F-BB0E-4C05-93B9-19FAB61675C3}" type="datetime1">
               <a:rPr lang="en-US" smtClean="0"/>
-              <a:t>6/6/2025</a:t>
+              <a:t>6/15/2025</a:t>
             </a:fld>
             <a:endParaRPr lang="en-US"/>
           </a:p>
@@ -12246,7 +12920,7 @@
           <a:p>
             <a:fld id="{B6816B11-EFD1-4D0C-9A19-30F20645F13E}" type="datetime1">
               <a:rPr lang="en-US" smtClean="0"/>
-              <a:t>6/6/2025</a:t>
+              <a:t>6/15/2025</a:t>
             </a:fld>
             <a:endParaRPr lang="en-US"/>
           </a:p>
@@ -12563,7 +13237,7 @@
           <a:p>
             <a:fld id="{A2036CB5-4D95-40B9-AF7D-B6CDD5CCED9E}" type="datetime1">
               <a:rPr lang="en-US" smtClean="0"/>
-              <a:t>6/6/2025</a:t>
+              <a:t>6/15/2025</a:t>
             </a:fld>
             <a:endParaRPr lang="en-US"/>
           </a:p>
@@ -12860,7 +13534,7 @@
           <a:p>
             <a:fld id="{92BADFE3-3BBD-4F8A-B281-F3964790ED24}" type="datetime1">
               <a:rPr lang="en-US" smtClean="0"/>
-              <a:t>6/6/2025</a:t>
+              <a:t>6/15/2025</a:t>
             </a:fld>
             <a:endParaRPr lang="en-US"/>
           </a:p>
@@ -13106,7 +13780,7 @@
           <a:p>
             <a:fld id="{E66BC92C-3647-4C36-8FE9-00548F749DC6}" type="datetime1">
               <a:rPr lang="en-US" smtClean="0"/>
-              <a:t>6/6/2025</a:t>
+              <a:t>6/15/2025</a:t>
             </a:fld>
             <a:endParaRPr lang="en-US"/>
           </a:p>
@@ -14100,13 +14774,13 @@
   <p:clrMapOvr>
     <a:masterClrMapping/>
   </p:clrMapOvr>
-  <mc:AlternateContent xmlns:mc="http://schemas.openxmlformats.org/markup-compatibility/2006">
-    <mc:Choice xmlns:p159="http://schemas.microsoft.com/office/powerpoint/2015/09/main" Requires="p159">
+  <mc:AlternateContent xmlns:mc="http://schemas.openxmlformats.org/markup-compatibility/2006" xmlns:p159="http://schemas.microsoft.com/office/powerpoint/2015/09/main">
+    <mc:Choice Requires="p159">
       <p:transition xmlns:p14="http://schemas.microsoft.com/office/powerpoint/2010/main" spd="slow" p14:dur="2000">
         <p159:morph option="byObject"/>
       </p:transition>
     </mc:Choice>
-    <mc:Fallback>
+    <mc:Fallback xmlns="">
       <p:transition spd="slow">
         <p:fade/>
       </p:transition>
@@ -14269,7 +14943,7 @@
           <a:p>
             <a:fld id="{E60DFD16-E4D7-4412-B907-19110A779FCF}" type="datetime1">
               <a:rPr lang="en-US" smtClean="0"/>
-              <a:t>6/6/2025</a:t>
+              <a:t>6/15/2025</a:t>
             </a:fld>
             <a:endParaRPr lang="en-US"/>
           </a:p>
@@ -14307,7 +14981,7 @@
             </a:fld>
             <a:r>
               <a:rPr lang="en-US" dirty="0"/>
-              <a:t>/23</a:t>
+              <a:t>/25</a:t>
             </a:r>
           </a:p>
         </p:txBody>
@@ -14741,13 +15415,13 @@
   <p:clrMapOvr>
     <a:masterClrMapping/>
   </p:clrMapOvr>
-  <mc:AlternateContent xmlns:mc="http://schemas.openxmlformats.org/markup-compatibility/2006">
-    <mc:Choice xmlns:p159="http://schemas.microsoft.com/office/powerpoint/2015/09/main" Requires="p159">
+  <mc:AlternateContent xmlns:mc="http://schemas.openxmlformats.org/markup-compatibility/2006" xmlns:p159="http://schemas.microsoft.com/office/powerpoint/2015/09/main">
+    <mc:Choice Requires="p159">
       <p:transition xmlns:p14="http://schemas.microsoft.com/office/powerpoint/2010/main" spd="slow" p14:dur="2000">
         <p159:morph option="byObject"/>
       </p:transition>
     </mc:Choice>
-    <mc:Fallback>
+    <mc:Fallback xmlns="">
       <p:transition spd="slow">
         <p:fade/>
       </p:transition>
@@ -14813,8 +15487,8 @@
           </a:p>
         </p:txBody>
       </p:sp>
-      <mc:AlternateContent xmlns:mc="http://schemas.openxmlformats.org/markup-compatibility/2006">
-        <mc:Choice xmlns:a14="http://schemas.microsoft.com/office/drawing/2010/main" Requires="a14">
+      <mc:AlternateContent xmlns:mc="http://schemas.openxmlformats.org/markup-compatibility/2006" xmlns:a14="http://schemas.microsoft.com/office/drawing/2010/main">
+        <mc:Choice Requires="a14">
           <p:sp>
             <p:nvSpPr>
               <p:cNvPr id="3" name="Segnaposto contenuto 2">
@@ -15310,7 +15984,7 @@
             </p:txBody>
           </p:sp>
         </mc:Choice>
-        <mc:Fallback>
+        <mc:Fallback xmlns="">
           <p:sp>
             <p:nvSpPr>
               <p:cNvPr id="3" name="Segnaposto contenuto 2">
@@ -15377,7 +16051,7 @@
           <a:p>
             <a:fld id="{E39A02F0-65E1-4A48-AD77-3F2D8D8A42A6}" type="datetime1">
               <a:rPr lang="en-US" smtClean="0"/>
-              <a:t>6/6/2025</a:t>
+              <a:t>6/15/2025</a:t>
             </a:fld>
             <a:endParaRPr lang="en-US"/>
           </a:p>
@@ -15415,7 +16089,7 @@
             </a:fld>
             <a:r>
               <a:rPr lang="en-US" dirty="0"/>
-              <a:t>/23</a:t>
+              <a:t>/25</a:t>
             </a:r>
           </a:p>
         </p:txBody>
@@ -15430,13 +16104,13 @@
   <p:clrMapOvr>
     <a:masterClrMapping/>
   </p:clrMapOvr>
-  <mc:AlternateContent xmlns:mc="http://schemas.openxmlformats.org/markup-compatibility/2006">
-    <mc:Choice xmlns:p159="http://schemas.microsoft.com/office/powerpoint/2015/09/main" Requires="p159">
+  <mc:AlternateContent xmlns:mc="http://schemas.openxmlformats.org/markup-compatibility/2006" xmlns:p159="http://schemas.microsoft.com/office/powerpoint/2015/09/main">
+    <mc:Choice Requires="p159">
       <p:transition xmlns:p14="http://schemas.microsoft.com/office/powerpoint/2010/main" spd="slow" p14:dur="2000">
         <p159:morph option="byObject"/>
       </p:transition>
     </mc:Choice>
-    <mc:Fallback>
+    <mc:Fallback xmlns="">
       <p:transition spd="slow">
         <p:fade/>
       </p:transition>
@@ -15971,7 +16645,7 @@
           <a:p>
             <a:fld id="{5441DF33-5F1C-47A9-944A-BF70FB300044}" type="datetime1">
               <a:rPr lang="en-US" smtClean="0"/>
-              <a:t>6/6/2025</a:t>
+              <a:t>6/15/2025</a:t>
             </a:fld>
             <a:endParaRPr lang="en-US"/>
           </a:p>
@@ -16009,7 +16683,7 @@
             </a:fld>
             <a:r>
               <a:rPr lang="en-US" dirty="0"/>
-              <a:t>/23</a:t>
+              <a:t>/25</a:t>
             </a:r>
           </a:p>
         </p:txBody>
@@ -16024,13 +16698,13 @@
   <p:clrMapOvr>
     <a:overrideClrMapping bg1="dk1" tx1="lt1" bg2="dk2" tx2="lt2" accent1="accent1" accent2="accent2" accent3="accent3" accent4="accent4" accent5="accent5" accent6="accent6" hlink="hlink" folHlink="folHlink"/>
   </p:clrMapOvr>
-  <mc:AlternateContent xmlns:mc="http://schemas.openxmlformats.org/markup-compatibility/2006">
-    <mc:Choice xmlns:p159="http://schemas.microsoft.com/office/powerpoint/2015/09/main" Requires="p159">
+  <mc:AlternateContent xmlns:mc="http://schemas.openxmlformats.org/markup-compatibility/2006" xmlns:p159="http://schemas.microsoft.com/office/powerpoint/2015/09/main">
+    <mc:Choice Requires="p159">
       <p:transition xmlns:p14="http://schemas.microsoft.com/office/powerpoint/2010/main" spd="slow" p14:dur="2000">
         <p159:morph option="byObject"/>
       </p:transition>
     </mc:Choice>
-    <mc:Fallback>
+    <mc:Fallback xmlns="">
       <p:transition spd="slow">
         <p:fade/>
       </p:transition>
@@ -16116,7 +16790,7 @@
         </p:nvSpPr>
         <p:spPr>
           <a:xfrm>
-            <a:off x="700634" y="2227172"/>
+            <a:off x="700635" y="1616785"/>
             <a:ext cx="10691265" cy="4922127"/>
           </a:xfrm>
         </p:spPr>
@@ -16227,7 +16901,7 @@
           <a:p>
             <a:fld id="{C6643A0F-00E4-4F0B-9B3D-25390A6762A7}" type="datetime1">
               <a:rPr lang="en-US" smtClean="0"/>
-              <a:t>6/6/2025</a:t>
+              <a:t>6/15/2025</a:t>
             </a:fld>
             <a:endParaRPr lang="en-US"/>
           </a:p>
@@ -16265,7 +16939,7 @@
             </a:fld>
             <a:r>
               <a:rPr lang="en-US" dirty="0"/>
-              <a:t>/23</a:t>
+              <a:t>/25</a:t>
             </a:r>
           </a:p>
         </p:txBody>
@@ -16285,7 +16959,7 @@
           <p:nvPr>
             <p:extLst>
               <p:ext uri="{D42A27DB-BD31-4B8C-83A1-F6EECF244321}">
-                <p14:modId xmlns:p14="http://schemas.microsoft.com/office/powerpoint/2010/main" val="2332246502"/>
+                <p14:modId xmlns:p14="http://schemas.microsoft.com/office/powerpoint/2010/main" val="4211962425"/>
               </p:ext>
             </p:extLst>
           </p:nvPr>
@@ -16476,7 +17150,7 @@
                       <a:pPr algn="ctr"/>
                       <a:r>
                         <a:rPr lang="it-IT" dirty="0"/>
-                        <a:t>99,84% </a:t>
+                        <a:t>99.84% </a:t>
                       </a:r>
                     </a:p>
                   </a:txBody>
@@ -16490,7 +17164,7 @@
                       <a:pPr algn="ctr"/>
                       <a:r>
                         <a:rPr lang="it-IT" dirty="0"/>
-                        <a:t>99,60%</a:t>
+                        <a:t>99.60%</a:t>
                       </a:r>
                     </a:p>
                   </a:txBody>
@@ -16504,7 +17178,7 @@
                       <a:pPr algn="ctr"/>
                       <a:r>
                         <a:rPr lang="it-IT" dirty="0"/>
-                        <a:t>99,9%</a:t>
+                        <a:t>99.9%</a:t>
                       </a:r>
                     </a:p>
                   </a:txBody>
@@ -16518,7 +17192,7 @@
                       <a:pPr algn="ctr"/>
                       <a:r>
                         <a:rPr lang="it-IT" dirty="0"/>
-                        <a:t>99,75%</a:t>
+                        <a:t>99.75%</a:t>
                       </a:r>
                     </a:p>
                   </a:txBody>
@@ -16532,7 +17206,7 @@
                       <a:pPr algn="ctr"/>
                       <a:r>
                         <a:rPr lang="it-IT" dirty="0"/>
-                        <a:t>99,9%</a:t>
+                        <a:t>99.9%</a:t>
                       </a:r>
                     </a:p>
                   </a:txBody>
@@ -16567,7 +17241,7 @@
                       <a:pPr algn="ctr"/>
                       <a:r>
                         <a:rPr lang="it-IT" dirty="0"/>
-                        <a:t>99,77%</a:t>
+                        <a:t>99.77%</a:t>
                       </a:r>
                     </a:p>
                   </a:txBody>
@@ -16581,7 +17255,7 @@
                       <a:pPr algn="ctr"/>
                       <a:r>
                         <a:rPr lang="it-IT" dirty="0"/>
-                        <a:t>99,44%</a:t>
+                        <a:t>99.44%</a:t>
                       </a:r>
                     </a:p>
                   </a:txBody>
@@ -16595,7 +17269,7 @@
                       <a:pPr algn="ctr"/>
                       <a:r>
                         <a:rPr lang="it-IT" dirty="0"/>
-                        <a:t>99,85%</a:t>
+                        <a:t>99.85%</a:t>
                       </a:r>
                     </a:p>
                   </a:txBody>
@@ -16609,7 +17283,7 @@
                       <a:pPr algn="ctr"/>
                       <a:r>
                         <a:rPr lang="it-IT" dirty="0"/>
-                        <a:t>99,65%</a:t>
+                        <a:t>99.65%</a:t>
                       </a:r>
                     </a:p>
                   </a:txBody>
@@ -16623,7 +17297,7 @@
                       <a:pPr algn="ctr"/>
                       <a:r>
                         <a:rPr lang="it-IT" dirty="0"/>
-                        <a:t>99,85%</a:t>
+                        <a:t>99.85%</a:t>
                       </a:r>
                     </a:p>
                   </a:txBody>
@@ -16649,13 +17323,13 @@
   <p:clrMapOvr>
     <a:masterClrMapping/>
   </p:clrMapOvr>
-  <mc:AlternateContent xmlns:mc="http://schemas.openxmlformats.org/markup-compatibility/2006">
-    <mc:Choice xmlns:p159="http://schemas.microsoft.com/office/powerpoint/2015/09/main" Requires="p159">
+  <mc:AlternateContent xmlns:mc="http://schemas.openxmlformats.org/markup-compatibility/2006" xmlns:p159="http://schemas.microsoft.com/office/powerpoint/2015/09/main">
+    <mc:Choice Requires="p159">
       <p:transition xmlns:p14="http://schemas.microsoft.com/office/powerpoint/2010/main" spd="slow" p14:dur="2000">
         <p159:morph option="byObject"/>
       </p:transition>
     </mc:Choice>
-    <mc:Fallback>
+    <mc:Fallback xmlns="">
       <p:transition spd="slow">
         <p:fade/>
       </p:transition>
@@ -16948,7 +17622,7 @@
             </a:pPr>
             <a:fld id="{3B5D4BD4-7206-4BA0-A1B6-26EDEA6935C8}" type="datetime1">
               <a:rPr lang="en-US" smtClean="0"/>
-              <a:t>6/6/2025</a:t>
+              <a:t>6/15/2025</a:t>
             </a:fld>
             <a:endParaRPr lang="en-US"/>
           </a:p>
@@ -17004,7 +17678,7 @@
             </a:fld>
             <a:r>
               <a:rPr lang="en-US" dirty="0"/>
-              <a:t>/23</a:t>
+              <a:t>/25</a:t>
             </a:r>
           </a:p>
         </p:txBody>
@@ -17050,13 +17724,13 @@
   <p:clrMapOvr>
     <a:masterClrMapping/>
   </p:clrMapOvr>
-  <mc:AlternateContent xmlns:mc="http://schemas.openxmlformats.org/markup-compatibility/2006">
-    <mc:Choice xmlns:p159="http://schemas.microsoft.com/office/powerpoint/2015/09/main" Requires="p159">
+  <mc:AlternateContent xmlns:mc="http://schemas.openxmlformats.org/markup-compatibility/2006" xmlns:p159="http://schemas.microsoft.com/office/powerpoint/2015/09/main">
+    <mc:Choice Requires="p159">
       <p:transition xmlns:p14="http://schemas.microsoft.com/office/powerpoint/2010/main" spd="slow" p14:dur="2000">
         <p159:morph option="byObject"/>
       </p:transition>
     </mc:Choice>
-    <mc:Fallback>
+    <mc:Fallback xmlns="">
       <p:transition spd="slow">
         <p:fade/>
       </p:transition>
@@ -17183,7 +17857,7 @@
           <a:p>
             <a:fld id="{61A2C637-3E11-486B-AB52-A94D6BCE90E0}" type="datetime1">
               <a:rPr lang="en-US" smtClean="0"/>
-              <a:t>6/6/2025</a:t>
+              <a:t>6/15/2025</a:t>
             </a:fld>
             <a:endParaRPr lang="en-US"/>
           </a:p>
@@ -17221,7 +17895,7 @@
             </a:fld>
             <a:r>
               <a:rPr lang="en-US" dirty="0"/>
-              <a:t>/23</a:t>
+              <a:t>/25</a:t>
             </a:r>
           </a:p>
         </p:txBody>
@@ -17712,8 +18386,8 @@
           </a:p>
         </p:txBody>
       </p:sp>
-      <mc:AlternateContent xmlns:mc="http://schemas.openxmlformats.org/markup-compatibility/2006">
-        <mc:Choice xmlns:a14="http://schemas.microsoft.com/office/drawing/2010/main" Requires="a14">
+      <mc:AlternateContent xmlns:mc="http://schemas.openxmlformats.org/markup-compatibility/2006" xmlns:a14="http://schemas.microsoft.com/office/drawing/2010/main">
+        <mc:Choice Requires="a14">
           <p:sp>
             <p:nvSpPr>
               <p:cNvPr id="8" name="CasellaDiTesto 7">
@@ -17945,7 +18619,7 @@
             </p:txBody>
           </p:sp>
         </mc:Choice>
-        <mc:Fallback>
+        <mc:Fallback xmlns="">
           <p:sp>
             <p:nvSpPr>
               <p:cNvPr id="8" name="CasellaDiTesto 7">
@@ -18036,13 +18710,13 @@
   <p:clrMapOvr>
     <a:masterClrMapping/>
   </p:clrMapOvr>
-  <mc:AlternateContent xmlns:mc="http://schemas.openxmlformats.org/markup-compatibility/2006">
-    <mc:Choice xmlns:p159="http://schemas.microsoft.com/office/powerpoint/2015/09/main" Requires="p159">
+  <mc:AlternateContent xmlns:mc="http://schemas.openxmlformats.org/markup-compatibility/2006" xmlns:p159="http://schemas.microsoft.com/office/powerpoint/2015/09/main">
+    <mc:Choice Requires="p159">
       <p:transition xmlns:p14="http://schemas.microsoft.com/office/powerpoint/2010/main" spd="slow" p14:dur="2000">
         <p159:morph option="byObject"/>
       </p:transition>
     </mc:Choice>
-    <mc:Fallback>
+    <mc:Fallback xmlns="">
       <p:transition spd="slow">
         <p:fade/>
       </p:transition>
@@ -18158,7 +18832,7 @@
           <a:p>
             <a:fld id="{4647E414-724E-4E15-8DE6-25177C62C6CE}" type="datetime1">
               <a:rPr lang="en-US" smtClean="0"/>
-              <a:t>6/6/2025</a:t>
+              <a:t>6/15/2025</a:t>
             </a:fld>
             <a:endParaRPr lang="en-US"/>
           </a:p>
@@ -18196,7 +18870,7 @@
             </a:fld>
             <a:r>
               <a:rPr lang="en-US" dirty="0"/>
-              <a:t>/23</a:t>
+              <a:t>/25</a:t>
             </a:r>
           </a:p>
         </p:txBody>
@@ -18761,13 +19435,13 @@
   <p:clrMapOvr>
     <a:masterClrMapping/>
   </p:clrMapOvr>
-  <mc:AlternateContent xmlns:mc="http://schemas.openxmlformats.org/markup-compatibility/2006">
-    <mc:Choice xmlns:p159="http://schemas.microsoft.com/office/powerpoint/2015/09/main" Requires="p159">
+  <mc:AlternateContent xmlns:mc="http://schemas.openxmlformats.org/markup-compatibility/2006" xmlns:p159="http://schemas.microsoft.com/office/powerpoint/2015/09/main">
+    <mc:Choice Requires="p159">
       <p:transition xmlns:p14="http://schemas.microsoft.com/office/powerpoint/2010/main" spd="slow" p14:dur="2000">
         <p159:morph option="byObject"/>
       </p:transition>
     </mc:Choice>
-    <mc:Fallback>
+    <mc:Fallback xmlns="">
       <p:transition spd="slow">
         <p:fade/>
       </p:transition>
@@ -18916,7 +19590,7 @@
           <a:p>
             <a:fld id="{D2B87A15-681E-424D-80F3-D1732F8861C7}" type="datetime1">
               <a:rPr lang="en-US" smtClean="0"/>
-              <a:t>6/6/2025</a:t>
+              <a:t>6/15/2025</a:t>
             </a:fld>
             <a:endParaRPr lang="en-US"/>
           </a:p>
@@ -18954,7 +19628,7 @@
             </a:fld>
             <a:r>
               <a:rPr lang="en-US" dirty="0"/>
-              <a:t>/23</a:t>
+              <a:t>/25</a:t>
             </a:r>
           </a:p>
         </p:txBody>
@@ -19005,13 +19679,13 @@
   <p:clrMapOvr>
     <a:masterClrMapping/>
   </p:clrMapOvr>
-  <mc:AlternateContent xmlns:mc="http://schemas.openxmlformats.org/markup-compatibility/2006">
-    <mc:Choice xmlns:p159="http://schemas.microsoft.com/office/powerpoint/2015/09/main" Requires="p159">
+  <mc:AlternateContent xmlns:mc="http://schemas.openxmlformats.org/markup-compatibility/2006" xmlns:p159="http://schemas.microsoft.com/office/powerpoint/2015/09/main">
+    <mc:Choice Requires="p159">
       <p:transition xmlns:p14="http://schemas.microsoft.com/office/powerpoint/2010/main" spd="slow" p14:dur="2000">
         <p159:morph option="byObject"/>
       </p:transition>
     </mc:Choice>
-    <mc:Fallback>
+    <mc:Fallback xmlns="">
       <p:transition spd="slow">
         <p:fade/>
       </p:transition>
@@ -19097,7 +19771,7 @@
         </p:nvSpPr>
         <p:spPr>
           <a:xfrm>
-            <a:off x="700634" y="967936"/>
+            <a:off x="700635" y="844049"/>
             <a:ext cx="10691265" cy="4922127"/>
           </a:xfrm>
         </p:spPr>
@@ -19154,7 +19828,7 @@
           <a:p>
             <a:fld id="{5BB1D6AD-68FB-4B69-890D-0762D504BB10}" type="datetime1">
               <a:rPr lang="en-US" smtClean="0"/>
-              <a:t>6/6/2025</a:t>
+              <a:t>6/15/2025</a:t>
             </a:fld>
             <a:endParaRPr lang="en-US"/>
           </a:p>
@@ -19192,7 +19866,7 @@
             </a:fld>
             <a:r>
               <a:rPr lang="en-US" dirty="0"/>
-              <a:t>/23</a:t>
+              <a:t>/25</a:t>
             </a:r>
           </a:p>
         </p:txBody>
@@ -19212,14 +19886,14 @@
           <p:nvPr>
             <p:extLst>
               <p:ext uri="{D42A27DB-BD31-4B8C-83A1-F6EECF244321}">
-                <p14:modId xmlns:p14="http://schemas.microsoft.com/office/powerpoint/2010/main" val="1243006176"/>
+                <p14:modId xmlns:p14="http://schemas.microsoft.com/office/powerpoint/2010/main" val="3156346877"/>
               </p:ext>
             </p:extLst>
           </p:nvPr>
         </p:nvGraphicFramePr>
         <p:xfrm>
-          <a:off x="1264541" y="2327420"/>
-          <a:ext cx="9563449" cy="2585720"/>
+          <a:off x="430653" y="1258533"/>
+          <a:ext cx="11350360" cy="4805680"/>
         </p:xfrm>
         <a:graphic>
           <a:graphicData uri="http://schemas.openxmlformats.org/drawingml/2006/table">
@@ -19228,52 +19902,59 @@
                 <a:tableStyleId>{5C22544A-7EE6-4342-B048-85BDC9FD1C3A}</a:tableStyleId>
               </a:tblPr>
               <a:tblGrid>
-                <a:gridCol w="1366207">
+                <a:gridCol w="1418795">
                   <a:extLst>
                     <a:ext uri="{9D8B030D-6E8A-4147-A177-3AD203B41FA5}">
                       <a16:colId xmlns:a16="http://schemas.microsoft.com/office/drawing/2014/main" val="2766159086"/>
                     </a:ext>
                   </a:extLst>
                 </a:gridCol>
-                <a:gridCol w="1366207">
+                <a:gridCol w="1418795">
                   <a:extLst>
                     <a:ext uri="{9D8B030D-6E8A-4147-A177-3AD203B41FA5}">
                       <a16:colId xmlns:a16="http://schemas.microsoft.com/office/drawing/2014/main" val="3767278069"/>
                     </a:ext>
                   </a:extLst>
                 </a:gridCol>
-                <a:gridCol w="1366207">
+                <a:gridCol w="1418795">
                   <a:extLst>
                     <a:ext uri="{9D8B030D-6E8A-4147-A177-3AD203B41FA5}">
                       <a16:colId xmlns:a16="http://schemas.microsoft.com/office/drawing/2014/main" val="161951504"/>
                     </a:ext>
                   </a:extLst>
                 </a:gridCol>
-                <a:gridCol w="1366207">
+                <a:gridCol w="1418795">
                   <a:extLst>
                     <a:ext uri="{9D8B030D-6E8A-4147-A177-3AD203B41FA5}">
                       <a16:colId xmlns:a16="http://schemas.microsoft.com/office/drawing/2014/main" val="4094475366"/>
                     </a:ext>
                   </a:extLst>
                 </a:gridCol>
-                <a:gridCol w="1366207">
+                <a:gridCol w="1418795">
                   <a:extLst>
                     <a:ext uri="{9D8B030D-6E8A-4147-A177-3AD203B41FA5}">
                       <a16:colId xmlns:a16="http://schemas.microsoft.com/office/drawing/2014/main" val="1704147285"/>
                     </a:ext>
                   </a:extLst>
                 </a:gridCol>
-                <a:gridCol w="1366207">
+                <a:gridCol w="1418795">
                   <a:extLst>
                     <a:ext uri="{9D8B030D-6E8A-4147-A177-3AD203B41FA5}">
                       <a16:colId xmlns:a16="http://schemas.microsoft.com/office/drawing/2014/main" val="4275181983"/>
                     </a:ext>
                   </a:extLst>
                 </a:gridCol>
-                <a:gridCol w="1366207">
+                <a:gridCol w="1433954">
                   <a:extLst>
                     <a:ext uri="{9D8B030D-6E8A-4147-A177-3AD203B41FA5}">
                       <a16:colId xmlns:a16="http://schemas.microsoft.com/office/drawing/2014/main" val="131746807"/>
+                    </a:ext>
+                  </a:extLst>
+                </a:gridCol>
+                <a:gridCol w="1403636">
+                  <a:extLst>
+                    <a:ext uri="{9D8B030D-6E8A-4147-A177-3AD203B41FA5}">
+                      <a16:colId xmlns:a16="http://schemas.microsoft.com/office/drawing/2014/main" val="3116411157"/>
                     </a:ext>
                   </a:extLst>
                 </a:gridCol>
@@ -19285,7 +19966,7 @@
                     <a:lstStyle/>
                     <a:p>
                       <a:r>
-                        <a:rPr lang="it-IT" dirty="0"/>
+                        <a:rPr lang="it-IT" u="none" dirty="0"/>
                         <a:t>Attack</a:t>
                       </a:r>
                     </a:p>
@@ -19296,6 +19977,2252 @@
                     </a:solidFill>
                   </a:tcPr>
                 </a:tc>
+                <a:tc>
+                  <a:txBody>
+                    <a:bodyPr/>
+                    <a:lstStyle/>
+                    <a:p>
+                      <a:r>
+                        <a:rPr lang="it-IT" u="none" dirty="0"/>
+                        <a:t>Model</a:t>
+                      </a:r>
+                    </a:p>
+                  </a:txBody>
+                  <a:tcPr>
+                    <a:solidFill>
+                      <a:schemeClr val="tx1"/>
+                    </a:solidFill>
+                  </a:tcPr>
+                </a:tc>
+                <a:tc>
+                  <a:txBody>
+                    <a:bodyPr/>
+                    <a:lstStyle/>
+                    <a:p>
+                      <a:r>
+                        <a:rPr lang="it-IT" u="none" dirty="0" err="1"/>
+                        <a:t>Accuracy</a:t>
+                      </a:r>
+                      <a:endParaRPr lang="it-IT" u="none" dirty="0"/>
+                    </a:p>
+                  </a:txBody>
+                  <a:tcPr>
+                    <a:solidFill>
+                      <a:schemeClr val="tx1"/>
+                    </a:solidFill>
+                  </a:tcPr>
+                </a:tc>
+                <a:tc>
+                  <a:txBody>
+                    <a:bodyPr/>
+                    <a:lstStyle/>
+                    <a:p>
+                      <a:r>
+                        <a:rPr lang="it-IT" u="none" dirty="0"/>
+                        <a:t>Precision</a:t>
+                      </a:r>
+                    </a:p>
+                  </a:txBody>
+                  <a:tcPr>
+                    <a:solidFill>
+                      <a:schemeClr val="tx1"/>
+                    </a:solidFill>
+                  </a:tcPr>
+                </a:tc>
+                <a:tc>
+                  <a:txBody>
+                    <a:bodyPr/>
+                    <a:lstStyle/>
+                    <a:p>
+                      <a:r>
+                        <a:rPr lang="it-IT" u="none" dirty="0"/>
+                        <a:t>Recall</a:t>
+                      </a:r>
+                    </a:p>
+                  </a:txBody>
+                  <a:tcPr>
+                    <a:solidFill>
+                      <a:schemeClr val="tx1"/>
+                    </a:solidFill>
+                  </a:tcPr>
+                </a:tc>
+                <a:tc>
+                  <a:txBody>
+                    <a:bodyPr/>
+                    <a:lstStyle/>
+                    <a:p>
+                      <a:r>
+                        <a:rPr lang="it-IT" u="none" dirty="0"/>
+                        <a:t>F1-Score</a:t>
+                      </a:r>
+                    </a:p>
+                  </a:txBody>
+                  <a:tcPr>
+                    <a:solidFill>
+                      <a:schemeClr val="tx1"/>
+                    </a:solidFill>
+                  </a:tcPr>
+                </a:tc>
+                <a:tc>
+                  <a:txBody>
+                    <a:bodyPr/>
+                    <a:lstStyle/>
+                    <a:p>
+                      <a:r>
+                        <a:rPr lang="it-IT" u="none" dirty="0"/>
+                        <a:t>AUC</a:t>
+                      </a:r>
+                    </a:p>
+                  </a:txBody>
+                  <a:tcPr>
+                    <a:solidFill>
+                      <a:schemeClr val="tx1"/>
+                    </a:solidFill>
+                  </a:tcPr>
+                </a:tc>
+                <a:tc>
+                  <a:txBody>
+                    <a:bodyPr/>
+                    <a:lstStyle/>
+                    <a:p>
+                      <a:r>
+                        <a:rPr lang="it-IT" u="sng" dirty="0" err="1">
+                          <a:effectLst>
+                            <a:outerShdw blurRad="38100" dist="38100" dir="2700000" algn="tl">
+                              <a:srgbClr val="000000">
+                                <a:alpha val="43137"/>
+                              </a:srgbClr>
+                            </a:outerShdw>
+                          </a:effectLst>
+                        </a:rPr>
+                        <a:t>Average</a:t>
+                      </a:r>
+                      <a:endParaRPr lang="it-IT" u="sng" dirty="0">
+                        <a:effectLst>
+                          <a:outerShdw blurRad="38100" dist="38100" dir="2700000" algn="tl">
+                            <a:srgbClr val="000000">
+                              <a:alpha val="43137"/>
+                            </a:srgbClr>
+                          </a:outerShdw>
+                        </a:effectLst>
+                      </a:endParaRPr>
+                    </a:p>
+                  </a:txBody>
+                  <a:tcPr>
+                    <a:solidFill>
+                      <a:schemeClr val="tx1"/>
+                    </a:solidFill>
+                  </a:tcPr>
+                </a:tc>
+                <a:extLst>
+                  <a:ext uri="{0D108BD9-81ED-4DB2-BD59-A6C34878D82A}">
+                    <a16:rowId xmlns:a16="http://schemas.microsoft.com/office/drawing/2014/main" val="776063492"/>
+                  </a:ext>
+                </a:extLst>
+              </a:tr>
+              <a:tr h="0">
+                <a:tc>
+                  <a:txBody>
+                    <a:bodyPr/>
+                    <a:lstStyle/>
+                    <a:p>
+                      <a:r>
+                        <a:rPr lang="it-IT" u="none" dirty="0"/>
+                        <a:t>FGSM</a:t>
+                      </a:r>
+                    </a:p>
+                  </a:txBody>
+                  <a:tcPr/>
+                </a:tc>
+                <a:tc>
+                  <a:txBody>
+                    <a:bodyPr/>
+                    <a:lstStyle/>
+                    <a:p>
+                      <a:r>
+                        <a:rPr lang="it-IT" u="none" dirty="0"/>
+                        <a:t>Baseline</a:t>
+                      </a:r>
+                    </a:p>
+                  </a:txBody>
+                  <a:tcPr/>
+                </a:tc>
+                <a:tc>
+                  <a:txBody>
+                    <a:bodyPr/>
+                    <a:lstStyle/>
+                    <a:p>
+                      <a:pPr algn="ctr"/>
+                      <a:r>
+                        <a:rPr lang="it-IT" u="none" dirty="0"/>
+                        <a:t>93.51% </a:t>
+                      </a:r>
+                    </a:p>
+                  </a:txBody>
+                  <a:tcPr/>
+                </a:tc>
+                <a:tc>
+                  <a:txBody>
+                    <a:bodyPr/>
+                    <a:lstStyle/>
+                    <a:p>
+                      <a:pPr algn="ctr"/>
+                      <a:r>
+                        <a:rPr lang="it-IT" u="none" dirty="0"/>
+                        <a:t>87.75%</a:t>
+                      </a:r>
+                    </a:p>
+                  </a:txBody>
+                  <a:tcPr/>
+                </a:tc>
+                <a:tc>
+                  <a:txBody>
+                    <a:bodyPr/>
+                    <a:lstStyle/>
+                    <a:p>
+                      <a:pPr algn="ctr"/>
+                      <a:r>
+                        <a:rPr lang="it-IT" u="none" dirty="0"/>
+                        <a:t>95.9%</a:t>
+                      </a:r>
+                    </a:p>
+                  </a:txBody>
+                  <a:tcPr/>
+                </a:tc>
+                <a:tc>
+                  <a:txBody>
+                    <a:bodyPr/>
+                    <a:lstStyle/>
+                    <a:p>
+                      <a:pPr algn="ctr"/>
+                      <a:r>
+                        <a:rPr lang="it-IT" u="none" dirty="0"/>
+                        <a:t>90.90%</a:t>
+                      </a:r>
+                    </a:p>
+                  </a:txBody>
+                  <a:tcPr/>
+                </a:tc>
+                <a:tc>
+                  <a:txBody>
+                    <a:bodyPr/>
+                    <a:lstStyle/>
+                    <a:p>
+                      <a:pPr algn="ctr"/>
+                      <a:r>
+                        <a:rPr lang="it-IT" u="none" dirty="0"/>
+                        <a:t>95.9%</a:t>
+                      </a:r>
+                    </a:p>
+                  </a:txBody>
+                  <a:tcPr/>
+                </a:tc>
+                <a:tc>
+                  <a:txBody>
+                    <a:bodyPr/>
+                    <a:lstStyle/>
+                    <a:p>
+                      <a:pPr algn="ctr"/>
+                      <a:r>
+                        <a:rPr lang="it-IT" u="sng" dirty="0">
+                          <a:effectLst>
+                            <a:outerShdw blurRad="38100" dist="38100" dir="2700000" algn="tl">
+                              <a:srgbClr val="000000">
+                                <a:alpha val="43137"/>
+                              </a:srgbClr>
+                            </a:outerShdw>
+                          </a:effectLst>
+                        </a:rPr>
+                        <a:t>92.79%</a:t>
+                      </a:r>
+                    </a:p>
+                  </a:txBody>
+                  <a:tcPr/>
+                </a:tc>
+                <a:extLst>
+                  <a:ext uri="{0D108BD9-81ED-4DB2-BD59-A6C34878D82A}">
+                    <a16:rowId xmlns:a16="http://schemas.microsoft.com/office/drawing/2014/main" val="3235632591"/>
+                  </a:ext>
+                </a:extLst>
+              </a:tr>
+              <a:tr h="0">
+                <a:tc>
+                  <a:txBody>
+                    <a:bodyPr/>
+                    <a:lstStyle/>
+                    <a:p>
+                      <a:pPr algn="ctr"/>
+                      <a:r>
+                        <a:rPr lang="it-IT" u="none" dirty="0"/>
+                        <a:t>-</a:t>
+                      </a:r>
+                    </a:p>
+                  </a:txBody>
+                  <a:tcPr/>
+                </a:tc>
+                <a:tc>
+                  <a:txBody>
+                    <a:bodyPr/>
+                    <a:lstStyle/>
+                    <a:p>
+                      <a:pPr algn="ctr"/>
+                      <a:r>
+                        <a:rPr lang="it-IT" u="none" dirty="0"/>
+                        <a:t>-</a:t>
+                      </a:r>
+                    </a:p>
+                  </a:txBody>
+                  <a:tcPr/>
+                </a:tc>
+                <a:tc>
+                  <a:txBody>
+                    <a:bodyPr/>
+                    <a:lstStyle/>
+                    <a:p>
+                      <a:pPr algn="ctr"/>
+                      <a:r>
+                        <a:rPr lang="it-IT" u="none" dirty="0">
+                          <a:solidFill>
+                            <a:srgbClr val="FF0000"/>
+                          </a:solidFill>
+                        </a:rPr>
+                        <a:t>-6.33%</a:t>
+                      </a:r>
+                    </a:p>
+                  </a:txBody>
+                  <a:tcPr/>
+                </a:tc>
+                <a:tc>
+                  <a:txBody>
+                    <a:bodyPr/>
+                    <a:lstStyle/>
+                    <a:p>
+                      <a:pPr algn="ctr"/>
+                      <a:r>
+                        <a:rPr lang="it-IT" u="none" dirty="0">
+                          <a:solidFill>
+                            <a:srgbClr val="FF0000"/>
+                          </a:solidFill>
+                        </a:rPr>
+                        <a:t>-11.85%</a:t>
+                      </a:r>
+                    </a:p>
+                  </a:txBody>
+                  <a:tcPr/>
+                </a:tc>
+                <a:tc>
+                  <a:txBody>
+                    <a:bodyPr/>
+                    <a:lstStyle/>
+                    <a:p>
+                      <a:pPr algn="ctr"/>
+                      <a:r>
+                        <a:rPr lang="it-IT" u="none" dirty="0">
+                          <a:solidFill>
+                            <a:srgbClr val="FF0000"/>
+                          </a:solidFill>
+                        </a:rPr>
+                        <a:t>-4.00%</a:t>
+                      </a:r>
+                    </a:p>
+                  </a:txBody>
+                  <a:tcPr/>
+                </a:tc>
+                <a:tc>
+                  <a:txBody>
+                    <a:bodyPr/>
+                    <a:lstStyle/>
+                    <a:p>
+                      <a:pPr algn="ctr"/>
+                      <a:r>
+                        <a:rPr lang="it-IT" u="none" dirty="0">
+                          <a:solidFill>
+                            <a:srgbClr val="FF0000"/>
+                          </a:solidFill>
+                        </a:rPr>
+                        <a:t>-8.85%</a:t>
+                      </a:r>
+                    </a:p>
+                  </a:txBody>
+                  <a:tcPr/>
+                </a:tc>
+                <a:tc>
+                  <a:txBody>
+                    <a:bodyPr/>
+                    <a:lstStyle/>
+                    <a:p>
+                      <a:pPr marL="0" marR="0" lvl="0" indent="0" algn="ctr" defTabSz="914400" rtl="0" eaLnBrk="1" fontAlgn="auto" latinLnBrk="0" hangingPunct="1">
+                        <a:lnSpc>
+                          <a:spcPct val="100000"/>
+                        </a:lnSpc>
+                        <a:spcBef>
+                          <a:spcPts val="0"/>
+                        </a:spcBef>
+                        <a:spcAft>
+                          <a:spcPts val="0"/>
+                        </a:spcAft>
+                        <a:buClrTx/>
+                        <a:buSzTx/>
+                        <a:buFontTx/>
+                        <a:buNone/>
+                        <a:tabLst/>
+                        <a:defRPr/>
+                      </a:pPr>
+                      <a:r>
+                        <a:rPr lang="it-IT" u="none" dirty="0">
+                          <a:solidFill>
+                            <a:srgbClr val="FF0000"/>
+                          </a:solidFill>
+                        </a:rPr>
+                        <a:t>-4.00%</a:t>
+                      </a:r>
+                    </a:p>
+                  </a:txBody>
+                  <a:tcPr/>
+                </a:tc>
+                <a:tc>
+                  <a:txBody>
+                    <a:bodyPr/>
+                    <a:lstStyle/>
+                    <a:p>
+                      <a:pPr algn="ctr"/>
+                      <a:r>
+                        <a:rPr lang="it-IT" b="1" u="sng" dirty="0">
+                          <a:solidFill>
+                            <a:srgbClr val="FF0000"/>
+                          </a:solidFill>
+                          <a:effectLst>
+                            <a:outerShdw blurRad="38100" dist="38100" dir="2700000" algn="tl">
+                              <a:srgbClr val="000000">
+                                <a:alpha val="43137"/>
+                              </a:srgbClr>
+                            </a:outerShdw>
+                          </a:effectLst>
+                        </a:rPr>
+                        <a:t>-7.00%</a:t>
+                      </a:r>
+                    </a:p>
+                  </a:txBody>
+                  <a:tcPr/>
+                </a:tc>
+                <a:extLst>
+                  <a:ext uri="{0D108BD9-81ED-4DB2-BD59-A6C34878D82A}">
+                    <a16:rowId xmlns:a16="http://schemas.microsoft.com/office/drawing/2014/main" val="798995988"/>
+                  </a:ext>
+                </a:extLst>
+              </a:tr>
+              <a:tr h="370840">
+                <a:tc>
+                  <a:txBody>
+                    <a:bodyPr/>
+                    <a:lstStyle/>
+                    <a:p>
+                      <a:r>
+                        <a:rPr lang="it-IT" u="none" dirty="0"/>
+                        <a:t>FGSM</a:t>
+                      </a:r>
+                    </a:p>
+                  </a:txBody>
+                  <a:tcPr/>
+                </a:tc>
+                <a:tc>
+                  <a:txBody>
+                    <a:bodyPr/>
+                    <a:lstStyle/>
+                    <a:p>
+                      <a:r>
+                        <a:rPr lang="it-IT" u="none" dirty="0" err="1"/>
+                        <a:t>Regularized</a:t>
+                      </a:r>
+                      <a:endParaRPr lang="it-IT" u="none" dirty="0"/>
+                    </a:p>
+                  </a:txBody>
+                  <a:tcPr/>
+                </a:tc>
+                <a:tc>
+                  <a:txBody>
+                    <a:bodyPr/>
+                    <a:lstStyle/>
+                    <a:p>
+                      <a:pPr algn="ctr"/>
+                      <a:r>
+                        <a:rPr lang="it-IT" u="none" dirty="0"/>
+                        <a:t>92.83%</a:t>
+                      </a:r>
+                    </a:p>
+                  </a:txBody>
+                  <a:tcPr/>
+                </a:tc>
+                <a:tc>
+                  <a:txBody>
+                    <a:bodyPr/>
+                    <a:lstStyle/>
+                    <a:p>
+                      <a:pPr algn="ctr"/>
+                      <a:r>
+                        <a:rPr lang="it-IT" u="none" dirty="0"/>
+                        <a:t>86.85%</a:t>
+                      </a:r>
+                    </a:p>
+                  </a:txBody>
+                  <a:tcPr/>
+                </a:tc>
+                <a:tc>
+                  <a:txBody>
+                    <a:bodyPr/>
+                    <a:lstStyle/>
+                    <a:p>
+                      <a:pPr algn="ctr"/>
+                      <a:r>
+                        <a:rPr lang="it-IT" u="none" dirty="0"/>
+                        <a:t>95.12%</a:t>
+                      </a:r>
+                    </a:p>
+                  </a:txBody>
+                  <a:tcPr/>
+                </a:tc>
+                <a:tc>
+                  <a:txBody>
+                    <a:bodyPr/>
+                    <a:lstStyle/>
+                    <a:p>
+                      <a:pPr algn="ctr"/>
+                      <a:r>
+                        <a:rPr lang="it-IT" u="none" dirty="0"/>
+                        <a:t>89.99%</a:t>
+                      </a:r>
+                    </a:p>
+                  </a:txBody>
+                  <a:tcPr/>
+                </a:tc>
+                <a:tc>
+                  <a:txBody>
+                    <a:bodyPr/>
+                    <a:lstStyle/>
+                    <a:p>
+                      <a:pPr algn="ctr"/>
+                      <a:r>
+                        <a:rPr lang="it-IT" u="none" dirty="0"/>
+                        <a:t>95.12%</a:t>
+                      </a:r>
+                    </a:p>
+                  </a:txBody>
+                  <a:tcPr/>
+                </a:tc>
+                <a:tc>
+                  <a:txBody>
+                    <a:bodyPr/>
+                    <a:lstStyle/>
+                    <a:p>
+                      <a:pPr algn="ctr"/>
+                      <a:r>
+                        <a:rPr lang="it-IT" u="sng" dirty="0">
+                          <a:effectLst>
+                            <a:outerShdw blurRad="38100" dist="38100" dir="2700000" algn="tl">
+                              <a:srgbClr val="000000">
+                                <a:alpha val="43137"/>
+                              </a:srgbClr>
+                            </a:outerShdw>
+                          </a:effectLst>
+                        </a:rPr>
+                        <a:t>91.98%</a:t>
+                      </a:r>
+                    </a:p>
+                  </a:txBody>
+                  <a:tcPr/>
+                </a:tc>
+                <a:extLst>
+                  <a:ext uri="{0D108BD9-81ED-4DB2-BD59-A6C34878D82A}">
+                    <a16:rowId xmlns:a16="http://schemas.microsoft.com/office/drawing/2014/main" val="749147313"/>
+                  </a:ext>
+                </a:extLst>
+              </a:tr>
+              <a:tr h="370840">
+                <a:tc>
+                  <a:txBody>
+                    <a:bodyPr/>
+                    <a:lstStyle/>
+                    <a:p>
+                      <a:pPr algn="ctr"/>
+                      <a:r>
+                        <a:rPr lang="it-IT" u="none" dirty="0"/>
+                        <a:t>-</a:t>
+                      </a:r>
+                    </a:p>
+                  </a:txBody>
+                  <a:tcPr/>
+                </a:tc>
+                <a:tc>
+                  <a:txBody>
+                    <a:bodyPr/>
+                    <a:lstStyle/>
+                    <a:p>
+                      <a:pPr algn="ctr"/>
+                      <a:r>
+                        <a:rPr lang="it-IT" u="none" dirty="0"/>
+                        <a:t>-</a:t>
+                      </a:r>
+                    </a:p>
+                  </a:txBody>
+                  <a:tcPr/>
+                </a:tc>
+                <a:tc>
+                  <a:txBody>
+                    <a:bodyPr/>
+                    <a:lstStyle/>
+                    <a:p>
+                      <a:pPr algn="ctr"/>
+                      <a:r>
+                        <a:rPr lang="it-IT" u="none" dirty="0">
+                          <a:solidFill>
+                            <a:srgbClr val="FF0000"/>
+                          </a:solidFill>
+                        </a:rPr>
+                        <a:t>-6.94%</a:t>
+                      </a:r>
+                    </a:p>
+                  </a:txBody>
+                  <a:tcPr/>
+                </a:tc>
+                <a:tc>
+                  <a:txBody>
+                    <a:bodyPr/>
+                    <a:lstStyle/>
+                    <a:p>
+                      <a:pPr algn="ctr"/>
+                      <a:r>
+                        <a:rPr lang="it-IT" u="none" dirty="0">
+                          <a:solidFill>
+                            <a:srgbClr val="FF0000"/>
+                          </a:solidFill>
+                        </a:rPr>
+                        <a:t>-12.59%</a:t>
+                      </a:r>
+                    </a:p>
+                  </a:txBody>
+                  <a:tcPr/>
+                </a:tc>
+                <a:tc>
+                  <a:txBody>
+                    <a:bodyPr/>
+                    <a:lstStyle/>
+                    <a:p>
+                      <a:pPr algn="ctr"/>
+                      <a:r>
+                        <a:rPr lang="it-IT" u="none" dirty="0">
+                          <a:solidFill>
+                            <a:srgbClr val="FF0000"/>
+                          </a:solidFill>
+                        </a:rPr>
+                        <a:t>-4.73%</a:t>
+                      </a:r>
+                    </a:p>
+                  </a:txBody>
+                  <a:tcPr/>
+                </a:tc>
+                <a:tc>
+                  <a:txBody>
+                    <a:bodyPr/>
+                    <a:lstStyle/>
+                    <a:p>
+                      <a:pPr algn="ctr"/>
+                      <a:r>
+                        <a:rPr lang="it-IT" u="none" dirty="0">
+                          <a:solidFill>
+                            <a:srgbClr val="FF0000"/>
+                          </a:solidFill>
+                        </a:rPr>
+                        <a:t>-9.66%</a:t>
+                      </a:r>
+                    </a:p>
+                  </a:txBody>
+                  <a:tcPr/>
+                </a:tc>
+                <a:tc>
+                  <a:txBody>
+                    <a:bodyPr/>
+                    <a:lstStyle/>
+                    <a:p>
+                      <a:pPr marL="0" marR="0" lvl="0" indent="0" algn="ctr" defTabSz="914400" rtl="0" eaLnBrk="1" fontAlgn="auto" latinLnBrk="0" hangingPunct="1">
+                        <a:lnSpc>
+                          <a:spcPct val="100000"/>
+                        </a:lnSpc>
+                        <a:spcBef>
+                          <a:spcPts val="0"/>
+                        </a:spcBef>
+                        <a:spcAft>
+                          <a:spcPts val="0"/>
+                        </a:spcAft>
+                        <a:buClrTx/>
+                        <a:buSzTx/>
+                        <a:buFontTx/>
+                        <a:buNone/>
+                        <a:tabLst/>
+                        <a:defRPr/>
+                      </a:pPr>
+                      <a:r>
+                        <a:rPr lang="it-IT" u="none" dirty="0">
+                          <a:solidFill>
+                            <a:srgbClr val="FF0000"/>
+                          </a:solidFill>
+                        </a:rPr>
+                        <a:t>-4.73%</a:t>
+                      </a:r>
+                    </a:p>
+                  </a:txBody>
+                  <a:tcPr/>
+                </a:tc>
+                <a:tc>
+                  <a:txBody>
+                    <a:bodyPr/>
+                    <a:lstStyle/>
+                    <a:p>
+                      <a:pPr algn="ctr"/>
+                      <a:r>
+                        <a:rPr lang="it-IT" u="sng" dirty="0">
+                          <a:solidFill>
+                            <a:srgbClr val="FF0000"/>
+                          </a:solidFill>
+                          <a:effectLst>
+                            <a:outerShdw blurRad="38100" dist="38100" dir="2700000" algn="tl">
+                              <a:srgbClr val="000000">
+                                <a:alpha val="43137"/>
+                              </a:srgbClr>
+                            </a:outerShdw>
+                          </a:effectLst>
+                        </a:rPr>
+                        <a:t>-7.73%</a:t>
+                      </a:r>
+                    </a:p>
+                  </a:txBody>
+                  <a:tcPr/>
+                </a:tc>
+                <a:extLst>
+                  <a:ext uri="{0D108BD9-81ED-4DB2-BD59-A6C34878D82A}">
+                    <a16:rowId xmlns:a16="http://schemas.microsoft.com/office/drawing/2014/main" val="1612183768"/>
+                  </a:ext>
+                </a:extLst>
+              </a:tr>
+              <a:tr h="370840">
+                <a:tc>
+                  <a:txBody>
+                    <a:bodyPr/>
+                    <a:lstStyle/>
+                    <a:p>
+                      <a:r>
+                        <a:rPr lang="it-IT" u="none" dirty="0"/>
+                        <a:t>PGD</a:t>
+                      </a:r>
+                    </a:p>
+                  </a:txBody>
+                  <a:tcPr/>
+                </a:tc>
+                <a:tc>
+                  <a:txBody>
+                    <a:bodyPr/>
+                    <a:lstStyle/>
+                    <a:p>
+                      <a:r>
+                        <a:rPr lang="it-IT" u="none" dirty="0"/>
+                        <a:t>Baseline</a:t>
+                      </a:r>
+                    </a:p>
+                  </a:txBody>
+                  <a:tcPr/>
+                </a:tc>
+                <a:tc>
+                  <a:txBody>
+                    <a:bodyPr/>
+                    <a:lstStyle/>
+                    <a:p>
+                      <a:pPr algn="ctr"/>
+                      <a:r>
+                        <a:rPr lang="it-IT" u="none" dirty="0"/>
+                        <a:t>93.13%</a:t>
+                      </a:r>
+                    </a:p>
+                  </a:txBody>
+                  <a:tcPr/>
+                </a:tc>
+                <a:tc>
+                  <a:txBody>
+                    <a:bodyPr/>
+                    <a:lstStyle/>
+                    <a:p>
+                      <a:pPr algn="ctr"/>
+                      <a:r>
+                        <a:rPr lang="it-IT" u="none" dirty="0"/>
+                        <a:t>87.22%</a:t>
+                      </a:r>
+                    </a:p>
+                  </a:txBody>
+                  <a:tcPr/>
+                </a:tc>
+                <a:tc>
+                  <a:txBody>
+                    <a:bodyPr/>
+                    <a:lstStyle/>
+                    <a:p>
+                      <a:pPr algn="ctr"/>
+                      <a:r>
+                        <a:rPr lang="it-IT" u="none" dirty="0"/>
+                        <a:t>95.68%</a:t>
+                      </a:r>
+                    </a:p>
+                  </a:txBody>
+                  <a:tcPr/>
+                </a:tc>
+                <a:tc>
+                  <a:txBody>
+                    <a:bodyPr/>
+                    <a:lstStyle/>
+                    <a:p>
+                      <a:pPr algn="ctr"/>
+                      <a:r>
+                        <a:rPr lang="it-IT" u="none" dirty="0"/>
+                        <a:t>90.42%</a:t>
+                      </a:r>
+                    </a:p>
+                  </a:txBody>
+                  <a:tcPr/>
+                </a:tc>
+                <a:tc>
+                  <a:txBody>
+                    <a:bodyPr/>
+                    <a:lstStyle/>
+                    <a:p>
+                      <a:pPr algn="ctr"/>
+                      <a:r>
+                        <a:rPr lang="it-IT" u="none" dirty="0"/>
+                        <a:t>95.68%</a:t>
+                      </a:r>
+                    </a:p>
+                  </a:txBody>
+                  <a:tcPr/>
+                </a:tc>
+                <a:tc>
+                  <a:txBody>
+                    <a:bodyPr/>
+                    <a:lstStyle/>
+                    <a:p>
+                      <a:pPr algn="ctr"/>
+                      <a:r>
+                        <a:rPr lang="it-IT" u="sng" dirty="0">
+                          <a:effectLst>
+                            <a:outerShdw blurRad="38100" dist="38100" dir="2700000" algn="tl">
+                              <a:srgbClr val="000000">
+                                <a:alpha val="43137"/>
+                              </a:srgbClr>
+                            </a:outerShdw>
+                          </a:effectLst>
+                        </a:rPr>
+                        <a:t>92.43%</a:t>
+                      </a:r>
+                    </a:p>
+                  </a:txBody>
+                  <a:tcPr/>
+                </a:tc>
+                <a:extLst>
+                  <a:ext uri="{0D108BD9-81ED-4DB2-BD59-A6C34878D82A}">
+                    <a16:rowId xmlns:a16="http://schemas.microsoft.com/office/drawing/2014/main" val="416260902"/>
+                  </a:ext>
+                </a:extLst>
+              </a:tr>
+              <a:tr h="370840">
+                <a:tc>
+                  <a:txBody>
+                    <a:bodyPr/>
+                    <a:lstStyle/>
+                    <a:p>
+                      <a:pPr algn="ctr"/>
+                      <a:r>
+                        <a:rPr lang="it-IT" u="none" dirty="0"/>
+                        <a:t>-</a:t>
+                      </a:r>
+                    </a:p>
+                  </a:txBody>
+                  <a:tcPr/>
+                </a:tc>
+                <a:tc>
+                  <a:txBody>
+                    <a:bodyPr/>
+                    <a:lstStyle/>
+                    <a:p>
+                      <a:pPr algn="ctr"/>
+                      <a:r>
+                        <a:rPr lang="it-IT" u="none" dirty="0"/>
+                        <a:t>-</a:t>
+                      </a:r>
+                    </a:p>
+                  </a:txBody>
+                  <a:tcPr/>
+                </a:tc>
+                <a:tc>
+                  <a:txBody>
+                    <a:bodyPr/>
+                    <a:lstStyle/>
+                    <a:p>
+                      <a:pPr algn="ctr"/>
+                      <a:r>
+                        <a:rPr lang="it-IT" u="none" dirty="0">
+                          <a:solidFill>
+                            <a:srgbClr val="FF0000"/>
+                          </a:solidFill>
+                        </a:rPr>
+                        <a:t>-6.71%</a:t>
+                      </a:r>
+                    </a:p>
+                  </a:txBody>
+                  <a:tcPr/>
+                </a:tc>
+                <a:tc>
+                  <a:txBody>
+                    <a:bodyPr/>
+                    <a:lstStyle/>
+                    <a:p>
+                      <a:pPr algn="ctr"/>
+                      <a:r>
+                        <a:rPr lang="it-IT" u="none" dirty="0">
+                          <a:solidFill>
+                            <a:srgbClr val="FF0000"/>
+                          </a:solidFill>
+                        </a:rPr>
+                        <a:t>-12.38%</a:t>
+                      </a:r>
+                    </a:p>
+                  </a:txBody>
+                  <a:tcPr/>
+                </a:tc>
+                <a:tc>
+                  <a:txBody>
+                    <a:bodyPr/>
+                    <a:lstStyle/>
+                    <a:p>
+                      <a:pPr algn="ctr"/>
+                      <a:r>
+                        <a:rPr lang="it-IT" u="none" dirty="0">
+                          <a:solidFill>
+                            <a:srgbClr val="FF0000"/>
+                          </a:solidFill>
+                        </a:rPr>
+                        <a:t>-4.22%</a:t>
+                      </a:r>
+                    </a:p>
+                  </a:txBody>
+                  <a:tcPr/>
+                </a:tc>
+                <a:tc>
+                  <a:txBody>
+                    <a:bodyPr/>
+                    <a:lstStyle/>
+                    <a:p>
+                      <a:pPr algn="ctr"/>
+                      <a:r>
+                        <a:rPr lang="it-IT" u="none" dirty="0">
+                          <a:solidFill>
+                            <a:srgbClr val="FF0000"/>
+                          </a:solidFill>
+                        </a:rPr>
+                        <a:t>-9.33%</a:t>
+                      </a:r>
+                    </a:p>
+                  </a:txBody>
+                  <a:tcPr/>
+                </a:tc>
+                <a:tc>
+                  <a:txBody>
+                    <a:bodyPr/>
+                    <a:lstStyle/>
+                    <a:p>
+                      <a:pPr marL="0" marR="0" lvl="0" indent="0" algn="ctr" defTabSz="914400" rtl="0" eaLnBrk="1" fontAlgn="auto" latinLnBrk="0" hangingPunct="1">
+                        <a:lnSpc>
+                          <a:spcPct val="100000"/>
+                        </a:lnSpc>
+                        <a:spcBef>
+                          <a:spcPts val="0"/>
+                        </a:spcBef>
+                        <a:spcAft>
+                          <a:spcPts val="0"/>
+                        </a:spcAft>
+                        <a:buClrTx/>
+                        <a:buSzTx/>
+                        <a:buFontTx/>
+                        <a:buNone/>
+                        <a:tabLst/>
+                        <a:defRPr/>
+                      </a:pPr>
+                      <a:r>
+                        <a:rPr lang="it-IT" u="none" dirty="0">
+                          <a:solidFill>
+                            <a:srgbClr val="FF0000"/>
+                          </a:solidFill>
+                        </a:rPr>
+                        <a:t>-4.22%</a:t>
+                      </a:r>
+                    </a:p>
+                  </a:txBody>
+                  <a:tcPr/>
+                </a:tc>
+                <a:tc>
+                  <a:txBody>
+                    <a:bodyPr/>
+                    <a:lstStyle/>
+                    <a:p>
+                      <a:pPr algn="ctr"/>
+                      <a:r>
+                        <a:rPr lang="it-IT" u="sng" dirty="0">
+                          <a:solidFill>
+                            <a:srgbClr val="FF0000"/>
+                          </a:solidFill>
+                          <a:effectLst>
+                            <a:outerShdw blurRad="38100" dist="38100" dir="2700000" algn="tl">
+                              <a:srgbClr val="000000">
+                                <a:alpha val="43137"/>
+                              </a:srgbClr>
+                            </a:outerShdw>
+                          </a:effectLst>
+                        </a:rPr>
+                        <a:t>-7.37%</a:t>
+                      </a:r>
+                    </a:p>
+                  </a:txBody>
+                  <a:tcPr/>
+                </a:tc>
+                <a:extLst>
+                  <a:ext uri="{0D108BD9-81ED-4DB2-BD59-A6C34878D82A}">
+                    <a16:rowId xmlns:a16="http://schemas.microsoft.com/office/drawing/2014/main" val="1512389342"/>
+                  </a:ext>
+                </a:extLst>
+              </a:tr>
+              <a:tr h="370840">
+                <a:tc>
+                  <a:txBody>
+                    <a:bodyPr/>
+                    <a:lstStyle/>
+                    <a:p>
+                      <a:r>
+                        <a:rPr lang="it-IT" u="none" dirty="0"/>
+                        <a:t>PGD</a:t>
+                      </a:r>
+                    </a:p>
+                  </a:txBody>
+                  <a:tcPr/>
+                </a:tc>
+                <a:tc>
+                  <a:txBody>
+                    <a:bodyPr/>
+                    <a:lstStyle/>
+                    <a:p>
+                      <a:pPr marL="0" marR="0" lvl="0" indent="0" algn="l" defTabSz="914400" rtl="0" eaLnBrk="1" fontAlgn="auto" latinLnBrk="0" hangingPunct="1">
+                        <a:lnSpc>
+                          <a:spcPct val="100000"/>
+                        </a:lnSpc>
+                        <a:spcBef>
+                          <a:spcPts val="0"/>
+                        </a:spcBef>
+                        <a:spcAft>
+                          <a:spcPts val="0"/>
+                        </a:spcAft>
+                        <a:buClrTx/>
+                        <a:buSzTx/>
+                        <a:buFontTx/>
+                        <a:buNone/>
+                        <a:tabLst/>
+                        <a:defRPr/>
+                      </a:pPr>
+                      <a:r>
+                        <a:rPr lang="it-IT" u="none" dirty="0" err="1"/>
+                        <a:t>Regularized</a:t>
+                      </a:r>
+                      <a:endParaRPr lang="it-IT" u="none" dirty="0"/>
+                    </a:p>
+                  </a:txBody>
+                  <a:tcPr/>
+                </a:tc>
+                <a:tc>
+                  <a:txBody>
+                    <a:bodyPr/>
+                    <a:lstStyle/>
+                    <a:p>
+                      <a:pPr algn="ctr"/>
+                      <a:r>
+                        <a:rPr lang="it-IT" u="none" dirty="0"/>
+                        <a:t>93.24%</a:t>
+                      </a:r>
+                    </a:p>
+                  </a:txBody>
+                  <a:tcPr/>
+                </a:tc>
+                <a:tc>
+                  <a:txBody>
+                    <a:bodyPr/>
+                    <a:lstStyle/>
+                    <a:p>
+                      <a:pPr algn="ctr"/>
+                      <a:r>
+                        <a:rPr lang="it-IT" u="none" dirty="0"/>
+                        <a:t>87.38%</a:t>
+                      </a:r>
+                    </a:p>
+                  </a:txBody>
+                  <a:tcPr/>
+                </a:tc>
+                <a:tc>
+                  <a:txBody>
+                    <a:bodyPr/>
+                    <a:lstStyle/>
+                    <a:p>
+                      <a:pPr algn="ctr"/>
+                      <a:r>
+                        <a:rPr lang="it-IT" u="none" dirty="0"/>
+                        <a:t>95.78%</a:t>
+                      </a:r>
+                    </a:p>
+                  </a:txBody>
+                  <a:tcPr/>
+                </a:tc>
+                <a:tc>
+                  <a:txBody>
+                    <a:bodyPr/>
+                    <a:lstStyle/>
+                    <a:p>
+                      <a:pPr algn="ctr"/>
+                      <a:r>
+                        <a:rPr lang="it-IT" u="none" dirty="0"/>
+                        <a:t>90.57%</a:t>
+                      </a:r>
+                    </a:p>
+                  </a:txBody>
+                  <a:tcPr/>
+                </a:tc>
+                <a:tc>
+                  <a:txBody>
+                    <a:bodyPr/>
+                    <a:lstStyle/>
+                    <a:p>
+                      <a:pPr algn="ctr"/>
+                      <a:r>
+                        <a:rPr lang="it-IT" u="none" dirty="0"/>
+                        <a:t>95.78%</a:t>
+                      </a:r>
+                    </a:p>
+                  </a:txBody>
+                  <a:tcPr/>
+                </a:tc>
+                <a:tc>
+                  <a:txBody>
+                    <a:bodyPr/>
+                    <a:lstStyle/>
+                    <a:p>
+                      <a:pPr algn="ctr"/>
+                      <a:r>
+                        <a:rPr lang="it-IT" u="sng" dirty="0">
+                          <a:effectLst>
+                            <a:outerShdw blurRad="38100" dist="38100" dir="2700000" algn="tl">
+                              <a:srgbClr val="000000">
+                                <a:alpha val="43137"/>
+                              </a:srgbClr>
+                            </a:outerShdw>
+                          </a:effectLst>
+                        </a:rPr>
+                        <a:t>95.22%</a:t>
+                      </a:r>
+                    </a:p>
+                  </a:txBody>
+                  <a:tcPr/>
+                </a:tc>
+                <a:extLst>
+                  <a:ext uri="{0D108BD9-81ED-4DB2-BD59-A6C34878D82A}">
+                    <a16:rowId xmlns:a16="http://schemas.microsoft.com/office/drawing/2014/main" val="1723150831"/>
+                  </a:ext>
+                </a:extLst>
+              </a:tr>
+              <a:tr h="370840">
+                <a:tc>
+                  <a:txBody>
+                    <a:bodyPr/>
+                    <a:lstStyle/>
+                    <a:p>
+                      <a:pPr algn="ctr"/>
+                      <a:r>
+                        <a:rPr lang="it-IT" u="none" dirty="0"/>
+                        <a:t>-</a:t>
+                      </a:r>
+                    </a:p>
+                  </a:txBody>
+                  <a:tcPr/>
+                </a:tc>
+                <a:tc>
+                  <a:txBody>
+                    <a:bodyPr/>
+                    <a:lstStyle/>
+                    <a:p>
+                      <a:pPr marL="0" marR="0" lvl="0" indent="0" algn="ctr" defTabSz="914400" rtl="0" eaLnBrk="1" fontAlgn="auto" latinLnBrk="0" hangingPunct="1">
+                        <a:lnSpc>
+                          <a:spcPct val="100000"/>
+                        </a:lnSpc>
+                        <a:spcBef>
+                          <a:spcPts val="0"/>
+                        </a:spcBef>
+                        <a:spcAft>
+                          <a:spcPts val="0"/>
+                        </a:spcAft>
+                        <a:buClrTx/>
+                        <a:buSzTx/>
+                        <a:buFontTx/>
+                        <a:buNone/>
+                        <a:tabLst/>
+                        <a:defRPr/>
+                      </a:pPr>
+                      <a:r>
+                        <a:rPr lang="it-IT" u="none" dirty="0"/>
+                        <a:t>-</a:t>
+                      </a:r>
+                    </a:p>
+                  </a:txBody>
+                  <a:tcPr/>
+                </a:tc>
+                <a:tc>
+                  <a:txBody>
+                    <a:bodyPr/>
+                    <a:lstStyle/>
+                    <a:p>
+                      <a:pPr algn="ctr"/>
+                      <a:r>
+                        <a:rPr lang="it-IT" u="none" dirty="0">
+                          <a:solidFill>
+                            <a:srgbClr val="FF0000"/>
+                          </a:solidFill>
+                        </a:rPr>
+                        <a:t>-6.53%</a:t>
+                      </a:r>
+                    </a:p>
+                  </a:txBody>
+                  <a:tcPr/>
+                </a:tc>
+                <a:tc>
+                  <a:txBody>
+                    <a:bodyPr/>
+                    <a:lstStyle/>
+                    <a:p>
+                      <a:pPr algn="ctr"/>
+                      <a:r>
+                        <a:rPr lang="it-IT" u="none" dirty="0">
+                          <a:solidFill>
+                            <a:srgbClr val="FF0000"/>
+                          </a:solidFill>
+                        </a:rPr>
+                        <a:t>-12.06%</a:t>
+                      </a:r>
+                    </a:p>
+                  </a:txBody>
+                  <a:tcPr/>
+                </a:tc>
+                <a:tc>
+                  <a:txBody>
+                    <a:bodyPr/>
+                    <a:lstStyle/>
+                    <a:p>
+                      <a:pPr algn="ctr"/>
+                      <a:r>
+                        <a:rPr lang="it-IT" u="none" dirty="0">
+                          <a:solidFill>
+                            <a:srgbClr val="FF0000"/>
+                          </a:solidFill>
+                        </a:rPr>
+                        <a:t>-4.07%</a:t>
+                      </a:r>
+                    </a:p>
+                  </a:txBody>
+                  <a:tcPr/>
+                </a:tc>
+                <a:tc>
+                  <a:txBody>
+                    <a:bodyPr/>
+                    <a:lstStyle/>
+                    <a:p>
+                      <a:pPr algn="ctr"/>
+                      <a:r>
+                        <a:rPr lang="it-IT" u="none" dirty="0">
+                          <a:solidFill>
+                            <a:srgbClr val="FF0000"/>
+                          </a:solidFill>
+                        </a:rPr>
+                        <a:t>-9.08%</a:t>
+                      </a:r>
+                    </a:p>
+                  </a:txBody>
+                  <a:tcPr/>
+                </a:tc>
+                <a:tc>
+                  <a:txBody>
+                    <a:bodyPr/>
+                    <a:lstStyle/>
+                    <a:p>
+                      <a:pPr marL="0" marR="0" lvl="0" indent="0" algn="ctr" defTabSz="914400" rtl="0" eaLnBrk="1" fontAlgn="auto" latinLnBrk="0" hangingPunct="1">
+                        <a:lnSpc>
+                          <a:spcPct val="100000"/>
+                        </a:lnSpc>
+                        <a:spcBef>
+                          <a:spcPts val="0"/>
+                        </a:spcBef>
+                        <a:spcAft>
+                          <a:spcPts val="0"/>
+                        </a:spcAft>
+                        <a:buClrTx/>
+                        <a:buSzTx/>
+                        <a:buFontTx/>
+                        <a:buNone/>
+                        <a:tabLst/>
+                        <a:defRPr/>
+                      </a:pPr>
+                      <a:r>
+                        <a:rPr lang="it-IT" u="none" dirty="0">
+                          <a:solidFill>
+                            <a:srgbClr val="FF0000"/>
+                          </a:solidFill>
+                        </a:rPr>
+                        <a:t>-4.07%</a:t>
+                      </a:r>
+                    </a:p>
+                  </a:txBody>
+                  <a:tcPr/>
+                </a:tc>
+                <a:tc>
+                  <a:txBody>
+                    <a:bodyPr/>
+                    <a:lstStyle/>
+                    <a:p>
+                      <a:pPr algn="ctr"/>
+                      <a:r>
+                        <a:rPr lang="it-IT" b="1" u="sng" dirty="0">
+                          <a:solidFill>
+                            <a:srgbClr val="FF0000"/>
+                          </a:solidFill>
+                          <a:effectLst>
+                            <a:outerShdw blurRad="38100" dist="38100" dir="2700000" algn="tl">
+                              <a:srgbClr val="000000">
+                                <a:alpha val="43137"/>
+                              </a:srgbClr>
+                            </a:outerShdw>
+                          </a:effectLst>
+                        </a:rPr>
+                        <a:t>-7.16%</a:t>
+                      </a:r>
+                    </a:p>
+                  </a:txBody>
+                  <a:tcPr/>
+                </a:tc>
+                <a:extLst>
+                  <a:ext uri="{0D108BD9-81ED-4DB2-BD59-A6C34878D82A}">
+                    <a16:rowId xmlns:a16="http://schemas.microsoft.com/office/drawing/2014/main" val="3265985644"/>
+                  </a:ext>
+                </a:extLst>
+              </a:tr>
+              <a:tr h="370840">
+                <a:tc>
+                  <a:txBody>
+                    <a:bodyPr/>
+                    <a:lstStyle/>
+                    <a:p>
+                      <a:r>
+                        <a:rPr lang="it-IT" u="none" dirty="0"/>
+                        <a:t>Patch</a:t>
+                      </a:r>
+                    </a:p>
+                  </a:txBody>
+                  <a:tcPr/>
+                </a:tc>
+                <a:tc>
+                  <a:txBody>
+                    <a:bodyPr/>
+                    <a:lstStyle/>
+                    <a:p>
+                      <a:r>
+                        <a:rPr lang="it-IT" u="none" dirty="0"/>
+                        <a:t>Baseline</a:t>
+                      </a:r>
+                    </a:p>
+                  </a:txBody>
+                  <a:tcPr/>
+                </a:tc>
+                <a:tc>
+                  <a:txBody>
+                    <a:bodyPr/>
+                    <a:lstStyle/>
+                    <a:p>
+                      <a:pPr algn="ctr"/>
+                      <a:r>
+                        <a:rPr lang="it-IT" u="none" dirty="0"/>
+                        <a:t>93.54%</a:t>
+                      </a:r>
+                    </a:p>
+                  </a:txBody>
+                  <a:tcPr/>
+                </a:tc>
+                <a:tc>
+                  <a:txBody>
+                    <a:bodyPr/>
+                    <a:lstStyle/>
+                    <a:p>
+                      <a:pPr algn="ctr"/>
+                      <a:r>
+                        <a:rPr lang="it-IT" u="none" dirty="0"/>
+                        <a:t>87.80%</a:t>
+                      </a:r>
+                    </a:p>
+                  </a:txBody>
+                  <a:tcPr/>
+                </a:tc>
+                <a:tc>
+                  <a:txBody>
+                    <a:bodyPr/>
+                    <a:lstStyle/>
+                    <a:p>
+                      <a:pPr algn="ctr"/>
+                      <a:r>
+                        <a:rPr lang="it-IT" u="none" dirty="0"/>
+                        <a:t>95.96%</a:t>
+                      </a:r>
+                    </a:p>
+                  </a:txBody>
+                  <a:tcPr/>
+                </a:tc>
+                <a:tc>
+                  <a:txBody>
+                    <a:bodyPr/>
+                    <a:lstStyle/>
+                    <a:p>
+                      <a:pPr algn="ctr"/>
+                      <a:r>
+                        <a:rPr lang="it-IT" u="none" dirty="0"/>
+                        <a:t>90.95%</a:t>
+                      </a:r>
+                    </a:p>
+                  </a:txBody>
+                  <a:tcPr/>
+                </a:tc>
+                <a:tc>
+                  <a:txBody>
+                    <a:bodyPr/>
+                    <a:lstStyle/>
+                    <a:p>
+                      <a:pPr algn="ctr"/>
+                      <a:r>
+                        <a:rPr lang="it-IT" u="none" dirty="0"/>
+                        <a:t>95.96%</a:t>
+                      </a:r>
+                    </a:p>
+                  </a:txBody>
+                  <a:tcPr/>
+                </a:tc>
+                <a:tc>
+                  <a:txBody>
+                    <a:bodyPr/>
+                    <a:lstStyle/>
+                    <a:p>
+                      <a:pPr algn="ctr"/>
+                      <a:r>
+                        <a:rPr lang="it-IT" u="sng" dirty="0">
+                          <a:effectLst>
+                            <a:outerShdw blurRad="38100" dist="38100" dir="2700000" algn="tl">
+                              <a:srgbClr val="000000">
+                                <a:alpha val="43137"/>
+                              </a:srgbClr>
+                            </a:outerShdw>
+                          </a:effectLst>
+                        </a:rPr>
+                        <a:t>92.84%</a:t>
+                      </a:r>
+                    </a:p>
+                  </a:txBody>
+                  <a:tcPr/>
+                </a:tc>
+                <a:extLst>
+                  <a:ext uri="{0D108BD9-81ED-4DB2-BD59-A6C34878D82A}">
+                    <a16:rowId xmlns:a16="http://schemas.microsoft.com/office/drawing/2014/main" val="2744983496"/>
+                  </a:ext>
+                </a:extLst>
+              </a:tr>
+              <a:tr h="370840">
+                <a:tc>
+                  <a:txBody>
+                    <a:bodyPr/>
+                    <a:lstStyle/>
+                    <a:p>
+                      <a:pPr algn="ctr"/>
+                      <a:r>
+                        <a:rPr lang="it-IT" u="none" dirty="0"/>
+                        <a:t>-</a:t>
+                      </a:r>
+                    </a:p>
+                  </a:txBody>
+                  <a:tcPr/>
+                </a:tc>
+                <a:tc>
+                  <a:txBody>
+                    <a:bodyPr/>
+                    <a:lstStyle/>
+                    <a:p>
+                      <a:pPr algn="ctr"/>
+                      <a:r>
+                        <a:rPr lang="it-IT" u="none" dirty="0"/>
+                        <a:t>-</a:t>
+                      </a:r>
+                    </a:p>
+                  </a:txBody>
+                  <a:tcPr/>
+                </a:tc>
+                <a:tc>
+                  <a:txBody>
+                    <a:bodyPr/>
+                    <a:lstStyle/>
+                    <a:p>
+                      <a:pPr algn="ctr"/>
+                      <a:r>
+                        <a:rPr lang="it-IT" u="none" dirty="0">
+                          <a:solidFill>
+                            <a:srgbClr val="FF0000"/>
+                          </a:solidFill>
+                        </a:rPr>
+                        <a:t>-6.30%</a:t>
+                      </a:r>
+                    </a:p>
+                  </a:txBody>
+                  <a:tcPr/>
+                </a:tc>
+                <a:tc>
+                  <a:txBody>
+                    <a:bodyPr/>
+                    <a:lstStyle/>
+                    <a:p>
+                      <a:pPr algn="ctr"/>
+                      <a:r>
+                        <a:rPr lang="it-IT" u="none" dirty="0">
+                          <a:solidFill>
+                            <a:srgbClr val="FF0000"/>
+                          </a:solidFill>
+                        </a:rPr>
+                        <a:t>-11.8%</a:t>
+                      </a:r>
+                    </a:p>
+                  </a:txBody>
+                  <a:tcPr/>
+                </a:tc>
+                <a:tc>
+                  <a:txBody>
+                    <a:bodyPr/>
+                    <a:lstStyle/>
+                    <a:p>
+                      <a:pPr algn="ctr"/>
+                      <a:r>
+                        <a:rPr lang="it-IT" u="none" dirty="0">
+                          <a:solidFill>
+                            <a:srgbClr val="FF0000"/>
+                          </a:solidFill>
+                        </a:rPr>
+                        <a:t>-3.94%</a:t>
+                      </a:r>
+                    </a:p>
+                  </a:txBody>
+                  <a:tcPr/>
+                </a:tc>
+                <a:tc>
+                  <a:txBody>
+                    <a:bodyPr/>
+                    <a:lstStyle/>
+                    <a:p>
+                      <a:pPr algn="ctr"/>
+                      <a:r>
+                        <a:rPr lang="it-IT" u="none" dirty="0">
+                          <a:solidFill>
+                            <a:srgbClr val="FF0000"/>
+                          </a:solidFill>
+                        </a:rPr>
+                        <a:t>-8.80%</a:t>
+                      </a:r>
+                    </a:p>
+                  </a:txBody>
+                  <a:tcPr/>
+                </a:tc>
+                <a:tc>
+                  <a:txBody>
+                    <a:bodyPr/>
+                    <a:lstStyle/>
+                    <a:p>
+                      <a:pPr marL="0" marR="0" lvl="0" indent="0" algn="ctr" defTabSz="914400" rtl="0" eaLnBrk="1" fontAlgn="auto" latinLnBrk="0" hangingPunct="1">
+                        <a:lnSpc>
+                          <a:spcPct val="100000"/>
+                        </a:lnSpc>
+                        <a:spcBef>
+                          <a:spcPts val="0"/>
+                        </a:spcBef>
+                        <a:spcAft>
+                          <a:spcPts val="0"/>
+                        </a:spcAft>
+                        <a:buClrTx/>
+                        <a:buSzTx/>
+                        <a:buFontTx/>
+                        <a:buNone/>
+                        <a:tabLst/>
+                        <a:defRPr/>
+                      </a:pPr>
+                      <a:r>
+                        <a:rPr lang="it-IT" u="none" dirty="0">
+                          <a:solidFill>
+                            <a:srgbClr val="FF0000"/>
+                          </a:solidFill>
+                        </a:rPr>
+                        <a:t>-3.94%</a:t>
+                      </a:r>
+                    </a:p>
+                  </a:txBody>
+                  <a:tcPr/>
+                </a:tc>
+                <a:tc>
+                  <a:txBody>
+                    <a:bodyPr/>
+                    <a:lstStyle/>
+                    <a:p>
+                      <a:pPr algn="ctr"/>
+                      <a:r>
+                        <a:rPr lang="it-IT" u="sng" dirty="0">
+                          <a:solidFill>
+                            <a:srgbClr val="FF0000"/>
+                          </a:solidFill>
+                          <a:effectLst>
+                            <a:outerShdw blurRad="38100" dist="38100" dir="2700000" algn="tl">
+                              <a:srgbClr val="000000">
+                                <a:alpha val="43137"/>
+                              </a:srgbClr>
+                            </a:outerShdw>
+                          </a:effectLst>
+                        </a:rPr>
+                        <a:t>-6.95%</a:t>
+                      </a:r>
+                    </a:p>
+                  </a:txBody>
+                  <a:tcPr/>
+                </a:tc>
+                <a:extLst>
+                  <a:ext uri="{0D108BD9-81ED-4DB2-BD59-A6C34878D82A}">
+                    <a16:rowId xmlns:a16="http://schemas.microsoft.com/office/drawing/2014/main" val="913114394"/>
+                  </a:ext>
+                </a:extLst>
+              </a:tr>
+              <a:tr h="370840">
+                <a:tc>
+                  <a:txBody>
+                    <a:bodyPr/>
+                    <a:lstStyle/>
+                    <a:p>
+                      <a:r>
+                        <a:rPr lang="it-IT" u="none" dirty="0"/>
+                        <a:t>Patch</a:t>
+                      </a:r>
+                    </a:p>
+                  </a:txBody>
+                  <a:tcPr/>
+                </a:tc>
+                <a:tc>
+                  <a:txBody>
+                    <a:bodyPr/>
+                    <a:lstStyle/>
+                    <a:p>
+                      <a:pPr marL="0" marR="0" lvl="0" indent="0" algn="l" defTabSz="914400" rtl="0" eaLnBrk="1" fontAlgn="auto" latinLnBrk="0" hangingPunct="1">
+                        <a:lnSpc>
+                          <a:spcPct val="100000"/>
+                        </a:lnSpc>
+                        <a:spcBef>
+                          <a:spcPts val="0"/>
+                        </a:spcBef>
+                        <a:spcAft>
+                          <a:spcPts val="0"/>
+                        </a:spcAft>
+                        <a:buClrTx/>
+                        <a:buSzTx/>
+                        <a:buFontTx/>
+                        <a:buNone/>
+                        <a:tabLst/>
+                        <a:defRPr/>
+                      </a:pPr>
+                      <a:r>
+                        <a:rPr lang="it-IT" u="none" dirty="0" err="1"/>
+                        <a:t>Regularized</a:t>
+                      </a:r>
+                      <a:endParaRPr lang="it-IT" u="none" dirty="0"/>
+                    </a:p>
+                  </a:txBody>
+                  <a:tcPr/>
+                </a:tc>
+                <a:tc>
+                  <a:txBody>
+                    <a:bodyPr/>
+                    <a:lstStyle/>
+                    <a:p>
+                      <a:pPr algn="ctr"/>
+                      <a:r>
+                        <a:rPr lang="it-IT" u="none" dirty="0"/>
+                        <a:t>93.52%</a:t>
+                      </a:r>
+                    </a:p>
+                  </a:txBody>
+                  <a:tcPr/>
+                </a:tc>
+                <a:tc>
+                  <a:txBody>
+                    <a:bodyPr/>
+                    <a:lstStyle/>
+                    <a:p>
+                      <a:pPr algn="ctr"/>
+                      <a:r>
+                        <a:rPr lang="it-IT" u="none" dirty="0"/>
+                        <a:t>87.77%</a:t>
+                      </a:r>
+                    </a:p>
+                  </a:txBody>
+                  <a:tcPr/>
+                </a:tc>
+                <a:tc>
+                  <a:txBody>
+                    <a:bodyPr/>
+                    <a:lstStyle/>
+                    <a:p>
+                      <a:pPr algn="ctr"/>
+                      <a:r>
+                        <a:rPr lang="it-IT" u="none" dirty="0"/>
+                        <a:t>95.95%</a:t>
+                      </a:r>
+                    </a:p>
+                  </a:txBody>
+                  <a:tcPr/>
+                </a:tc>
+                <a:tc>
+                  <a:txBody>
+                    <a:bodyPr/>
+                    <a:lstStyle/>
+                    <a:p>
+                      <a:pPr algn="ctr"/>
+                      <a:r>
+                        <a:rPr lang="it-IT" u="none" dirty="0"/>
+                        <a:t>90.92%</a:t>
+                      </a:r>
+                    </a:p>
+                  </a:txBody>
+                  <a:tcPr/>
+                </a:tc>
+                <a:tc>
+                  <a:txBody>
+                    <a:bodyPr/>
+                    <a:lstStyle/>
+                    <a:p>
+                      <a:pPr algn="ctr"/>
+                      <a:r>
+                        <a:rPr lang="it-IT" u="none" dirty="0"/>
+                        <a:t>95.95%</a:t>
+                      </a:r>
+                    </a:p>
+                  </a:txBody>
+                  <a:tcPr/>
+                </a:tc>
+                <a:tc>
+                  <a:txBody>
+                    <a:bodyPr/>
+                    <a:lstStyle/>
+                    <a:p>
+                      <a:pPr algn="ctr"/>
+                      <a:r>
+                        <a:rPr lang="it-IT" u="sng" dirty="0">
+                          <a:effectLst>
+                            <a:outerShdw blurRad="38100" dist="38100" dir="2700000" algn="tl">
+                              <a:srgbClr val="000000">
+                                <a:alpha val="43137"/>
+                              </a:srgbClr>
+                            </a:outerShdw>
+                          </a:effectLst>
+                        </a:rPr>
+                        <a:t>92.82%</a:t>
+                      </a:r>
+                    </a:p>
+                  </a:txBody>
+                  <a:tcPr/>
+                </a:tc>
+                <a:extLst>
+                  <a:ext uri="{0D108BD9-81ED-4DB2-BD59-A6C34878D82A}">
+                    <a16:rowId xmlns:a16="http://schemas.microsoft.com/office/drawing/2014/main" val="2898597429"/>
+                  </a:ext>
+                </a:extLst>
+              </a:tr>
+              <a:tr h="370840">
+                <a:tc>
+                  <a:txBody>
+                    <a:bodyPr/>
+                    <a:lstStyle/>
+                    <a:p>
+                      <a:pPr algn="ctr"/>
+                      <a:r>
+                        <a:rPr lang="it-IT" u="none" dirty="0"/>
+                        <a:t>-</a:t>
+                      </a:r>
+                    </a:p>
+                  </a:txBody>
+                  <a:tcPr/>
+                </a:tc>
+                <a:tc>
+                  <a:txBody>
+                    <a:bodyPr/>
+                    <a:lstStyle/>
+                    <a:p>
+                      <a:pPr marL="0" marR="0" lvl="0" indent="0" algn="ctr" defTabSz="914400" rtl="0" eaLnBrk="1" fontAlgn="auto" latinLnBrk="0" hangingPunct="1">
+                        <a:lnSpc>
+                          <a:spcPct val="100000"/>
+                        </a:lnSpc>
+                        <a:spcBef>
+                          <a:spcPts val="0"/>
+                        </a:spcBef>
+                        <a:spcAft>
+                          <a:spcPts val="0"/>
+                        </a:spcAft>
+                        <a:buClrTx/>
+                        <a:buSzTx/>
+                        <a:buFontTx/>
+                        <a:buNone/>
+                        <a:tabLst/>
+                        <a:defRPr/>
+                      </a:pPr>
+                      <a:r>
+                        <a:rPr lang="it-IT" u="none" dirty="0"/>
+                        <a:t>-</a:t>
+                      </a:r>
+                    </a:p>
+                  </a:txBody>
+                  <a:tcPr/>
+                </a:tc>
+                <a:tc>
+                  <a:txBody>
+                    <a:bodyPr/>
+                    <a:lstStyle/>
+                    <a:p>
+                      <a:pPr algn="ctr"/>
+                      <a:r>
+                        <a:rPr lang="it-IT" u="none" dirty="0">
+                          <a:solidFill>
+                            <a:srgbClr val="FF0000"/>
+                          </a:solidFill>
+                        </a:rPr>
+                        <a:t>-6.25%</a:t>
+                      </a:r>
+                    </a:p>
+                  </a:txBody>
+                  <a:tcPr/>
+                </a:tc>
+                <a:tc>
+                  <a:txBody>
+                    <a:bodyPr/>
+                    <a:lstStyle/>
+                    <a:p>
+                      <a:pPr algn="ctr"/>
+                      <a:r>
+                        <a:rPr lang="it-IT" u="none" dirty="0">
+                          <a:solidFill>
+                            <a:srgbClr val="FF0000"/>
+                          </a:solidFill>
+                        </a:rPr>
+                        <a:t>-11.67%</a:t>
+                      </a:r>
+                    </a:p>
+                  </a:txBody>
+                  <a:tcPr/>
+                </a:tc>
+                <a:tc>
+                  <a:txBody>
+                    <a:bodyPr/>
+                    <a:lstStyle/>
+                    <a:p>
+                      <a:pPr algn="ctr"/>
+                      <a:r>
+                        <a:rPr lang="it-IT" u="none" dirty="0">
+                          <a:solidFill>
+                            <a:srgbClr val="FF0000"/>
+                          </a:solidFill>
+                        </a:rPr>
+                        <a:t>-3.9%</a:t>
+                      </a:r>
+                    </a:p>
+                  </a:txBody>
+                  <a:tcPr/>
+                </a:tc>
+                <a:tc>
+                  <a:txBody>
+                    <a:bodyPr/>
+                    <a:lstStyle/>
+                    <a:p>
+                      <a:pPr algn="ctr"/>
+                      <a:r>
+                        <a:rPr lang="it-IT" u="none" dirty="0">
+                          <a:solidFill>
+                            <a:srgbClr val="FF0000"/>
+                          </a:solidFill>
+                        </a:rPr>
+                        <a:t>-8.73%</a:t>
+                      </a:r>
+                    </a:p>
+                  </a:txBody>
+                  <a:tcPr/>
+                </a:tc>
+                <a:tc>
+                  <a:txBody>
+                    <a:bodyPr/>
+                    <a:lstStyle/>
+                    <a:p>
+                      <a:pPr marL="0" marR="0" lvl="0" indent="0" algn="ctr" defTabSz="914400" rtl="0" eaLnBrk="1" fontAlgn="auto" latinLnBrk="0" hangingPunct="1">
+                        <a:lnSpc>
+                          <a:spcPct val="100000"/>
+                        </a:lnSpc>
+                        <a:spcBef>
+                          <a:spcPts val="0"/>
+                        </a:spcBef>
+                        <a:spcAft>
+                          <a:spcPts val="0"/>
+                        </a:spcAft>
+                        <a:buClrTx/>
+                        <a:buSzTx/>
+                        <a:buFontTx/>
+                        <a:buNone/>
+                        <a:tabLst/>
+                        <a:defRPr/>
+                      </a:pPr>
+                      <a:r>
+                        <a:rPr lang="it-IT" u="none" dirty="0">
+                          <a:solidFill>
+                            <a:srgbClr val="FF0000"/>
+                          </a:solidFill>
+                        </a:rPr>
+                        <a:t>-3.9%</a:t>
+                      </a:r>
+                    </a:p>
+                  </a:txBody>
+                  <a:tcPr/>
+                </a:tc>
+                <a:tc>
+                  <a:txBody>
+                    <a:bodyPr/>
+                    <a:lstStyle/>
+                    <a:p>
+                      <a:pPr algn="ctr"/>
+                      <a:r>
+                        <a:rPr lang="it-IT" b="1" u="sng" dirty="0">
+                          <a:solidFill>
+                            <a:srgbClr val="FF0000"/>
+                          </a:solidFill>
+                          <a:effectLst>
+                            <a:outerShdw blurRad="38100" dist="38100" dir="2700000" algn="tl">
+                              <a:srgbClr val="000000">
+                                <a:alpha val="43137"/>
+                              </a:srgbClr>
+                            </a:outerShdw>
+                          </a:effectLst>
+                        </a:rPr>
+                        <a:t>-6.89%</a:t>
+                      </a:r>
+                    </a:p>
+                  </a:txBody>
+                  <a:tcPr/>
+                </a:tc>
+                <a:extLst>
+                  <a:ext uri="{0D108BD9-81ED-4DB2-BD59-A6C34878D82A}">
+                    <a16:rowId xmlns:a16="http://schemas.microsoft.com/office/drawing/2014/main" val="1820419087"/>
+                  </a:ext>
+                </a:extLst>
+              </a:tr>
+            </a:tbl>
+          </a:graphicData>
+        </a:graphic>
+      </p:graphicFrame>
+    </p:spTree>
+    <p:extLst>
+      <p:ext uri="{BB962C8B-B14F-4D97-AF65-F5344CB8AC3E}">
+        <p14:creationId xmlns:p14="http://schemas.microsoft.com/office/powerpoint/2010/main" val="246173997"/>
+      </p:ext>
+    </p:extLst>
+  </p:cSld>
+  <p:clrMapOvr>
+    <a:masterClrMapping/>
+  </p:clrMapOvr>
+  <mc:AlternateContent xmlns:mc="http://schemas.openxmlformats.org/markup-compatibility/2006" xmlns:p159="http://schemas.microsoft.com/office/powerpoint/2015/09/main">
+    <mc:Choice Requires="p159">
+      <p:transition xmlns:p14="http://schemas.microsoft.com/office/powerpoint/2010/main" spd="slow" p14:dur="2000">
+        <p159:morph option="byObject"/>
+      </p:transition>
+    </mc:Choice>
+    <mc:Fallback xmlns="">
+      <p:transition spd="slow">
+        <p:fade/>
+      </p:transition>
+    </mc:Fallback>
+  </mc:AlternateContent>
+</p:sld>
+</file>
+
+<file path=ppt/slides/slide19.xml><?xml version="1.0" encoding="utf-8"?>
+<p:sld xmlns:a="http://schemas.openxmlformats.org/drawingml/2006/main" xmlns:r="http://schemas.openxmlformats.org/officeDocument/2006/relationships" xmlns:p="http://schemas.openxmlformats.org/presentationml/2006/main">
+  <p:cSld>
+    <p:spTree>
+      <p:nvGrpSpPr>
+        <p:cNvPr id="1" name=""/>
+        <p:cNvGrpSpPr/>
+        <p:nvPr/>
+      </p:nvGrpSpPr>
+      <p:grpSpPr>
+        <a:xfrm>
+          <a:off x="0" y="0"/>
+          <a:ext cx="0" cy="0"/>
+          <a:chOff x="0" y="0"/>
+          <a:chExt cx="0" cy="0"/>
+        </a:xfrm>
+      </p:grpSpPr>
+      <p:sp>
+        <p:nvSpPr>
+          <p:cNvPr id="2" name="Titolo 1">
+            <a:extLst>
+              <a:ext uri="{FF2B5EF4-FFF2-40B4-BE49-F238E27FC236}">
+                <a16:creationId xmlns:a16="http://schemas.microsoft.com/office/drawing/2014/main" id="{89BFC695-086C-B4EC-73A7-1C96830A57FC}"/>
+              </a:ext>
+            </a:extLst>
+          </p:cNvPr>
+          <p:cNvSpPr>
+            <a:spLocks noGrp="1"/>
+          </p:cNvSpPr>
+          <p:nvPr>
+            <p:ph type="title"/>
+          </p:nvPr>
+        </p:nvSpPr>
+        <p:spPr>
+          <a:xfrm>
+            <a:off x="700635" y="64892"/>
+            <a:ext cx="10691265" cy="731520"/>
+          </a:xfrm>
+        </p:spPr>
+        <p:txBody>
+          <a:bodyPr/>
+          <a:lstStyle/>
+          <a:p>
+            <a:r>
+              <a:rPr lang="it-IT" dirty="0" err="1"/>
+              <a:t>Experimental</a:t>
+            </a:r>
+            <a:r>
+              <a:rPr lang="it-IT" dirty="0"/>
+              <a:t> </a:t>
+            </a:r>
+            <a:r>
+              <a:rPr lang="it-IT" dirty="0" err="1"/>
+              <a:t>Results</a:t>
+            </a:r>
+            <a:r>
+              <a:rPr lang="it-IT" dirty="0"/>
+              <a:t> – </a:t>
+            </a:r>
+            <a:r>
+              <a:rPr lang="it-IT" dirty="0" err="1"/>
+              <a:t>Ablation</a:t>
+            </a:r>
+            <a:r>
+              <a:rPr lang="it-IT" dirty="0"/>
+              <a:t> Study</a:t>
+            </a:r>
+          </a:p>
+        </p:txBody>
+      </p:sp>
+      <p:sp>
+        <p:nvSpPr>
+          <p:cNvPr id="3" name="Segnaposto contenuto 2">
+            <a:extLst>
+              <a:ext uri="{FF2B5EF4-FFF2-40B4-BE49-F238E27FC236}">
+                <a16:creationId xmlns:a16="http://schemas.microsoft.com/office/drawing/2014/main" id="{D0989CEC-4EF2-4C30-65B5-7F2D3D8D99C6}"/>
+              </a:ext>
+            </a:extLst>
+          </p:cNvPr>
+          <p:cNvSpPr>
+            <a:spLocks noGrp="1"/>
+          </p:cNvSpPr>
+          <p:nvPr>
+            <p:ph idx="1"/>
+          </p:nvPr>
+        </p:nvSpPr>
+        <p:spPr>
+          <a:xfrm>
+            <a:off x="700635" y="1434223"/>
+            <a:ext cx="10691265" cy="4922127"/>
+          </a:xfrm>
+        </p:spPr>
+        <p:txBody>
+          <a:bodyPr/>
+          <a:lstStyle/>
+          <a:p>
+            <a:pPr marL="0" indent="0">
+              <a:buNone/>
+            </a:pPr>
+            <a:r>
+              <a:rPr lang="it-IT" dirty="0" err="1"/>
+              <a:t>Removing</a:t>
+            </a:r>
+            <a:r>
+              <a:rPr lang="it-IT" dirty="0"/>
+              <a:t> the CBAM </a:t>
+            </a:r>
+            <a:r>
+              <a:rPr lang="it-IT" dirty="0" err="1"/>
+              <a:t>blocks</a:t>
+            </a:r>
+            <a:r>
+              <a:rPr lang="it-IT" dirty="0"/>
+              <a:t> from the network:</a:t>
+            </a:r>
+          </a:p>
+        </p:txBody>
+      </p:sp>
+      <p:sp>
+        <p:nvSpPr>
+          <p:cNvPr id="4" name="Segnaposto data 3">
+            <a:extLst>
+              <a:ext uri="{FF2B5EF4-FFF2-40B4-BE49-F238E27FC236}">
+                <a16:creationId xmlns:a16="http://schemas.microsoft.com/office/drawing/2014/main" id="{986B8BF4-1BE6-8595-729D-749E6A001033}"/>
+              </a:ext>
+            </a:extLst>
+          </p:cNvPr>
+          <p:cNvSpPr>
+            <a:spLocks noGrp="1"/>
+          </p:cNvSpPr>
+          <p:nvPr>
+            <p:ph type="dt" sz="half" idx="10"/>
+          </p:nvPr>
+        </p:nvSpPr>
+        <p:spPr/>
+        <p:txBody>
+          <a:bodyPr/>
+          <a:lstStyle/>
+          <a:p>
+            <a:fld id="{5BB1D6AD-68FB-4B69-890D-0762D504BB10}" type="datetime1">
+              <a:rPr lang="en-US" smtClean="0"/>
+              <a:t>6/16/2025</a:t>
+            </a:fld>
+            <a:endParaRPr lang="en-US"/>
+          </a:p>
+        </p:txBody>
+      </p:sp>
+      <p:sp>
+        <p:nvSpPr>
+          <p:cNvPr id="5" name="Segnaposto numero diapositiva 4">
+            <a:extLst>
+              <a:ext uri="{FF2B5EF4-FFF2-40B4-BE49-F238E27FC236}">
+                <a16:creationId xmlns:a16="http://schemas.microsoft.com/office/drawing/2014/main" id="{CE457A08-BD32-07A0-232B-B52E83A53EE8}"/>
+              </a:ext>
+            </a:extLst>
+          </p:cNvPr>
+          <p:cNvSpPr>
+            <a:spLocks noGrp="1"/>
+          </p:cNvSpPr>
+          <p:nvPr>
+            <p:ph type="sldNum" sz="quarter" idx="12"/>
+          </p:nvPr>
+        </p:nvSpPr>
+        <p:spPr>
+          <a:xfrm>
+            <a:off x="10919012" y="6356350"/>
+            <a:ext cx="784038" cy="365125"/>
+          </a:xfrm>
+        </p:spPr>
+        <p:txBody>
+          <a:bodyPr/>
+          <a:lstStyle/>
+          <a:p>
+            <a:fld id="{87E7843D-FF13-4365-9478-9625B70A2705}" type="slidenum">
+              <a:rPr lang="en-US" smtClean="0"/>
+              <a:t>19</a:t>
+            </a:fld>
+            <a:r>
+              <a:rPr lang="en-US" dirty="0"/>
+              <a:t>/25</a:t>
+            </a:r>
+          </a:p>
+        </p:txBody>
+      </p:sp>
+      <p:graphicFrame>
+        <p:nvGraphicFramePr>
+          <p:cNvPr id="9" name="Tabella 6">
+            <a:extLst>
+              <a:ext uri="{FF2B5EF4-FFF2-40B4-BE49-F238E27FC236}">
+                <a16:creationId xmlns:a16="http://schemas.microsoft.com/office/drawing/2014/main" id="{A8F020F1-A172-9691-505F-6D992EFD00F3}"/>
+              </a:ext>
+            </a:extLst>
+          </p:cNvPr>
+          <p:cNvGraphicFramePr>
+            <a:graphicFrameLocks noGrp="1"/>
+          </p:cNvGraphicFramePr>
+          <p:nvPr>
+            <p:extLst>
+              <p:ext uri="{D42A27DB-BD31-4B8C-83A1-F6EECF244321}">
+                <p14:modId xmlns:p14="http://schemas.microsoft.com/office/powerpoint/2010/main" val="2601569063"/>
+              </p:ext>
+            </p:extLst>
+          </p:nvPr>
+        </p:nvGraphicFramePr>
+        <p:xfrm>
+          <a:off x="1602759" y="2622696"/>
+          <a:ext cx="8887014" cy="2692608"/>
+        </p:xfrm>
+        <a:graphic>
+          <a:graphicData uri="http://schemas.openxmlformats.org/drawingml/2006/table">
+            <a:tbl>
+              <a:tblPr firstRow="1" bandRow="1">
+                <a:tableStyleId>{5C22544A-7EE6-4342-B048-85BDC9FD1C3A}</a:tableStyleId>
+              </a:tblPr>
+              <a:tblGrid>
+                <a:gridCol w="1481169">
+                  <a:extLst>
+                    <a:ext uri="{9D8B030D-6E8A-4147-A177-3AD203B41FA5}">
+                      <a16:colId xmlns:a16="http://schemas.microsoft.com/office/drawing/2014/main" val="3767278069"/>
+                    </a:ext>
+                  </a:extLst>
+                </a:gridCol>
+                <a:gridCol w="1481169">
+                  <a:extLst>
+                    <a:ext uri="{9D8B030D-6E8A-4147-A177-3AD203B41FA5}">
+                      <a16:colId xmlns:a16="http://schemas.microsoft.com/office/drawing/2014/main" val="161951504"/>
+                    </a:ext>
+                  </a:extLst>
+                </a:gridCol>
+                <a:gridCol w="1481169">
+                  <a:extLst>
+                    <a:ext uri="{9D8B030D-6E8A-4147-A177-3AD203B41FA5}">
+                      <a16:colId xmlns:a16="http://schemas.microsoft.com/office/drawing/2014/main" val="4094475366"/>
+                    </a:ext>
+                  </a:extLst>
+                </a:gridCol>
+                <a:gridCol w="1481169">
+                  <a:extLst>
+                    <a:ext uri="{9D8B030D-6E8A-4147-A177-3AD203B41FA5}">
+                      <a16:colId xmlns:a16="http://schemas.microsoft.com/office/drawing/2014/main" val="1704147285"/>
+                    </a:ext>
+                  </a:extLst>
+                </a:gridCol>
+                <a:gridCol w="1481169">
+                  <a:extLst>
+                    <a:ext uri="{9D8B030D-6E8A-4147-A177-3AD203B41FA5}">
+                      <a16:colId xmlns:a16="http://schemas.microsoft.com/office/drawing/2014/main" val="4275181983"/>
+                    </a:ext>
+                  </a:extLst>
+                </a:gridCol>
+                <a:gridCol w="1481169">
+                  <a:extLst>
+                    <a:ext uri="{9D8B030D-6E8A-4147-A177-3AD203B41FA5}">
+                      <a16:colId xmlns:a16="http://schemas.microsoft.com/office/drawing/2014/main" val="131746807"/>
+                    </a:ext>
+                  </a:extLst>
+                </a:gridCol>
+              </a:tblGrid>
+              <a:tr h="532604">
                 <a:tc>
                   <a:txBody>
                     <a:bodyPr/>
@@ -19405,20 +22332,7 @@
                   </a:ext>
                 </a:extLst>
               </a:tr>
-              <a:tr h="0">
-                <a:tc>
-                  <a:txBody>
-                    <a:bodyPr/>
-                    <a:lstStyle/>
-                    <a:p>
-                      <a:r>
-                        <a:rPr lang="it-IT" dirty="0"/>
-                        <a:t>FGSM</a:t>
-                      </a:r>
-                    </a:p>
-                  </a:txBody>
-                  <a:tcPr/>
-                </a:tc>
+              <a:tr h="540001">
                 <a:tc>
                   <a:txBody>
                     <a:bodyPr/>
@@ -19440,7 +22354,7 @@
                       <a:pPr algn="ctr"/>
                       <a:r>
                         <a:rPr lang="it-IT" dirty="0"/>
-                        <a:t>93,51% </a:t>
+                        <a:t>99.82% </a:t>
                       </a:r>
                     </a:p>
                   </a:txBody>
@@ -19454,7 +22368,7 @@
                       <a:pPr algn="ctr"/>
                       <a:r>
                         <a:rPr lang="it-IT" dirty="0"/>
-                        <a:t>87,75%</a:t>
+                        <a:t>99.55%</a:t>
                       </a:r>
                     </a:p>
                   </a:txBody>
@@ -19468,7 +22382,7 @@
                       <a:pPr algn="ctr"/>
                       <a:r>
                         <a:rPr lang="it-IT" dirty="0"/>
-                        <a:t>95,9%</a:t>
+                        <a:t>99.88%</a:t>
                       </a:r>
                     </a:p>
                   </a:txBody>
@@ -19482,7 +22396,7 @@
                       <a:pPr algn="ctr"/>
                       <a:r>
                         <a:rPr lang="it-IT" dirty="0"/>
-                        <a:t>90,90%</a:t>
+                        <a:t>99.71%</a:t>
                       </a:r>
                     </a:p>
                   </a:txBody>
@@ -19496,7 +22410,7 @@
                       <a:pPr algn="ctr"/>
                       <a:r>
                         <a:rPr lang="it-IT" dirty="0"/>
-                        <a:t>95,9%</a:t>
+                        <a:t>99.88%</a:t>
                       </a:r>
                     </a:p>
                   </a:txBody>
@@ -19508,29 +22422,12 @@
                   </a:ext>
                 </a:extLst>
               </a:tr>
-              <a:tr h="370840">
+              <a:tr h="540001">
                 <a:tc>
                   <a:txBody>
                     <a:bodyPr/>
                     <a:lstStyle/>
                     <a:p>
-                      <a:r>
-                        <a:rPr lang="it-IT" dirty="0"/>
-                        <a:t>FGSM</a:t>
-                      </a:r>
-                    </a:p>
-                  </a:txBody>
-                  <a:tcPr/>
-                </a:tc>
-                <a:tc>
-                  <a:txBody>
-                    <a:bodyPr/>
-                    <a:lstStyle/>
-                    <a:p>
-                      <a:r>
-                        <a:rPr lang="it-IT" dirty="0" err="1"/>
-                        <a:t>Regularized</a:t>
-                      </a:r>
                       <a:endParaRPr lang="it-IT" dirty="0"/>
                     </a:p>
                   </a:txBody>
@@ -19543,8 +22440,12 @@
                     <a:p>
                       <a:pPr algn="ctr"/>
                       <a:r>
-                        <a:rPr lang="it-IT" dirty="0"/>
-                        <a:t>92,83%</a:t>
+                        <a:rPr lang="it-IT" dirty="0">
+                          <a:solidFill>
+                            <a:srgbClr val="FF0000"/>
+                          </a:solidFill>
+                        </a:rPr>
+                        <a:t>-0.02%</a:t>
                       </a:r>
                     </a:p>
                   </a:txBody>
@@ -19557,8 +22458,12 @@
                     <a:p>
                       <a:pPr algn="ctr"/>
                       <a:r>
-                        <a:rPr lang="it-IT" dirty="0"/>
-                        <a:t>86,85%</a:t>
+                        <a:rPr lang="it-IT" dirty="0">
+                          <a:solidFill>
+                            <a:srgbClr val="FF0000"/>
+                          </a:solidFill>
+                        </a:rPr>
+                        <a:t>-0.05%</a:t>
                       </a:r>
                     </a:p>
                   </a:txBody>
@@ -19571,8 +22476,12 @@
                     <a:p>
                       <a:pPr algn="ctr"/>
                       <a:r>
-                        <a:rPr lang="it-IT" dirty="0"/>
-                        <a:t>95,12%</a:t>
+                        <a:rPr lang="it-IT" dirty="0">
+                          <a:solidFill>
+                            <a:srgbClr val="FF0000"/>
+                          </a:solidFill>
+                        </a:rPr>
+                        <a:t>-0.02%</a:t>
                       </a:r>
                     </a:p>
                   </a:txBody>
@@ -19585,8 +22494,12 @@
                     <a:p>
                       <a:pPr algn="ctr"/>
                       <a:r>
-                        <a:rPr lang="it-IT" dirty="0"/>
-                        <a:t>89,99%</a:t>
+                        <a:rPr lang="it-IT" dirty="0">
+                          <a:solidFill>
+                            <a:srgbClr val="FF0000"/>
+                          </a:solidFill>
+                        </a:rPr>
+                        <a:t>-0.04%</a:t>
                       </a:r>
                     </a:p>
                   </a:txBody>
@@ -19597,144 +22510,7 @@
                     <a:bodyPr/>
                     <a:lstStyle/>
                     <a:p>
-                      <a:pPr algn="ctr"/>
-                      <a:r>
-                        <a:rPr lang="it-IT" dirty="0"/>
-                        <a:t>95,12%</a:t>
-                      </a:r>
-                    </a:p>
-                  </a:txBody>
-                  <a:tcPr/>
-                </a:tc>
-                <a:extLst>
-                  <a:ext uri="{0D108BD9-81ED-4DB2-BD59-A6C34878D82A}">
-                    <a16:rowId xmlns:a16="http://schemas.microsoft.com/office/drawing/2014/main" val="749147313"/>
-                  </a:ext>
-                </a:extLst>
-              </a:tr>
-              <a:tr h="370840">
-                <a:tc>
-                  <a:txBody>
-                    <a:bodyPr/>
-                    <a:lstStyle/>
-                    <a:p>
-                      <a:r>
-                        <a:rPr lang="it-IT" dirty="0"/>
-                        <a:t>PGD</a:t>
-                      </a:r>
-                    </a:p>
-                  </a:txBody>
-                  <a:tcPr/>
-                </a:tc>
-                <a:tc>
-                  <a:txBody>
-                    <a:bodyPr/>
-                    <a:lstStyle/>
-                    <a:p>
-                      <a:r>
-                        <a:rPr lang="it-IT" dirty="0"/>
-                        <a:t>Baseline</a:t>
-                      </a:r>
-                    </a:p>
-                  </a:txBody>
-                  <a:tcPr/>
-                </a:tc>
-                <a:tc>
-                  <a:txBody>
-                    <a:bodyPr/>
-                    <a:lstStyle/>
-                    <a:p>
-                      <a:pPr algn="ctr"/>
-                      <a:r>
-                        <a:rPr lang="it-IT" dirty="0"/>
-                        <a:t>93,13%</a:t>
-                      </a:r>
-                    </a:p>
-                  </a:txBody>
-                  <a:tcPr/>
-                </a:tc>
-                <a:tc>
-                  <a:txBody>
-                    <a:bodyPr/>
-                    <a:lstStyle/>
-                    <a:p>
-                      <a:pPr algn="ctr"/>
-                      <a:r>
-                        <a:rPr lang="it-IT" dirty="0"/>
-                        <a:t>87,22%</a:t>
-                      </a:r>
-                    </a:p>
-                  </a:txBody>
-                  <a:tcPr/>
-                </a:tc>
-                <a:tc>
-                  <a:txBody>
-                    <a:bodyPr/>
-                    <a:lstStyle/>
-                    <a:p>
-                      <a:pPr algn="ctr"/>
-                      <a:r>
-                        <a:rPr lang="it-IT" dirty="0"/>
-                        <a:t>95,68%</a:t>
-                      </a:r>
-                    </a:p>
-                  </a:txBody>
-                  <a:tcPr/>
-                </a:tc>
-                <a:tc>
-                  <a:txBody>
-                    <a:bodyPr/>
-                    <a:lstStyle/>
-                    <a:p>
-                      <a:pPr algn="ctr"/>
-                      <a:r>
-                        <a:rPr lang="it-IT" dirty="0"/>
-                        <a:t>90,42%</a:t>
-                      </a:r>
-                    </a:p>
-                  </a:txBody>
-                  <a:tcPr/>
-                </a:tc>
-                <a:tc>
-                  <a:txBody>
-                    <a:bodyPr/>
-                    <a:lstStyle/>
-                    <a:p>
-                      <a:pPr algn="ctr"/>
-                      <a:r>
-                        <a:rPr lang="it-IT" dirty="0"/>
-                        <a:t>95,68%</a:t>
-                      </a:r>
-                    </a:p>
-                  </a:txBody>
-                  <a:tcPr/>
-                </a:tc>
-                <a:extLst>
-                  <a:ext uri="{0D108BD9-81ED-4DB2-BD59-A6C34878D82A}">
-                    <a16:rowId xmlns:a16="http://schemas.microsoft.com/office/drawing/2014/main" val="416260902"/>
-                  </a:ext>
-                </a:extLst>
-              </a:tr>
-              <a:tr h="370840">
-                <a:tc>
-                  <a:txBody>
-                    <a:bodyPr/>
-                    <a:lstStyle/>
-                    <a:p>
-                      <a:r>
-                        <a:rPr lang="it-IT" dirty="0"/>
-                        <a:t>PGD</a:t>
-                      </a:r>
-                    </a:p>
-                  </a:txBody>
-                  <a:tcPr/>
-                </a:tc>
-                <a:tc>
-                  <a:txBody>
-                    <a:bodyPr/>
-                    <a:lstStyle/>
-                    <a:p>
-                      <a:pPr marL="0" marR="0" lvl="0" indent="0" algn="l" defTabSz="914400" rtl="0" eaLnBrk="1" fontAlgn="auto" latinLnBrk="0" hangingPunct="1">
+                      <a:pPr marL="0" marR="0" lvl="0" indent="0" algn="ctr" defTabSz="914400" rtl="0" eaLnBrk="1" fontAlgn="auto" latinLnBrk="0" hangingPunct="1">
                         <a:lnSpc>
                           <a:spcPct val="100000"/>
                         </a:lnSpc>
@@ -19752,7 +22528,31 @@
                         <a:defRPr/>
                       </a:pPr>
                       <a:r>
-                        <a:rPr lang="it-IT" dirty="0" err="1"/>
+                        <a:rPr lang="it-IT" dirty="0">
+                          <a:solidFill>
+                            <a:srgbClr val="FF0000"/>
+                          </a:solidFill>
+                        </a:rPr>
+                        <a:t>-0.02%</a:t>
+                      </a:r>
+                    </a:p>
+                  </a:txBody>
+                  <a:tcPr/>
+                </a:tc>
+                <a:extLst>
+                  <a:ext uri="{0D108BD9-81ED-4DB2-BD59-A6C34878D82A}">
+                    <a16:rowId xmlns:a16="http://schemas.microsoft.com/office/drawing/2014/main" val="3826629099"/>
+                  </a:ext>
+                </a:extLst>
+              </a:tr>
+              <a:tr h="540001">
+                <a:tc>
+                  <a:txBody>
+                    <a:bodyPr/>
+                    <a:lstStyle/>
+                    <a:p>
+                      <a:r>
+                        <a:rPr lang="it-IT"/>
                         <a:t>Regularized</a:t>
                       </a:r>
                       <a:endParaRPr lang="it-IT" dirty="0"/>
@@ -19768,7 +22568,7 @@
                       <a:pPr algn="ctr"/>
                       <a:r>
                         <a:rPr lang="it-IT" dirty="0"/>
-                        <a:t>93,24%</a:t>
+                        <a:t>99.79%</a:t>
                       </a:r>
                     </a:p>
                   </a:txBody>
@@ -19782,7 +22582,7 @@
                       <a:pPr algn="ctr"/>
                       <a:r>
                         <a:rPr lang="it-IT" dirty="0"/>
-                        <a:t>87,38%</a:t>
+                        <a:t>99.48%</a:t>
                       </a:r>
                     </a:p>
                   </a:txBody>
@@ -19796,7 +22596,7 @@
                       <a:pPr algn="ctr"/>
                       <a:r>
                         <a:rPr lang="it-IT" dirty="0"/>
-                        <a:t>95,78%</a:t>
+                        <a:t>99.86%</a:t>
                       </a:r>
                     </a:p>
                   </a:txBody>
@@ -19810,7 +22610,7 @@
                       <a:pPr algn="ctr"/>
                       <a:r>
                         <a:rPr lang="it-IT" dirty="0"/>
-                        <a:t>90,57%</a:t>
+                        <a:t>99.67%</a:t>
                       </a:r>
                     </a:p>
                   </a:txBody>
@@ -19824,7 +22624,7 @@
                       <a:pPr algn="ctr"/>
                       <a:r>
                         <a:rPr lang="it-IT" dirty="0"/>
-                        <a:t>95,78%</a:t>
+                        <a:t>99.86%</a:t>
                       </a:r>
                     </a:p>
                   </a:txBody>
@@ -19832,20 +22632,17 @@
                 </a:tc>
                 <a:extLst>
                   <a:ext uri="{0D108BD9-81ED-4DB2-BD59-A6C34878D82A}">
-                    <a16:rowId xmlns:a16="http://schemas.microsoft.com/office/drawing/2014/main" val="1723150831"/>
+                    <a16:rowId xmlns:a16="http://schemas.microsoft.com/office/drawing/2014/main" val="749147313"/>
                   </a:ext>
                 </a:extLst>
               </a:tr>
-              <a:tr h="370840">
+              <a:tr h="540001">
                 <a:tc>
                   <a:txBody>
                     <a:bodyPr/>
                     <a:lstStyle/>
                     <a:p>
-                      <a:r>
-                        <a:rPr lang="it-IT" dirty="0"/>
-                        <a:t>Patch</a:t>
-                      </a:r>
+                      <a:endParaRPr lang="it-IT" dirty="0"/>
                     </a:p>
                   </a:txBody>
                   <a:tcPr/>
@@ -19855,9 +22652,14 @@
                     <a:bodyPr/>
                     <a:lstStyle/>
                     <a:p>
+                      <a:pPr algn="ctr"/>
                       <a:r>
-                        <a:rPr lang="it-IT" dirty="0"/>
-                        <a:t>Baseline</a:t>
+                        <a:rPr lang="it-IT" dirty="0">
+                          <a:solidFill>
+                            <a:srgbClr val="00B050"/>
+                          </a:solidFill>
+                        </a:rPr>
+                        <a:t>+0.02%</a:t>
                       </a:r>
                     </a:p>
                   </a:txBody>
@@ -19870,8 +22672,12 @@
                     <a:p>
                       <a:pPr algn="ctr"/>
                       <a:r>
-                        <a:rPr lang="it-IT" dirty="0"/>
-                        <a:t>93,54%</a:t>
+                        <a:rPr lang="it-IT" dirty="0">
+                          <a:solidFill>
+                            <a:srgbClr val="00B050"/>
+                          </a:solidFill>
+                        </a:rPr>
+                        <a:t>+0.04%</a:t>
                       </a:r>
                     </a:p>
                   </a:txBody>
@@ -19884,8 +22690,12 @@
                     <a:p>
                       <a:pPr algn="ctr"/>
                       <a:r>
-                        <a:rPr lang="it-IT" dirty="0"/>
-                        <a:t>87,80%</a:t>
+                        <a:rPr lang="it-IT" dirty="0">
+                          <a:solidFill>
+                            <a:srgbClr val="00B050"/>
+                          </a:solidFill>
+                        </a:rPr>
+                        <a:t>+0.00%</a:t>
                       </a:r>
                     </a:p>
                   </a:txBody>
@@ -19898,8 +22708,12 @@
                     <a:p>
                       <a:pPr algn="ctr"/>
                       <a:r>
-                        <a:rPr lang="it-IT" dirty="0"/>
-                        <a:t>95,96%</a:t>
+                        <a:rPr lang="it-IT" dirty="0">
+                          <a:solidFill>
+                            <a:srgbClr val="00B050"/>
+                          </a:solidFill>
+                        </a:rPr>
+                        <a:t>+0.02%</a:t>
                       </a:r>
                     </a:p>
                   </a:txBody>
@@ -19910,55 +22724,7 @@
                     <a:bodyPr/>
                     <a:lstStyle/>
                     <a:p>
-                      <a:pPr algn="ctr"/>
-                      <a:r>
-                        <a:rPr lang="it-IT" dirty="0"/>
-                        <a:t>90,95%</a:t>
-                      </a:r>
-                    </a:p>
-                  </a:txBody>
-                  <a:tcPr/>
-                </a:tc>
-                <a:tc>
-                  <a:txBody>
-                    <a:bodyPr/>
-                    <a:lstStyle/>
-                    <a:p>
-                      <a:pPr algn="ctr"/>
-                      <a:r>
-                        <a:rPr lang="it-IT" dirty="0"/>
-                        <a:t>95,96%</a:t>
-                      </a:r>
-                    </a:p>
-                  </a:txBody>
-                  <a:tcPr/>
-                </a:tc>
-                <a:extLst>
-                  <a:ext uri="{0D108BD9-81ED-4DB2-BD59-A6C34878D82A}">
-                    <a16:rowId xmlns:a16="http://schemas.microsoft.com/office/drawing/2014/main" val="2744983496"/>
-                  </a:ext>
-                </a:extLst>
-              </a:tr>
-              <a:tr h="370840">
-                <a:tc>
-                  <a:txBody>
-                    <a:bodyPr/>
-                    <a:lstStyle/>
-                    <a:p>
-                      <a:r>
-                        <a:rPr lang="it-IT" dirty="0"/>
-                        <a:t>Patch</a:t>
-                      </a:r>
-                    </a:p>
-                  </a:txBody>
-                  <a:tcPr/>
-                </a:tc>
-                <a:tc>
-                  <a:txBody>
-                    <a:bodyPr/>
-                    <a:lstStyle/>
-                    <a:p>
-                      <a:pPr marL="0" marR="0" lvl="0" indent="0" algn="l" defTabSz="914400" rtl="0" eaLnBrk="1" fontAlgn="auto" latinLnBrk="0" hangingPunct="1">
+                      <a:pPr marL="0" marR="0" lvl="0" indent="0" algn="ctr" defTabSz="914400" rtl="0" eaLnBrk="1" fontAlgn="auto" latinLnBrk="0" hangingPunct="1">
                         <a:lnSpc>
                           <a:spcPct val="100000"/>
                         </a:lnSpc>
@@ -19976,79 +22742,12 @@
                         <a:defRPr/>
                       </a:pPr>
                       <a:r>
-                        <a:rPr lang="it-IT" dirty="0" err="1"/>
-                        <a:t>Regularized</a:t>
-                      </a:r>
-                      <a:endParaRPr lang="it-IT" dirty="0"/>
-                    </a:p>
-                  </a:txBody>
-                  <a:tcPr/>
-                </a:tc>
-                <a:tc>
-                  <a:txBody>
-                    <a:bodyPr/>
-                    <a:lstStyle/>
-                    <a:p>
-                      <a:pPr algn="ctr"/>
-                      <a:r>
-                        <a:rPr lang="it-IT" dirty="0"/>
-                        <a:t>93,52%</a:t>
-                      </a:r>
-                    </a:p>
-                  </a:txBody>
-                  <a:tcPr/>
-                </a:tc>
-                <a:tc>
-                  <a:txBody>
-                    <a:bodyPr/>
-                    <a:lstStyle/>
-                    <a:p>
-                      <a:pPr algn="ctr"/>
-                      <a:r>
-                        <a:rPr lang="it-IT" dirty="0"/>
-                        <a:t>87,77%</a:t>
-                      </a:r>
-                    </a:p>
-                  </a:txBody>
-                  <a:tcPr/>
-                </a:tc>
-                <a:tc>
-                  <a:txBody>
-                    <a:bodyPr/>
-                    <a:lstStyle/>
-                    <a:p>
-                      <a:pPr algn="ctr"/>
-                      <a:r>
-                        <a:rPr lang="it-IT" dirty="0"/>
-                        <a:t>95,95%</a:t>
-                      </a:r>
-                    </a:p>
-                  </a:txBody>
-                  <a:tcPr/>
-                </a:tc>
-                <a:tc>
-                  <a:txBody>
-                    <a:bodyPr/>
-                    <a:lstStyle/>
-                    <a:p>
-                      <a:pPr algn="ctr"/>
-                      <a:r>
-                        <a:rPr lang="it-IT" dirty="0"/>
-                        <a:t>90,92%</a:t>
-                      </a:r>
-                    </a:p>
-                  </a:txBody>
-                  <a:tcPr/>
-                </a:tc>
-                <a:tc>
-                  <a:txBody>
-                    <a:bodyPr/>
-                    <a:lstStyle/>
-                    <a:p>
-                      <a:pPr algn="ctr"/>
-                      <a:r>
-                        <a:rPr lang="it-IT" dirty="0"/>
-                        <a:t>95,95%</a:t>
+                        <a:rPr lang="it-IT" dirty="0">
+                          <a:solidFill>
+                            <a:srgbClr val="00B050"/>
+                          </a:solidFill>
+                        </a:rPr>
+                        <a:t>+0.00%</a:t>
                       </a:r>
                     </a:p>
                   </a:txBody>
@@ -20056,7 +22755,7 @@
                 </a:tc>
                 <a:extLst>
                   <a:ext uri="{0D108BD9-81ED-4DB2-BD59-A6C34878D82A}">
-                    <a16:rowId xmlns:a16="http://schemas.microsoft.com/office/drawing/2014/main" val="2898597429"/>
+                    <a16:rowId xmlns:a16="http://schemas.microsoft.com/office/drawing/2014/main" val="3619719078"/>
                   </a:ext>
                 </a:extLst>
               </a:tr>
@@ -20067,606 +22766,12 @@
     </p:spTree>
     <p:extLst>
       <p:ext uri="{BB962C8B-B14F-4D97-AF65-F5344CB8AC3E}">
-        <p14:creationId xmlns:p14="http://schemas.microsoft.com/office/powerpoint/2010/main" val="246173997"/>
+        <p14:creationId xmlns:p14="http://schemas.microsoft.com/office/powerpoint/2010/main" val="912387640"/>
       </p:ext>
     </p:extLst>
   </p:cSld>
   <p:clrMapOvr>
     <a:masterClrMapping/>
-  </p:clrMapOvr>
-  <mc:AlternateContent xmlns:mc="http://schemas.openxmlformats.org/markup-compatibility/2006">
-    <mc:Choice xmlns:p159="http://schemas.microsoft.com/office/powerpoint/2015/09/main" Requires="p159">
-      <p:transition xmlns:p14="http://schemas.microsoft.com/office/powerpoint/2010/main" spd="slow" p14:dur="2000">
-        <p159:morph option="byObject"/>
-      </p:transition>
-    </mc:Choice>
-    <mc:Fallback>
-      <p:transition spd="slow">
-        <p:fade/>
-      </p:transition>
-    </mc:Fallback>
-  </mc:AlternateContent>
-</p:sld>
-</file>
-
-<file path=ppt/slides/slide19.xml><?xml version="1.0" encoding="utf-8"?>
-<p:sld xmlns:a="http://schemas.openxmlformats.org/drawingml/2006/main" xmlns:r="http://schemas.openxmlformats.org/officeDocument/2006/relationships" xmlns:p="http://schemas.openxmlformats.org/presentationml/2006/main">
-  <p:cSld>
-    <p:bg>
-      <p:bgPr>
-        <a:solidFill>
-          <a:schemeClr val="bg1"/>
-        </a:solidFill>
-        <a:effectLst/>
-      </p:bgPr>
-    </p:bg>
-    <p:spTree>
-      <p:nvGrpSpPr>
-        <p:cNvPr id="1" name=""/>
-        <p:cNvGrpSpPr/>
-        <p:nvPr/>
-      </p:nvGrpSpPr>
-      <p:grpSpPr>
-        <a:xfrm>
-          <a:off x="0" y="0"/>
-          <a:ext cx="0" cy="0"/>
-          <a:chOff x="0" y="0"/>
-          <a:chExt cx="0" cy="0"/>
-        </a:xfrm>
-      </p:grpSpPr>
-      <p:cxnSp>
-        <p:nvCxnSpPr>
-          <p:cNvPr id="8" name="Straight Connector 7">
-            <a:extLst>
-              <a:ext uri="{FF2B5EF4-FFF2-40B4-BE49-F238E27FC236}">
-                <a16:creationId xmlns:a16="http://schemas.microsoft.com/office/drawing/2014/main" id="{F64F9B95-9045-48D2-B9F3-2927E98F54AA}"/>
-              </a:ext>
-              <a:ext uri="{C183D7F6-B498-43B3-948B-1728B52AA6E4}">
-                <adec:decorative xmlns:adec="http://schemas.microsoft.com/office/drawing/2017/decorative" val="1"/>
-              </a:ext>
-            </a:extLst>
-          </p:cNvPr>
-          <p:cNvCxnSpPr>
-            <a:cxnSpLocks noGrp="1" noRot="1" noChangeAspect="1" noMove="1" noResize="1" noEditPoints="1" noAdjustHandles="1" noChangeArrowheads="1" noChangeShapeType="1"/>
-          </p:cNvCxnSpPr>
-          <p:nvPr>
-            <p:extLst>
-              <p:ext uri="{386F3935-93C4-4BCD-93E2-E3B085C9AB24}">
-                <p16:designElem xmlns:p16="http://schemas.microsoft.com/office/powerpoint/2015/main" val="1"/>
-              </p:ext>
-            </p:extLst>
-          </p:nvPr>
-        </p:nvCxnSpPr>
-        <p:spPr>
-          <a:xfrm>
-            <a:off x="800100" y="723900"/>
-            <a:ext cx="10591800" cy="0"/>
-          </a:xfrm>
-          <a:prstGeom prst="line">
-            <a:avLst/>
-          </a:prstGeom>
-          <a:ln w="44450">
-            <a:solidFill>
-              <a:schemeClr val="tx1"/>
-            </a:solidFill>
-          </a:ln>
-        </p:spPr>
-        <p:style>
-          <a:lnRef idx="1">
-            <a:schemeClr val="accent1"/>
-          </a:lnRef>
-          <a:fillRef idx="0">
-            <a:schemeClr val="accent1"/>
-          </a:fillRef>
-          <a:effectRef idx="0">
-            <a:schemeClr val="accent1"/>
-          </a:effectRef>
-          <a:fontRef idx="minor">
-            <a:schemeClr val="tx1"/>
-          </a:fontRef>
-        </p:style>
-      </p:cxnSp>
-      <p:cxnSp>
-        <p:nvCxnSpPr>
-          <p:cNvPr id="10" name="Straight Connector 9">
-            <a:extLst>
-              <a:ext uri="{FF2B5EF4-FFF2-40B4-BE49-F238E27FC236}">
-                <a16:creationId xmlns:a16="http://schemas.microsoft.com/office/drawing/2014/main" id="{085AA86F-6A4D-4BCB-A045-D992CDC2959B}"/>
-              </a:ext>
-              <a:ext uri="{C183D7F6-B498-43B3-948B-1728B52AA6E4}">
-                <adec:decorative xmlns:adec="http://schemas.microsoft.com/office/drawing/2017/decorative" val="1"/>
-              </a:ext>
-            </a:extLst>
-          </p:cNvPr>
-          <p:cNvCxnSpPr>
-            <a:cxnSpLocks noGrp="1" noRot="1" noChangeAspect="1" noMove="1" noResize="1" noEditPoints="1" noAdjustHandles="1" noChangeArrowheads="1" noChangeShapeType="1"/>
-          </p:cNvCxnSpPr>
-          <p:nvPr>
-            <p:extLst>
-              <p:ext uri="{386F3935-93C4-4BCD-93E2-E3B085C9AB24}">
-                <p16:designElem xmlns:p16="http://schemas.microsoft.com/office/powerpoint/2015/main" val="1"/>
-              </p:ext>
-            </p:extLst>
-          </p:nvPr>
-        </p:nvCxnSpPr>
-        <p:spPr>
-          <a:xfrm>
-            <a:off x="800100" y="6142781"/>
-            <a:ext cx="10591800" cy="0"/>
-          </a:xfrm>
-          <a:prstGeom prst="line">
-            <a:avLst/>
-          </a:prstGeom>
-          <a:ln w="12700">
-            <a:solidFill>
-              <a:schemeClr val="tx1"/>
-            </a:solidFill>
-          </a:ln>
-        </p:spPr>
-        <p:style>
-          <a:lnRef idx="1">
-            <a:schemeClr val="accent1"/>
-          </a:lnRef>
-          <a:fillRef idx="0">
-            <a:schemeClr val="accent1"/>
-          </a:fillRef>
-          <a:effectRef idx="0">
-            <a:schemeClr val="accent1"/>
-          </a:effectRef>
-          <a:fontRef idx="minor">
-            <a:schemeClr val="tx1"/>
-          </a:fontRef>
-        </p:style>
-      </p:cxnSp>
-      <p:sp useBgFill="1">
-        <p:nvSpPr>
-          <p:cNvPr id="12" name="Rectangle 11">
-            <a:extLst>
-              <a:ext uri="{FF2B5EF4-FFF2-40B4-BE49-F238E27FC236}">
-                <a16:creationId xmlns:a16="http://schemas.microsoft.com/office/drawing/2014/main" id="{DEF92653-5D6D-47E6-8744-0DAF76E049C4}"/>
-              </a:ext>
-              <a:ext uri="{C183D7F6-B498-43B3-948B-1728B52AA6E4}">
-                <adec:decorative xmlns:adec="http://schemas.microsoft.com/office/drawing/2017/decorative" val="1"/>
-              </a:ext>
-            </a:extLst>
-          </p:cNvPr>
-          <p:cNvSpPr>
-            <a:spLocks noGrp="1" noRot="1" noChangeAspect="1" noMove="1" noResize="1" noEditPoints="1" noAdjustHandles="1" noChangeArrowheads="1" noChangeShapeType="1" noTextEdit="1"/>
-          </p:cNvSpPr>
-          <p:nvPr>
-            <p:extLst>
-              <p:ext uri="{386F3935-93C4-4BCD-93E2-E3B085C9AB24}">
-                <p16:designElem xmlns:p16="http://schemas.microsoft.com/office/powerpoint/2015/main" val="1"/>
-              </p:ext>
-            </p:extLst>
-          </p:nvPr>
-        </p:nvSpPr>
-        <p:spPr>
-          <a:xfrm>
-            <a:off x="0" y="0"/>
-            <a:ext cx="12192000" cy="6858000"/>
-          </a:xfrm>
-          <a:prstGeom prst="rect">
-            <a:avLst/>
-          </a:prstGeom>
-          <a:ln w="12700" cap="flat" cmpd="sng" algn="ctr">
-            <a:noFill/>
-            <a:prstDash val="solid"/>
-            <a:miter lim="800000"/>
-          </a:ln>
-          <a:effectLst/>
-        </p:spPr>
-        <p:style>
-          <a:lnRef idx="2">
-            <a:schemeClr val="accent1">
-              <a:shade val="50000"/>
-            </a:schemeClr>
-          </a:lnRef>
-          <a:fillRef idx="1">
-            <a:schemeClr val="accent1"/>
-          </a:fillRef>
-          <a:effectRef idx="0">
-            <a:schemeClr val="accent1"/>
-          </a:effectRef>
-          <a:fontRef idx="minor">
-            <a:schemeClr val="lt1"/>
-          </a:fontRef>
-        </p:style>
-        <p:txBody>
-          <a:bodyPr rtlCol="0" anchor="ctr"/>
-          <a:lstStyle/>
-          <a:p>
-            <a:pPr algn="ctr"/>
-            <a:endParaRPr lang="en-US"/>
-          </a:p>
-        </p:txBody>
-      </p:sp>
-      <p:sp>
-        <p:nvSpPr>
-          <p:cNvPr id="2" name="Titolo 1">
-            <a:extLst>
-              <a:ext uri="{FF2B5EF4-FFF2-40B4-BE49-F238E27FC236}">
-                <a16:creationId xmlns:a16="http://schemas.microsoft.com/office/drawing/2014/main" id="{4065EE87-6213-BC48-8C72-DF1AB3B5C4FF}"/>
-              </a:ext>
-            </a:extLst>
-          </p:cNvPr>
-          <p:cNvSpPr>
-            <a:spLocks noGrp="1"/>
-          </p:cNvSpPr>
-          <p:nvPr>
-            <p:ph type="title"/>
-          </p:nvPr>
-        </p:nvSpPr>
-        <p:spPr>
-          <a:xfrm>
-            <a:off x="754107" y="140239"/>
-            <a:ext cx="2060939" cy="640284"/>
-          </a:xfrm>
-        </p:spPr>
-        <p:txBody>
-          <a:bodyPr vert="horz" lIns="91440" tIns="45720" rIns="91440" bIns="45720" rtlCol="0" anchor="t">
-            <a:normAutofit fontScale="90000"/>
-          </a:bodyPr>
-          <a:lstStyle/>
-          <a:p>
-            <a:r>
-              <a:rPr lang="en-US" dirty="0"/>
-              <a:t>Outline</a:t>
-            </a:r>
-          </a:p>
-        </p:txBody>
-      </p:sp>
-      <p:cxnSp>
-        <p:nvCxnSpPr>
-          <p:cNvPr id="14" name="Straight Connector 13">
-            <a:extLst>
-              <a:ext uri="{FF2B5EF4-FFF2-40B4-BE49-F238E27FC236}">
-                <a16:creationId xmlns:a16="http://schemas.microsoft.com/office/drawing/2014/main" id="{9CA98CE3-81A7-4FFE-A047-9AA65998D877}"/>
-              </a:ext>
-              <a:ext uri="{C183D7F6-B498-43B3-948B-1728B52AA6E4}">
-                <adec:decorative xmlns:adec="http://schemas.microsoft.com/office/drawing/2017/decorative" val="1"/>
-              </a:ext>
-            </a:extLst>
-          </p:cNvPr>
-          <p:cNvCxnSpPr>
-            <a:cxnSpLocks noGrp="1" noRot="1" noChangeAspect="1" noMove="1" noResize="1" noEditPoints="1" noAdjustHandles="1" noChangeArrowheads="1" noChangeShapeType="1"/>
-          </p:cNvCxnSpPr>
-          <p:nvPr>
-            <p:extLst>
-              <p:ext uri="{386F3935-93C4-4BCD-93E2-E3B085C9AB24}">
-                <p16:designElem xmlns:p16="http://schemas.microsoft.com/office/powerpoint/2015/main" val="1"/>
-              </p:ext>
-            </p:extLst>
-          </p:nvPr>
-        </p:nvCxnSpPr>
-        <p:spPr>
-          <a:xfrm>
-            <a:off x="800100" y="723900"/>
-            <a:ext cx="10591800" cy="0"/>
-          </a:xfrm>
-          <a:prstGeom prst="line">
-            <a:avLst/>
-          </a:prstGeom>
-          <a:ln w="44450">
-            <a:solidFill>
-              <a:schemeClr val="tx1"/>
-            </a:solidFill>
-          </a:ln>
-        </p:spPr>
-        <p:style>
-          <a:lnRef idx="1">
-            <a:schemeClr val="accent1"/>
-          </a:lnRef>
-          <a:fillRef idx="0">
-            <a:schemeClr val="accent1"/>
-          </a:fillRef>
-          <a:effectRef idx="0">
-            <a:schemeClr val="accent1"/>
-          </a:effectRef>
-          <a:fontRef idx="minor">
-            <a:schemeClr val="tx1"/>
-          </a:fontRef>
-        </p:style>
-      </p:cxnSp>
-      <p:cxnSp>
-        <p:nvCxnSpPr>
-          <p:cNvPr id="16" name="Straight Connector 15">
-            <a:extLst>
-              <a:ext uri="{FF2B5EF4-FFF2-40B4-BE49-F238E27FC236}">
-                <a16:creationId xmlns:a16="http://schemas.microsoft.com/office/drawing/2014/main" id="{18D91C2B-BDB9-49BE-9C44-E0CFE597ABFE}"/>
-              </a:ext>
-              <a:ext uri="{C183D7F6-B498-43B3-948B-1728B52AA6E4}">
-                <adec:decorative xmlns:adec="http://schemas.microsoft.com/office/drawing/2017/decorative" val="1"/>
-              </a:ext>
-            </a:extLst>
-          </p:cNvPr>
-          <p:cNvCxnSpPr>
-            <a:cxnSpLocks noGrp="1" noRot="1" noChangeAspect="1" noMove="1" noResize="1" noEditPoints="1" noAdjustHandles="1" noChangeArrowheads="1" noChangeShapeType="1"/>
-          </p:cNvCxnSpPr>
-          <p:nvPr>
-            <p:extLst>
-              <p:ext uri="{386F3935-93C4-4BCD-93E2-E3B085C9AB24}">
-                <p16:designElem xmlns:p16="http://schemas.microsoft.com/office/powerpoint/2015/main" val="1"/>
-              </p:ext>
-            </p:extLst>
-          </p:nvPr>
-        </p:nvCxnSpPr>
-        <p:spPr>
-          <a:xfrm>
-            <a:off x="800100" y="6134100"/>
-            <a:ext cx="10591800" cy="0"/>
-          </a:xfrm>
-          <a:prstGeom prst="line">
-            <a:avLst/>
-          </a:prstGeom>
-          <a:ln w="12700">
-            <a:solidFill>
-              <a:schemeClr val="tx1"/>
-            </a:solidFill>
-          </a:ln>
-        </p:spPr>
-        <p:style>
-          <a:lnRef idx="1">
-            <a:schemeClr val="accent1"/>
-          </a:lnRef>
-          <a:fillRef idx="0">
-            <a:schemeClr val="accent1"/>
-          </a:fillRef>
-          <a:effectRef idx="0">
-            <a:schemeClr val="accent1"/>
-          </a:effectRef>
-          <a:fontRef idx="minor">
-            <a:schemeClr val="tx1"/>
-          </a:fontRef>
-        </p:style>
-      </p:cxnSp>
-      <p:sp>
-        <p:nvSpPr>
-          <p:cNvPr id="5" name="CasellaDiTesto 4">
-            <a:extLst>
-              <a:ext uri="{FF2B5EF4-FFF2-40B4-BE49-F238E27FC236}">
-                <a16:creationId xmlns:a16="http://schemas.microsoft.com/office/drawing/2014/main" id="{277C55CB-69A4-E1BE-6DA3-FD57E9BB6225}"/>
-              </a:ext>
-            </a:extLst>
-          </p:cNvPr>
-          <p:cNvSpPr txBox="1"/>
-          <p:nvPr/>
-        </p:nvSpPr>
-        <p:spPr>
-          <a:xfrm>
-            <a:off x="800100" y="908501"/>
-            <a:ext cx="10591800" cy="3539430"/>
-          </a:xfrm>
-          <a:prstGeom prst="rect">
-            <a:avLst/>
-          </a:prstGeom>
-          <a:noFill/>
-        </p:spPr>
-        <p:txBody>
-          <a:bodyPr wrap="square" rtlCol="0">
-            <a:spAutoFit/>
-          </a:bodyPr>
-          <a:lstStyle/>
-          <a:p>
-            <a:pPr marL="342900" indent="-342900">
-              <a:buFont typeface="+mj-lt"/>
-              <a:buAutoNum type="arabicPeriod"/>
-            </a:pPr>
-            <a:r>
-              <a:rPr lang="it-IT" sz="2800" dirty="0" err="1">
-                <a:solidFill>
-                  <a:schemeClr val="tx1">
-                    <a:lumMod val="50000"/>
-                  </a:schemeClr>
-                </a:solidFill>
-              </a:rPr>
-              <a:t>Introduction</a:t>
-            </a:r>
-            <a:endParaRPr lang="it-IT" sz="2800" dirty="0">
-              <a:solidFill>
-                <a:schemeClr val="tx1">
-                  <a:lumMod val="50000"/>
-                </a:schemeClr>
-              </a:solidFill>
-            </a:endParaRPr>
-          </a:p>
-          <a:p>
-            <a:pPr marL="342900" indent="-342900">
-              <a:buFont typeface="+mj-lt"/>
-              <a:buAutoNum type="arabicPeriod"/>
-            </a:pPr>
-            <a:r>
-              <a:rPr lang="it-IT" sz="2800" dirty="0" err="1">
-                <a:solidFill>
-                  <a:schemeClr val="tx1">
-                    <a:lumMod val="50000"/>
-                  </a:schemeClr>
-                </a:solidFill>
-              </a:rPr>
-              <a:t>Related</a:t>
-            </a:r>
-            <a:r>
-              <a:rPr lang="it-IT" sz="2800" dirty="0">
-                <a:solidFill>
-                  <a:schemeClr val="tx1">
-                    <a:lumMod val="50000"/>
-                  </a:schemeClr>
-                </a:solidFill>
-              </a:rPr>
-              <a:t> Works</a:t>
-            </a:r>
-          </a:p>
-          <a:p>
-            <a:pPr marL="342900" indent="-342900">
-              <a:buFont typeface="+mj-lt"/>
-              <a:buAutoNum type="arabicPeriod"/>
-            </a:pPr>
-            <a:r>
-              <a:rPr lang="en-US" sz="2800" dirty="0">
-                <a:solidFill>
-                  <a:schemeClr val="tx1">
-                    <a:lumMod val="50000"/>
-                  </a:schemeClr>
-                </a:solidFill>
-              </a:rPr>
-              <a:t>Proposed method</a:t>
-            </a:r>
-          </a:p>
-          <a:p>
-            <a:pPr marL="342900" indent="-342900">
-              <a:buFont typeface="+mj-lt"/>
-              <a:buAutoNum type="arabicPeriod"/>
-            </a:pPr>
-            <a:r>
-              <a:rPr lang="en-US" sz="2800" dirty="0">
-                <a:solidFill>
-                  <a:schemeClr val="tx1">
-                    <a:lumMod val="50000"/>
-                  </a:schemeClr>
-                </a:solidFill>
-              </a:rPr>
-              <a:t>Datasets and Metrics</a:t>
-            </a:r>
-          </a:p>
-          <a:p>
-            <a:pPr marL="342900" indent="-342900">
-              <a:buFont typeface="+mj-lt"/>
-              <a:buAutoNum type="arabicPeriod"/>
-            </a:pPr>
-            <a:r>
-              <a:rPr lang="en-US" sz="2800" dirty="0">
-                <a:solidFill>
-                  <a:schemeClr val="tx1">
-                    <a:lumMod val="50000"/>
-                  </a:schemeClr>
-                </a:solidFill>
-              </a:rPr>
-              <a:t>Experimental results</a:t>
-            </a:r>
-          </a:p>
-          <a:p>
-            <a:pPr marL="342900" indent="-342900">
-              <a:buFont typeface="+mj-lt"/>
-              <a:buAutoNum type="arabicPeriod"/>
-            </a:pPr>
-            <a:r>
-              <a:rPr lang="en-US" sz="2800" dirty="0"/>
-              <a:t>Conclusion and Future Works</a:t>
-            </a:r>
-          </a:p>
-          <a:p>
-            <a:pPr marL="342900" indent="-342900">
-              <a:buFont typeface="+mj-lt"/>
-              <a:buAutoNum type="arabicPeriod"/>
-            </a:pPr>
-            <a:r>
-              <a:rPr lang="en-US" sz="2800" dirty="0">
-                <a:solidFill>
-                  <a:schemeClr val="tx1">
-                    <a:lumMod val="50000"/>
-                  </a:schemeClr>
-                </a:solidFill>
-              </a:rPr>
-              <a:t>References</a:t>
-            </a:r>
-            <a:endParaRPr lang="it-IT" sz="2800" dirty="0">
-              <a:solidFill>
-                <a:schemeClr val="tx1">
-                  <a:lumMod val="50000"/>
-                </a:schemeClr>
-              </a:solidFill>
-            </a:endParaRPr>
-          </a:p>
-          <a:p>
-            <a:pPr marL="342900" indent="-342900">
-              <a:buFont typeface="+mj-lt"/>
-              <a:buAutoNum type="arabicPeriod"/>
-            </a:pPr>
-            <a:endParaRPr lang="it-IT" sz="2800" dirty="0">
-              <a:solidFill>
-                <a:schemeClr val="tx1">
-                  <a:lumMod val="50000"/>
-                </a:schemeClr>
-              </a:solidFill>
-            </a:endParaRPr>
-          </a:p>
-        </p:txBody>
-      </p:sp>
-      <p:sp>
-        <p:nvSpPr>
-          <p:cNvPr id="6" name="Segnaposto data 5">
-            <a:extLst>
-              <a:ext uri="{FF2B5EF4-FFF2-40B4-BE49-F238E27FC236}">
-                <a16:creationId xmlns:a16="http://schemas.microsoft.com/office/drawing/2014/main" id="{E85DBCD9-C2D5-6088-F49E-26290E834943}"/>
-              </a:ext>
-            </a:extLst>
-          </p:cNvPr>
-          <p:cNvSpPr>
-            <a:spLocks noGrp="1"/>
-          </p:cNvSpPr>
-          <p:nvPr>
-            <p:ph type="dt" sz="half" idx="10"/>
-          </p:nvPr>
-        </p:nvSpPr>
-        <p:spPr/>
-        <p:txBody>
-          <a:bodyPr/>
-          <a:lstStyle/>
-          <a:p>
-            <a:fld id="{F0665785-E4AC-49D4-85FE-49B29F04C024}" type="datetime1">
-              <a:rPr lang="en-US" smtClean="0"/>
-              <a:t>6/6/2025</a:t>
-            </a:fld>
-            <a:endParaRPr lang="en-US"/>
-          </a:p>
-        </p:txBody>
-      </p:sp>
-      <p:sp>
-        <p:nvSpPr>
-          <p:cNvPr id="7" name="Segnaposto numero diapositiva 6">
-            <a:extLst>
-              <a:ext uri="{FF2B5EF4-FFF2-40B4-BE49-F238E27FC236}">
-                <a16:creationId xmlns:a16="http://schemas.microsoft.com/office/drawing/2014/main" id="{1E78D750-386A-3E15-0A41-C5363CDD6BED}"/>
-              </a:ext>
-            </a:extLst>
-          </p:cNvPr>
-          <p:cNvSpPr>
-            <a:spLocks noGrp="1"/>
-          </p:cNvSpPr>
-          <p:nvPr>
-            <p:ph type="sldNum" sz="quarter" idx="12"/>
-          </p:nvPr>
-        </p:nvSpPr>
-        <p:spPr>
-          <a:xfrm>
-            <a:off x="10919012" y="6356350"/>
-            <a:ext cx="1080276" cy="365125"/>
-          </a:xfrm>
-        </p:spPr>
-        <p:txBody>
-          <a:bodyPr/>
-          <a:lstStyle/>
-          <a:p>
-            <a:fld id="{87E7843D-FF13-4365-9478-9625B70A2705}" type="slidenum">
-              <a:rPr lang="en-US" smtClean="0"/>
-              <a:t>19</a:t>
-            </a:fld>
-            <a:r>
-              <a:rPr lang="en-US" dirty="0"/>
-              <a:t>/23</a:t>
-            </a:r>
-          </a:p>
-        </p:txBody>
-      </p:sp>
-    </p:spTree>
-    <p:extLst>
-      <p:ext uri="{BB962C8B-B14F-4D97-AF65-F5344CB8AC3E}">
-        <p14:creationId xmlns:p14="http://schemas.microsoft.com/office/powerpoint/2010/main" val="476678252"/>
-      </p:ext>
-    </p:extLst>
-  </p:cSld>
-  <p:clrMapOvr>
-    <a:overrideClrMapping bg1="dk1" tx1="lt1" bg2="dk2" tx2="lt2" accent1="accent1" accent2="accent2" accent3="accent3" accent4="accent4" accent5="accent5" accent6="accent6" hlink="hlink" folHlink="folHlink"/>
   </p:clrMapOvr>
   <mc:AlternateContent xmlns:mc="http://schemas.openxmlformats.org/markup-compatibility/2006">
     <mc:Choice xmlns:p159="http://schemas.microsoft.com/office/powerpoint/2015/09/main" Requires="p159">
@@ -21206,7 +23311,7 @@
           <a:p>
             <a:fld id="{5BCA5869-AE93-4751-B4BA-4F2934821A8D}" type="datetime1">
               <a:rPr lang="en-US" smtClean="0"/>
-              <a:t>6/6/2025</a:t>
+              <a:t>6/15/2025</a:t>
             </a:fld>
             <a:endParaRPr lang="en-US"/>
           </a:p>
@@ -21244,7 +23349,7 @@
             </a:fld>
             <a:r>
               <a:rPr lang="en-US" dirty="0"/>
-              <a:t>/23</a:t>
+              <a:t>/25</a:t>
             </a:r>
           </a:p>
         </p:txBody>
@@ -21259,13 +23364,13 @@
   <p:clrMapOvr>
     <a:overrideClrMapping bg1="dk1" tx1="lt1" bg2="dk2" tx2="lt2" accent1="accent1" accent2="accent2" accent3="accent3" accent4="accent4" accent5="accent5" accent6="accent6" hlink="hlink" folHlink="folHlink"/>
   </p:clrMapOvr>
-  <mc:AlternateContent xmlns:mc="http://schemas.openxmlformats.org/markup-compatibility/2006">
-    <mc:Choice xmlns:p159="http://schemas.microsoft.com/office/powerpoint/2015/09/main" Requires="p159">
+  <mc:AlternateContent xmlns:mc="http://schemas.openxmlformats.org/markup-compatibility/2006" xmlns:p159="http://schemas.microsoft.com/office/powerpoint/2015/09/main">
+    <mc:Choice Requires="p159">
       <p:transition xmlns:p14="http://schemas.microsoft.com/office/powerpoint/2010/main" spd="slow" p14:dur="2000">
         <p159:morph option="byObject"/>
       </p:transition>
     </mc:Choice>
-    <mc:Fallback>
+    <mc:Fallback xmlns="">
       <p:transition spd="slow">
         <p:fade/>
       </p:transition>
@@ -21277,14 +23382,6 @@
 <file path=ppt/slides/slide20.xml><?xml version="1.0" encoding="utf-8"?>
 <p:sld xmlns:a="http://schemas.openxmlformats.org/drawingml/2006/main" xmlns:r="http://schemas.openxmlformats.org/officeDocument/2006/relationships" xmlns:p="http://schemas.openxmlformats.org/presentationml/2006/main">
   <p:cSld>
-    <p:bg>
-      <p:bgPr>
-        <a:solidFill>
-          <a:schemeClr val="bg1"/>
-        </a:solidFill>
-        <a:effectLst/>
-      </p:bgPr>
-    </p:bg>
     <p:spTree>
       <p:nvGrpSpPr>
         <p:cNvPr id="1" name=""/>
@@ -21299,88 +23396,12 @@
           <a:chExt cx="0" cy="0"/>
         </a:xfrm>
       </p:grpSpPr>
-      <p:sp useBgFill="1">
-        <p:nvSpPr>
-          <p:cNvPr id="11" name="Rectangle 10">
-            <a:extLst>
-              <a:ext uri="{FF2B5EF4-FFF2-40B4-BE49-F238E27FC236}">
-                <a16:creationId xmlns:a16="http://schemas.microsoft.com/office/drawing/2014/main" id="{F68B2C62-7648-4430-90D5-AE0F252AF113}"/>
-              </a:ext>
-              <a:ext uri="{C183D7F6-B498-43B3-948B-1728B52AA6E4}">
-                <adec:decorative xmlns:adec="http://schemas.microsoft.com/office/drawing/2017/decorative" val="1"/>
-              </a:ext>
-            </a:extLst>
-          </p:cNvPr>
-          <p:cNvSpPr>
-            <a:spLocks noGrp="1" noRot="1" noChangeAspect="1" noMove="1" noResize="1" noEditPoints="1" noAdjustHandles="1" noChangeArrowheads="1" noChangeShapeType="1" noTextEdit="1"/>
-          </p:cNvSpPr>
-          <p:nvPr>
-            <p:extLst>
-              <p:ext uri="{386F3935-93C4-4BCD-93E2-E3B085C9AB24}">
-                <p16:designElem xmlns:p16="http://schemas.microsoft.com/office/powerpoint/2015/main" val="1"/>
-              </p:ext>
-            </p:extLst>
-          </p:nvPr>
-        </p:nvSpPr>
-        <p:spPr>
-          <a:xfrm>
-            <a:off x="0" y="0"/>
-            <a:ext cx="12192000" cy="6858000"/>
-          </a:xfrm>
-          <a:prstGeom prst="rect">
-            <a:avLst/>
-          </a:prstGeom>
-          <a:ln w="12700" cap="flat" cmpd="sng" algn="ctr">
-            <a:noFill/>
-            <a:prstDash val="solid"/>
-            <a:miter lim="800000"/>
-          </a:ln>
-          <a:effectLst/>
-          <a:extLst>
-            <a:ext uri="{91240B29-F687-4F45-9708-019B960494DF}">
-              <a14:hiddenLine xmlns:a14="http://schemas.microsoft.com/office/drawing/2010/main" w="12700" cap="flat" cmpd="sng" algn="ctr">
-                <a:solidFill>
-                  <a:schemeClr val="accent1">
-                    <a:shade val="50000"/>
-                  </a:schemeClr>
-                </a:solidFill>
-                <a:prstDash val="solid"/>
-                <a:miter lim="800000"/>
-              </a14:hiddenLine>
-            </a:ext>
-          </a:extLst>
-        </p:spPr>
-        <p:style>
-          <a:lnRef idx="2">
-            <a:schemeClr val="accent1">
-              <a:shade val="50000"/>
-            </a:schemeClr>
-          </a:lnRef>
-          <a:fillRef idx="1">
-            <a:schemeClr val="accent1"/>
-          </a:fillRef>
-          <a:effectRef idx="0">
-            <a:schemeClr val="accent1"/>
-          </a:effectRef>
-          <a:fontRef idx="minor">
-            <a:schemeClr val="lt1"/>
-          </a:fontRef>
-        </p:style>
-        <p:txBody>
-          <a:bodyPr rtlCol="0" anchor="ctr"/>
-          <a:lstStyle/>
-          <a:p>
-            <a:pPr algn="ctr"/>
-            <a:endParaRPr lang="en-US"/>
-          </a:p>
-        </p:txBody>
-      </p:sp>
       <p:sp>
         <p:nvSpPr>
           <p:cNvPr id="2" name="Titolo 1">
             <a:extLst>
               <a:ext uri="{FF2B5EF4-FFF2-40B4-BE49-F238E27FC236}">
-                <a16:creationId xmlns:a16="http://schemas.microsoft.com/office/drawing/2014/main" id="{8A0DF8CE-2811-0C50-4F57-C110B74F1766}"/>
+                <a16:creationId xmlns:a16="http://schemas.microsoft.com/office/drawing/2014/main" id="{89BFC695-086C-B4EC-73A7-1C96830A57FC}"/>
               </a:ext>
             </a:extLst>
           </p:cNvPr>
@@ -21393,137 +23414,99 @@
         </p:nvSpPr>
         <p:spPr>
           <a:xfrm>
-            <a:off x="655011" y="123914"/>
-            <a:ext cx="10691813" cy="1155618"/>
+            <a:off x="700635" y="64892"/>
+            <a:ext cx="10691265" cy="731520"/>
           </a:xfrm>
         </p:spPr>
         <p:txBody>
-          <a:bodyPr>
-            <a:normAutofit/>
-          </a:bodyPr>
+          <a:bodyPr/>
           <a:lstStyle/>
           <a:p>
             <a:r>
               <a:rPr lang="it-IT" dirty="0" err="1"/>
-              <a:t>Conclusions</a:t>
+              <a:t>Experimental</a:t>
             </a:r>
             <a:r>
               <a:rPr lang="it-IT" dirty="0"/>
-              <a:t> and future works</a:t>
+              <a:t> </a:t>
+            </a:r>
+            <a:r>
+              <a:rPr lang="it-IT" dirty="0" err="1"/>
+              <a:t>Results</a:t>
+            </a:r>
+            <a:r>
+              <a:rPr lang="it-IT" dirty="0"/>
+              <a:t> – </a:t>
+            </a:r>
+            <a:r>
+              <a:rPr lang="it-IT" dirty="0" err="1"/>
+              <a:t>Ablation</a:t>
+            </a:r>
+            <a:r>
+              <a:rPr lang="it-IT" dirty="0"/>
+              <a:t> Study </a:t>
             </a:r>
           </a:p>
         </p:txBody>
       </p:sp>
-      <p:cxnSp>
-        <p:nvCxnSpPr>
-          <p:cNvPr id="13" name="Straight Connector 12">
+      <p:sp>
+        <p:nvSpPr>
+          <p:cNvPr id="3" name="Segnaposto contenuto 2">
             <a:extLst>
               <a:ext uri="{FF2B5EF4-FFF2-40B4-BE49-F238E27FC236}">
-                <a16:creationId xmlns:a16="http://schemas.microsoft.com/office/drawing/2014/main" id="{AAD0195E-7F27-4D06-9427-0C121D721A14}"/>
-              </a:ext>
-              <a:ext uri="{C183D7F6-B498-43B3-948B-1728B52AA6E4}">
-                <adec:decorative xmlns:adec="http://schemas.microsoft.com/office/drawing/2017/decorative" val="1"/>
+                <a16:creationId xmlns:a16="http://schemas.microsoft.com/office/drawing/2014/main" id="{D0989CEC-4EF2-4C30-65B5-7F2D3D8D99C6}"/>
               </a:ext>
             </a:extLst>
           </p:cNvPr>
-          <p:cNvCxnSpPr>
-            <a:cxnSpLocks noGrp="1" noRot="1" noChangeAspect="1" noMove="1" noResize="1" noEditPoints="1" noAdjustHandles="1" noChangeArrowheads="1" noChangeShapeType="1"/>
-          </p:cNvCxnSpPr>
+          <p:cNvSpPr>
+            <a:spLocks noGrp="1"/>
+          </p:cNvSpPr>
           <p:nvPr>
-            <p:extLst>
-              <p:ext uri="{386F3935-93C4-4BCD-93E2-E3B085C9AB24}">
-                <p16:designElem xmlns:p16="http://schemas.microsoft.com/office/powerpoint/2015/main" val="1"/>
-              </p:ext>
-            </p:extLst>
+            <p:ph idx="1"/>
           </p:nvPr>
-        </p:nvCxnSpPr>
+        </p:nvSpPr>
         <p:spPr>
           <a:xfrm>
-            <a:off x="800100" y="723900"/>
-            <a:ext cx="10591800" cy="0"/>
+            <a:off x="700634" y="967936"/>
+            <a:ext cx="10691265" cy="4922127"/>
           </a:xfrm>
-          <a:prstGeom prst="line">
-            <a:avLst/>
-          </a:prstGeom>
-          <a:ln w="44450">
-            <a:solidFill>
-              <a:schemeClr val="tx1"/>
-            </a:solidFill>
-          </a:ln>
         </p:spPr>
-        <p:style>
-          <a:lnRef idx="1">
-            <a:schemeClr val="accent1"/>
-          </a:lnRef>
-          <a:fillRef idx="0">
-            <a:schemeClr val="accent1"/>
-          </a:fillRef>
-          <a:effectRef idx="0">
-            <a:schemeClr val="accent1"/>
-          </a:effectRef>
-          <a:fontRef idx="minor">
-            <a:schemeClr val="tx1"/>
-          </a:fontRef>
-        </p:style>
-      </p:cxnSp>
-      <p:cxnSp>
-        <p:nvCxnSpPr>
-          <p:cNvPr id="15" name="Straight Connector 14">
-            <a:extLst>
-              <a:ext uri="{FF2B5EF4-FFF2-40B4-BE49-F238E27FC236}">
-                <a16:creationId xmlns:a16="http://schemas.microsoft.com/office/drawing/2014/main" id="{9D74C2FC-3228-4FC1-B97B-87AD35508D91}"/>
-              </a:ext>
-              <a:ext uri="{C183D7F6-B498-43B3-948B-1728B52AA6E4}">
-                <adec:decorative xmlns:adec="http://schemas.microsoft.com/office/drawing/2017/decorative" val="1"/>
-              </a:ext>
-            </a:extLst>
-          </p:cNvPr>
-          <p:cNvCxnSpPr>
-            <a:cxnSpLocks noGrp="1" noRot="1" noChangeAspect="1" noMove="1" noResize="1" noEditPoints="1" noAdjustHandles="1" noChangeArrowheads="1" noChangeShapeType="1"/>
-          </p:cNvCxnSpPr>
-          <p:nvPr>
-            <p:extLst>
-              <p:ext uri="{386F3935-93C4-4BCD-93E2-E3B085C9AB24}">
-                <p16:designElem xmlns:p16="http://schemas.microsoft.com/office/powerpoint/2015/main" val="1"/>
-              </p:ext>
-            </p:extLst>
-          </p:nvPr>
-        </p:nvCxnSpPr>
-        <p:spPr>
-          <a:xfrm>
-            <a:off x="800100" y="6142781"/>
-            <a:ext cx="10591800" cy="0"/>
-          </a:xfrm>
-          <a:prstGeom prst="line">
-            <a:avLst/>
-          </a:prstGeom>
-          <a:ln w="12700">
-            <a:solidFill>
-              <a:schemeClr val="tx1"/>
-            </a:solidFill>
-          </a:ln>
-        </p:spPr>
-        <p:style>
-          <a:lnRef idx="1">
-            <a:schemeClr val="accent1"/>
-          </a:lnRef>
-          <a:fillRef idx="0">
-            <a:schemeClr val="accent1"/>
-          </a:fillRef>
-          <a:effectRef idx="0">
-            <a:schemeClr val="accent1"/>
-          </a:effectRef>
-          <a:fontRef idx="minor">
-            <a:schemeClr val="tx1"/>
-          </a:fontRef>
-        </p:style>
-      </p:cxnSp>
+        <p:txBody>
+          <a:bodyPr/>
+          <a:lstStyle/>
+          <a:p>
+            <a:pPr marL="0" indent="0">
+              <a:buNone/>
+            </a:pPr>
+            <a:r>
+              <a:rPr lang="it-IT" dirty="0"/>
+              <a:t>The </a:t>
+            </a:r>
+            <a:r>
+              <a:rPr lang="it-IT" dirty="0" err="1"/>
+              <a:t>attacks</a:t>
+            </a:r>
+            <a:r>
+              <a:rPr lang="it-IT" dirty="0"/>
+              <a:t> </a:t>
+            </a:r>
+            <a:r>
+              <a:rPr lang="it-IT" dirty="0" err="1"/>
+              <a:t>reported</a:t>
+            </a:r>
+            <a:r>
+              <a:rPr lang="it-IT" dirty="0"/>
+              <a:t> the following scores:</a:t>
+            </a:r>
+          </a:p>
+        </p:txBody>
+      </p:sp>
       <p:sp>
         <p:nvSpPr>
           <p:cNvPr id="4" name="Segnaposto data 3">
             <a:extLst>
               <a:ext uri="{FF2B5EF4-FFF2-40B4-BE49-F238E27FC236}">
-                <a16:creationId xmlns:a16="http://schemas.microsoft.com/office/drawing/2014/main" id="{0A3209E1-6E26-C4A7-23CB-AC6A7BD29C54}"/>
+                <a16:creationId xmlns:a16="http://schemas.microsoft.com/office/drawing/2014/main" id="{986B8BF4-1BE6-8595-729D-749E6A001033}"/>
               </a:ext>
             </a:extLst>
           </p:cNvPr>
@@ -21534,26 +23517,14 @@
             <p:ph type="dt" sz="half" idx="10"/>
           </p:nvPr>
         </p:nvSpPr>
-        <p:spPr>
-          <a:xfrm>
-            <a:off x="8369448" y="6356350"/>
-            <a:ext cx="2549564" cy="365125"/>
-          </a:xfrm>
-        </p:spPr>
+        <p:spPr/>
         <p:txBody>
-          <a:bodyPr>
-            <a:normAutofit/>
-          </a:bodyPr>
+          <a:bodyPr/>
           <a:lstStyle/>
           <a:p>
-            <a:pPr>
-              <a:spcAft>
-                <a:spcPts val="600"/>
-              </a:spcAft>
-            </a:pPr>
-            <a:fld id="{309156DC-8F84-4EB4-BF6C-9DBAC7A68A8D}" type="datetime1">
+            <a:fld id="{5BB1D6AD-68FB-4B69-890D-0762D504BB10}" type="datetime1">
               <a:rPr lang="en-US" smtClean="0"/>
-              <a:t>6/6/2025</a:t>
+              <a:t>6/16/2025</a:t>
             </a:fld>
             <a:endParaRPr lang="en-US"/>
           </a:p>
@@ -21564,7 +23535,7 @@
           <p:cNvPr id="5" name="Segnaposto numero diapositiva 4">
             <a:extLst>
               <a:ext uri="{FF2B5EF4-FFF2-40B4-BE49-F238E27FC236}">
-                <a16:creationId xmlns:a16="http://schemas.microsoft.com/office/drawing/2014/main" id="{173A580D-15DC-1751-0722-AFB2A415BF2E}"/>
+                <a16:creationId xmlns:a16="http://schemas.microsoft.com/office/drawing/2014/main" id="{CE457A08-BD32-07A0-232B-B52E83A53EE8}"/>
               </a:ext>
             </a:extLst>
           </p:cNvPr>
@@ -21578,48 +23549,30 @@
         <p:spPr>
           <a:xfrm>
             <a:off x="10919012" y="6356350"/>
-            <a:ext cx="815788" cy="365125"/>
+            <a:ext cx="784038" cy="365125"/>
           </a:xfrm>
         </p:spPr>
         <p:txBody>
-          <a:bodyPr>
-            <a:normAutofit/>
-          </a:bodyPr>
+          <a:bodyPr/>
           <a:lstStyle/>
           <a:p>
-            <a:pPr>
-              <a:lnSpc>
-                <a:spcPct val="90000"/>
-              </a:lnSpc>
-              <a:spcAft>
-                <a:spcPts val="600"/>
-              </a:spcAft>
-            </a:pPr>
             <a:fld id="{87E7843D-FF13-4365-9478-9625B70A2705}" type="slidenum">
               <a:rPr lang="en-US" smtClean="0"/>
-              <a:pPr>
-                <a:lnSpc>
-                  <a:spcPct val="90000"/>
-                </a:lnSpc>
-                <a:spcAft>
-                  <a:spcPts val="600"/>
-                </a:spcAft>
-              </a:pPr>
               <a:t>20</a:t>
             </a:fld>
             <a:r>
               <a:rPr lang="en-US" dirty="0"/>
-              <a:t>/23</a:t>
+              <a:t>/25</a:t>
             </a:r>
           </a:p>
         </p:txBody>
       </p:sp>
       <p:graphicFrame>
         <p:nvGraphicFramePr>
-          <p:cNvPr id="7" name="Segnaposto contenuto 2">
+          <p:cNvPr id="6" name="Tabella 6">
             <a:extLst>
               <a:ext uri="{FF2B5EF4-FFF2-40B4-BE49-F238E27FC236}">
-                <a16:creationId xmlns:a16="http://schemas.microsoft.com/office/drawing/2014/main" id="{1B090C82-6A90-EAB4-4EFA-14C2430EDF80}"/>
+                <a16:creationId xmlns:a16="http://schemas.microsoft.com/office/drawing/2014/main" id="{C3FCA6AB-8C0E-3CCE-1712-33AC0ED030D3}"/>
               </a:ext>
             </a:extLst>
           </p:cNvPr>
@@ -21627,28 +23580,2033 @@
             <a:graphicFrameLocks noGrp="1"/>
           </p:cNvGraphicFramePr>
           <p:nvPr>
-            <p:ph idx="1"/>
             <p:extLst>
               <p:ext uri="{D42A27DB-BD31-4B8C-83A1-F6EECF244321}">
-                <p14:modId xmlns:p14="http://schemas.microsoft.com/office/powerpoint/2010/main" val="3230359783"/>
+                <p14:modId xmlns:p14="http://schemas.microsoft.com/office/powerpoint/2010/main" val="2015995166"/>
               </p:ext>
             </p:extLst>
           </p:nvPr>
         </p:nvGraphicFramePr>
         <p:xfrm>
-          <a:off x="563377" y="1447801"/>
-          <a:ext cx="10691812" cy="3740150"/>
+          <a:off x="700634" y="1421763"/>
+          <a:ext cx="11002416" cy="4805680"/>
         </p:xfrm>
         <a:graphic>
-          <a:graphicData uri="http://schemas.openxmlformats.org/drawingml/2006/diagram">
-            <dgm:relIds xmlns:dgm="http://schemas.openxmlformats.org/drawingml/2006/diagram" xmlns:r="http://schemas.openxmlformats.org/officeDocument/2006/relationships" r:dm="rId2" r:lo="rId3" r:qs="rId4" r:cs="rId5"/>
+          <a:graphicData uri="http://schemas.openxmlformats.org/drawingml/2006/table">
+            <a:tbl>
+              <a:tblPr firstRow="1" bandRow="1">
+                <a:tableStyleId>{5C22544A-7EE6-4342-B048-85BDC9FD1C3A}</a:tableStyleId>
+              </a:tblPr>
+              <a:tblGrid>
+                <a:gridCol w="1375302">
+                  <a:extLst>
+                    <a:ext uri="{9D8B030D-6E8A-4147-A177-3AD203B41FA5}">
+                      <a16:colId xmlns:a16="http://schemas.microsoft.com/office/drawing/2014/main" val="2766159086"/>
+                    </a:ext>
+                  </a:extLst>
+                </a:gridCol>
+                <a:gridCol w="1375302">
+                  <a:extLst>
+                    <a:ext uri="{9D8B030D-6E8A-4147-A177-3AD203B41FA5}">
+                      <a16:colId xmlns:a16="http://schemas.microsoft.com/office/drawing/2014/main" val="3767278069"/>
+                    </a:ext>
+                  </a:extLst>
+                </a:gridCol>
+                <a:gridCol w="1375302">
+                  <a:extLst>
+                    <a:ext uri="{9D8B030D-6E8A-4147-A177-3AD203B41FA5}">
+                      <a16:colId xmlns:a16="http://schemas.microsoft.com/office/drawing/2014/main" val="161951504"/>
+                    </a:ext>
+                  </a:extLst>
+                </a:gridCol>
+                <a:gridCol w="1375302">
+                  <a:extLst>
+                    <a:ext uri="{9D8B030D-6E8A-4147-A177-3AD203B41FA5}">
+                      <a16:colId xmlns:a16="http://schemas.microsoft.com/office/drawing/2014/main" val="4094475366"/>
+                    </a:ext>
+                  </a:extLst>
+                </a:gridCol>
+                <a:gridCol w="1375302">
+                  <a:extLst>
+                    <a:ext uri="{9D8B030D-6E8A-4147-A177-3AD203B41FA5}">
+                      <a16:colId xmlns:a16="http://schemas.microsoft.com/office/drawing/2014/main" val="1704147285"/>
+                    </a:ext>
+                  </a:extLst>
+                </a:gridCol>
+                <a:gridCol w="1396735">
+                  <a:extLst>
+                    <a:ext uri="{9D8B030D-6E8A-4147-A177-3AD203B41FA5}">
+                      <a16:colId xmlns:a16="http://schemas.microsoft.com/office/drawing/2014/main" val="4275181983"/>
+                    </a:ext>
+                  </a:extLst>
+                </a:gridCol>
+                <a:gridCol w="1353869">
+                  <a:extLst>
+                    <a:ext uri="{9D8B030D-6E8A-4147-A177-3AD203B41FA5}">
+                      <a16:colId xmlns:a16="http://schemas.microsoft.com/office/drawing/2014/main" val="131746807"/>
+                    </a:ext>
+                  </a:extLst>
+                </a:gridCol>
+                <a:gridCol w="1375302">
+                  <a:extLst>
+                    <a:ext uri="{9D8B030D-6E8A-4147-A177-3AD203B41FA5}">
+                      <a16:colId xmlns:a16="http://schemas.microsoft.com/office/drawing/2014/main" val="3223438993"/>
+                    </a:ext>
+                  </a:extLst>
+                </a:gridCol>
+              </a:tblGrid>
+              <a:tr h="0">
+                <a:tc>
+                  <a:txBody>
+                    <a:bodyPr/>
+                    <a:lstStyle/>
+                    <a:p>
+                      <a:r>
+                        <a:rPr lang="it-IT" dirty="0"/>
+                        <a:t>Attack</a:t>
+                      </a:r>
+                    </a:p>
+                  </a:txBody>
+                  <a:tcPr>
+                    <a:solidFill>
+                      <a:schemeClr val="tx1"/>
+                    </a:solidFill>
+                  </a:tcPr>
+                </a:tc>
+                <a:tc>
+                  <a:txBody>
+                    <a:bodyPr/>
+                    <a:lstStyle/>
+                    <a:p>
+                      <a:r>
+                        <a:rPr lang="it-IT" dirty="0"/>
+                        <a:t>Model</a:t>
+                      </a:r>
+                    </a:p>
+                  </a:txBody>
+                  <a:tcPr>
+                    <a:solidFill>
+                      <a:schemeClr val="tx1"/>
+                    </a:solidFill>
+                  </a:tcPr>
+                </a:tc>
+                <a:tc>
+                  <a:txBody>
+                    <a:bodyPr/>
+                    <a:lstStyle/>
+                    <a:p>
+                      <a:r>
+                        <a:rPr lang="it-IT" dirty="0" err="1"/>
+                        <a:t>Accuracy</a:t>
+                      </a:r>
+                      <a:endParaRPr lang="it-IT" dirty="0"/>
+                    </a:p>
+                  </a:txBody>
+                  <a:tcPr>
+                    <a:solidFill>
+                      <a:schemeClr val="tx1"/>
+                    </a:solidFill>
+                  </a:tcPr>
+                </a:tc>
+                <a:tc>
+                  <a:txBody>
+                    <a:bodyPr/>
+                    <a:lstStyle/>
+                    <a:p>
+                      <a:r>
+                        <a:rPr lang="it-IT" dirty="0"/>
+                        <a:t>Precision</a:t>
+                      </a:r>
+                    </a:p>
+                  </a:txBody>
+                  <a:tcPr>
+                    <a:solidFill>
+                      <a:schemeClr val="tx1"/>
+                    </a:solidFill>
+                  </a:tcPr>
+                </a:tc>
+                <a:tc>
+                  <a:txBody>
+                    <a:bodyPr/>
+                    <a:lstStyle/>
+                    <a:p>
+                      <a:r>
+                        <a:rPr lang="it-IT" dirty="0"/>
+                        <a:t>Recall</a:t>
+                      </a:r>
+                    </a:p>
+                  </a:txBody>
+                  <a:tcPr>
+                    <a:solidFill>
+                      <a:schemeClr val="tx1"/>
+                    </a:solidFill>
+                  </a:tcPr>
+                </a:tc>
+                <a:tc>
+                  <a:txBody>
+                    <a:bodyPr/>
+                    <a:lstStyle/>
+                    <a:p>
+                      <a:r>
+                        <a:rPr lang="it-IT" dirty="0"/>
+                        <a:t>F1-Score</a:t>
+                      </a:r>
+                    </a:p>
+                  </a:txBody>
+                  <a:tcPr>
+                    <a:solidFill>
+                      <a:schemeClr val="tx1"/>
+                    </a:solidFill>
+                  </a:tcPr>
+                </a:tc>
+                <a:tc>
+                  <a:txBody>
+                    <a:bodyPr/>
+                    <a:lstStyle/>
+                    <a:p>
+                      <a:r>
+                        <a:rPr lang="it-IT" dirty="0"/>
+                        <a:t>AUC</a:t>
+                      </a:r>
+                    </a:p>
+                  </a:txBody>
+                  <a:tcPr>
+                    <a:solidFill>
+                      <a:schemeClr val="tx1"/>
+                    </a:solidFill>
+                  </a:tcPr>
+                </a:tc>
+                <a:tc>
+                  <a:txBody>
+                    <a:bodyPr/>
+                    <a:lstStyle/>
+                    <a:p>
+                      <a:r>
+                        <a:rPr lang="it-IT" dirty="0" err="1"/>
+                        <a:t>Average</a:t>
+                      </a:r>
+                      <a:endParaRPr lang="it-IT" dirty="0"/>
+                    </a:p>
+                  </a:txBody>
+                  <a:tcPr>
+                    <a:solidFill>
+                      <a:schemeClr val="tx1"/>
+                    </a:solidFill>
+                  </a:tcPr>
+                </a:tc>
+                <a:extLst>
+                  <a:ext uri="{0D108BD9-81ED-4DB2-BD59-A6C34878D82A}">
+                    <a16:rowId xmlns:a16="http://schemas.microsoft.com/office/drawing/2014/main" val="776063492"/>
+                  </a:ext>
+                </a:extLst>
+              </a:tr>
+              <a:tr h="0">
+                <a:tc>
+                  <a:txBody>
+                    <a:bodyPr/>
+                    <a:lstStyle/>
+                    <a:p>
+                      <a:r>
+                        <a:rPr lang="it-IT" dirty="0"/>
+                        <a:t>FGSM</a:t>
+                      </a:r>
+                    </a:p>
+                  </a:txBody>
+                  <a:tcPr/>
+                </a:tc>
+                <a:tc>
+                  <a:txBody>
+                    <a:bodyPr/>
+                    <a:lstStyle/>
+                    <a:p>
+                      <a:r>
+                        <a:rPr lang="it-IT" dirty="0"/>
+                        <a:t>Baseline</a:t>
+                      </a:r>
+                    </a:p>
+                  </a:txBody>
+                  <a:tcPr/>
+                </a:tc>
+                <a:tc>
+                  <a:txBody>
+                    <a:bodyPr/>
+                    <a:lstStyle/>
+                    <a:p>
+                      <a:pPr algn="ctr"/>
+                      <a:r>
+                        <a:rPr lang="it-IT" dirty="0"/>
+                        <a:t>93.33% </a:t>
+                      </a:r>
+                    </a:p>
+                  </a:txBody>
+                  <a:tcPr/>
+                </a:tc>
+                <a:tc>
+                  <a:txBody>
+                    <a:bodyPr/>
+                    <a:lstStyle/>
+                    <a:p>
+                      <a:pPr algn="ctr"/>
+                      <a:r>
+                        <a:rPr lang="it-IT" dirty="0"/>
+                        <a:t>87.57%</a:t>
+                      </a:r>
+                    </a:p>
+                  </a:txBody>
+                  <a:tcPr/>
+                </a:tc>
+                <a:tc>
+                  <a:txBody>
+                    <a:bodyPr/>
+                    <a:lstStyle/>
+                    <a:p>
+                      <a:pPr algn="ctr"/>
+                      <a:r>
+                        <a:rPr lang="it-IT" dirty="0"/>
+                        <a:t>95.81%</a:t>
+                      </a:r>
+                    </a:p>
+                  </a:txBody>
+                  <a:tcPr/>
+                </a:tc>
+                <a:tc>
+                  <a:txBody>
+                    <a:bodyPr/>
+                    <a:lstStyle/>
+                    <a:p>
+                      <a:pPr algn="ctr"/>
+                      <a:r>
+                        <a:rPr lang="it-IT" dirty="0"/>
+                        <a:t>90.74%</a:t>
+                      </a:r>
+                    </a:p>
+                  </a:txBody>
+                  <a:tcPr/>
+                </a:tc>
+                <a:tc>
+                  <a:txBody>
+                    <a:bodyPr/>
+                    <a:lstStyle/>
+                    <a:p>
+                      <a:pPr algn="ctr"/>
+                      <a:r>
+                        <a:rPr lang="it-IT" dirty="0"/>
+                        <a:t>95.81%</a:t>
+                      </a:r>
+                    </a:p>
+                  </a:txBody>
+                  <a:tcPr/>
+                </a:tc>
+                <a:tc>
+                  <a:txBody>
+                    <a:bodyPr/>
+                    <a:lstStyle/>
+                    <a:p>
+                      <a:pPr algn="ctr"/>
+                      <a:r>
+                        <a:rPr lang="it-IT" u="sng" dirty="0">
+                          <a:effectLst>
+                            <a:outerShdw blurRad="38100" dist="38100" dir="2700000" algn="tl">
+                              <a:srgbClr val="000000">
+                                <a:alpha val="43137"/>
+                              </a:srgbClr>
+                            </a:outerShdw>
+                          </a:effectLst>
+                        </a:rPr>
+                        <a:t>92.65%</a:t>
+                      </a:r>
+                    </a:p>
+                  </a:txBody>
+                  <a:tcPr/>
+                </a:tc>
+                <a:extLst>
+                  <a:ext uri="{0D108BD9-81ED-4DB2-BD59-A6C34878D82A}">
+                    <a16:rowId xmlns:a16="http://schemas.microsoft.com/office/drawing/2014/main" val="3235632591"/>
+                  </a:ext>
+                </a:extLst>
+              </a:tr>
+              <a:tr h="0">
+                <a:tc>
+                  <a:txBody>
+                    <a:bodyPr/>
+                    <a:lstStyle/>
+                    <a:p>
+                      <a:pPr algn="ctr"/>
+                      <a:r>
+                        <a:rPr lang="it-IT" dirty="0"/>
+                        <a:t>-</a:t>
+                      </a:r>
+                    </a:p>
+                  </a:txBody>
+                  <a:tcPr/>
+                </a:tc>
+                <a:tc>
+                  <a:txBody>
+                    <a:bodyPr/>
+                    <a:lstStyle/>
+                    <a:p>
+                      <a:pPr algn="ctr"/>
+                      <a:r>
+                        <a:rPr lang="it-IT" dirty="0"/>
+                        <a:t>-</a:t>
+                      </a:r>
+                    </a:p>
+                  </a:txBody>
+                  <a:tcPr/>
+                </a:tc>
+                <a:tc>
+                  <a:txBody>
+                    <a:bodyPr/>
+                    <a:lstStyle/>
+                    <a:p>
+                      <a:pPr algn="ctr"/>
+                      <a:r>
+                        <a:rPr lang="it-IT" dirty="0">
+                          <a:solidFill>
+                            <a:srgbClr val="FF0000"/>
+                          </a:solidFill>
+                        </a:rPr>
+                        <a:t>-6.49%</a:t>
+                      </a:r>
+                    </a:p>
+                  </a:txBody>
+                  <a:tcPr/>
+                </a:tc>
+                <a:tc>
+                  <a:txBody>
+                    <a:bodyPr/>
+                    <a:lstStyle/>
+                    <a:p>
+                      <a:pPr algn="ctr"/>
+                      <a:r>
+                        <a:rPr lang="it-IT" dirty="0">
+                          <a:solidFill>
+                            <a:srgbClr val="FF0000"/>
+                          </a:solidFill>
+                        </a:rPr>
+                        <a:t>-11.98%</a:t>
+                      </a:r>
+                    </a:p>
+                  </a:txBody>
+                  <a:tcPr/>
+                </a:tc>
+                <a:tc>
+                  <a:txBody>
+                    <a:bodyPr/>
+                    <a:lstStyle/>
+                    <a:p>
+                      <a:pPr algn="ctr"/>
+                      <a:r>
+                        <a:rPr lang="it-IT" dirty="0">
+                          <a:solidFill>
+                            <a:srgbClr val="FF0000"/>
+                          </a:solidFill>
+                        </a:rPr>
+                        <a:t>-4.07%</a:t>
+                      </a:r>
+                    </a:p>
+                  </a:txBody>
+                  <a:tcPr/>
+                </a:tc>
+                <a:tc>
+                  <a:txBody>
+                    <a:bodyPr/>
+                    <a:lstStyle/>
+                    <a:p>
+                      <a:pPr algn="ctr"/>
+                      <a:r>
+                        <a:rPr lang="it-IT" dirty="0">
+                          <a:solidFill>
+                            <a:srgbClr val="FF0000"/>
+                          </a:solidFill>
+                        </a:rPr>
+                        <a:t>-8.97%</a:t>
+                      </a:r>
+                    </a:p>
+                  </a:txBody>
+                  <a:tcPr/>
+                </a:tc>
+                <a:tc>
+                  <a:txBody>
+                    <a:bodyPr/>
+                    <a:lstStyle/>
+                    <a:p>
+                      <a:pPr marL="0" marR="0" lvl="0" indent="0" algn="ctr" defTabSz="914400" rtl="0" eaLnBrk="1" fontAlgn="auto" latinLnBrk="0" hangingPunct="1">
+                        <a:lnSpc>
+                          <a:spcPct val="100000"/>
+                        </a:lnSpc>
+                        <a:spcBef>
+                          <a:spcPts val="0"/>
+                        </a:spcBef>
+                        <a:spcAft>
+                          <a:spcPts val="0"/>
+                        </a:spcAft>
+                        <a:buClrTx/>
+                        <a:buSzTx/>
+                        <a:buFontTx/>
+                        <a:buNone/>
+                        <a:tabLst/>
+                        <a:defRPr/>
+                      </a:pPr>
+                      <a:r>
+                        <a:rPr lang="it-IT" dirty="0">
+                          <a:solidFill>
+                            <a:srgbClr val="FF0000"/>
+                          </a:solidFill>
+                        </a:rPr>
+                        <a:t>-4.07%</a:t>
+                      </a:r>
+                    </a:p>
+                  </a:txBody>
+                  <a:tcPr/>
+                </a:tc>
+                <a:tc>
+                  <a:txBody>
+                    <a:bodyPr/>
+                    <a:lstStyle/>
+                    <a:p>
+                      <a:pPr algn="ctr"/>
+                      <a:r>
+                        <a:rPr lang="it-IT" b="1" u="sng" dirty="0">
+                          <a:solidFill>
+                            <a:srgbClr val="FF0000"/>
+                          </a:solidFill>
+                          <a:effectLst>
+                            <a:outerShdw blurRad="38100" dist="38100" dir="2700000" algn="tl">
+                              <a:srgbClr val="000000">
+                                <a:alpha val="43137"/>
+                              </a:srgbClr>
+                            </a:outerShdw>
+                          </a:effectLst>
+                        </a:rPr>
+                        <a:t>-7.11%</a:t>
+                      </a:r>
+                    </a:p>
+                  </a:txBody>
+                  <a:tcPr/>
+                </a:tc>
+                <a:extLst>
+                  <a:ext uri="{0D108BD9-81ED-4DB2-BD59-A6C34878D82A}">
+                    <a16:rowId xmlns:a16="http://schemas.microsoft.com/office/drawing/2014/main" val="1554898322"/>
+                  </a:ext>
+                </a:extLst>
+              </a:tr>
+              <a:tr h="370840">
+                <a:tc>
+                  <a:txBody>
+                    <a:bodyPr/>
+                    <a:lstStyle/>
+                    <a:p>
+                      <a:r>
+                        <a:rPr lang="it-IT" dirty="0"/>
+                        <a:t>FGSM</a:t>
+                      </a:r>
+                    </a:p>
+                  </a:txBody>
+                  <a:tcPr/>
+                </a:tc>
+                <a:tc>
+                  <a:txBody>
+                    <a:bodyPr/>
+                    <a:lstStyle/>
+                    <a:p>
+                      <a:r>
+                        <a:rPr lang="it-IT" dirty="0" err="1"/>
+                        <a:t>Regularized</a:t>
+                      </a:r>
+                      <a:endParaRPr lang="it-IT" dirty="0"/>
+                    </a:p>
+                  </a:txBody>
+                  <a:tcPr/>
+                </a:tc>
+                <a:tc>
+                  <a:txBody>
+                    <a:bodyPr/>
+                    <a:lstStyle/>
+                    <a:p>
+                      <a:pPr algn="ctr"/>
+                      <a:r>
+                        <a:rPr lang="it-IT" dirty="0"/>
+                        <a:t>92.41%</a:t>
+                      </a:r>
+                    </a:p>
+                  </a:txBody>
+                  <a:tcPr/>
+                </a:tc>
+                <a:tc>
+                  <a:txBody>
+                    <a:bodyPr/>
+                    <a:lstStyle/>
+                    <a:p>
+                      <a:pPr algn="ctr"/>
+                      <a:r>
+                        <a:rPr lang="it-IT" dirty="0"/>
+                        <a:t>86.24%</a:t>
+                      </a:r>
+                    </a:p>
+                  </a:txBody>
+                  <a:tcPr/>
+                </a:tc>
+                <a:tc>
+                  <a:txBody>
+                    <a:bodyPr/>
+                    <a:lstStyle/>
+                    <a:p>
+                      <a:pPr algn="ctr"/>
+                      <a:r>
+                        <a:rPr lang="it-IT" dirty="0"/>
+                        <a:t>95.25%</a:t>
+                      </a:r>
+                    </a:p>
+                  </a:txBody>
+                  <a:tcPr/>
+                </a:tc>
+                <a:tc>
+                  <a:txBody>
+                    <a:bodyPr/>
+                    <a:lstStyle/>
+                    <a:p>
+                      <a:pPr algn="ctr"/>
+                      <a:r>
+                        <a:rPr lang="it-IT" dirty="0"/>
+                        <a:t>89.53%</a:t>
+                      </a:r>
+                    </a:p>
+                  </a:txBody>
+                  <a:tcPr/>
+                </a:tc>
+                <a:tc>
+                  <a:txBody>
+                    <a:bodyPr/>
+                    <a:lstStyle/>
+                    <a:p>
+                      <a:pPr algn="ctr"/>
+                      <a:r>
+                        <a:rPr lang="it-IT" dirty="0"/>
+                        <a:t>95.25%</a:t>
+                      </a:r>
+                    </a:p>
+                  </a:txBody>
+                  <a:tcPr/>
+                </a:tc>
+                <a:tc>
+                  <a:txBody>
+                    <a:bodyPr/>
+                    <a:lstStyle/>
+                    <a:p>
+                      <a:pPr algn="ctr"/>
+                      <a:r>
+                        <a:rPr lang="it-IT" u="sng" dirty="0">
+                          <a:effectLst>
+                            <a:outerShdw blurRad="38100" dist="38100" dir="2700000" algn="tl">
+                              <a:srgbClr val="000000">
+                                <a:alpha val="43137"/>
+                              </a:srgbClr>
+                            </a:outerShdw>
+                          </a:effectLst>
+                        </a:rPr>
+                        <a:t>91.73%</a:t>
+                      </a:r>
+                    </a:p>
+                  </a:txBody>
+                  <a:tcPr/>
+                </a:tc>
+                <a:extLst>
+                  <a:ext uri="{0D108BD9-81ED-4DB2-BD59-A6C34878D82A}">
+                    <a16:rowId xmlns:a16="http://schemas.microsoft.com/office/drawing/2014/main" val="749147313"/>
+                  </a:ext>
+                </a:extLst>
+              </a:tr>
+              <a:tr h="370840">
+                <a:tc>
+                  <a:txBody>
+                    <a:bodyPr/>
+                    <a:lstStyle/>
+                    <a:p>
+                      <a:pPr algn="ctr"/>
+                      <a:r>
+                        <a:rPr lang="it-IT" dirty="0"/>
+                        <a:t>-</a:t>
+                      </a:r>
+                    </a:p>
+                  </a:txBody>
+                  <a:tcPr/>
+                </a:tc>
+                <a:tc>
+                  <a:txBody>
+                    <a:bodyPr/>
+                    <a:lstStyle/>
+                    <a:p>
+                      <a:pPr algn="ctr"/>
+                      <a:r>
+                        <a:rPr lang="it-IT" dirty="0"/>
+                        <a:t>-</a:t>
+                      </a:r>
+                    </a:p>
+                  </a:txBody>
+                  <a:tcPr/>
+                </a:tc>
+                <a:tc>
+                  <a:txBody>
+                    <a:bodyPr/>
+                    <a:lstStyle/>
+                    <a:p>
+                      <a:pPr algn="ctr"/>
+                      <a:r>
+                        <a:rPr lang="it-IT" dirty="0">
+                          <a:solidFill>
+                            <a:srgbClr val="FF0000"/>
+                          </a:solidFill>
+                        </a:rPr>
+                        <a:t>-7.38%</a:t>
+                      </a:r>
+                    </a:p>
+                  </a:txBody>
+                  <a:tcPr/>
+                </a:tc>
+                <a:tc>
+                  <a:txBody>
+                    <a:bodyPr/>
+                    <a:lstStyle/>
+                    <a:p>
+                      <a:pPr algn="ctr"/>
+                      <a:r>
+                        <a:rPr lang="it-IT" dirty="0">
+                          <a:solidFill>
+                            <a:srgbClr val="FF0000"/>
+                          </a:solidFill>
+                        </a:rPr>
+                        <a:t>-13,24%</a:t>
+                      </a:r>
+                    </a:p>
+                  </a:txBody>
+                  <a:tcPr/>
+                </a:tc>
+                <a:tc>
+                  <a:txBody>
+                    <a:bodyPr/>
+                    <a:lstStyle/>
+                    <a:p>
+                      <a:pPr algn="ctr"/>
+                      <a:r>
+                        <a:rPr lang="it-IT" dirty="0">
+                          <a:solidFill>
+                            <a:srgbClr val="FF0000"/>
+                          </a:solidFill>
+                        </a:rPr>
+                        <a:t>-4,61%</a:t>
+                      </a:r>
+                    </a:p>
+                  </a:txBody>
+                  <a:tcPr/>
+                </a:tc>
+                <a:tc>
+                  <a:txBody>
+                    <a:bodyPr/>
+                    <a:lstStyle/>
+                    <a:p>
+                      <a:pPr algn="ctr"/>
+                      <a:r>
+                        <a:rPr lang="it-IT" dirty="0">
+                          <a:solidFill>
+                            <a:srgbClr val="FF0000"/>
+                          </a:solidFill>
+                        </a:rPr>
+                        <a:t>-10.14%</a:t>
+                      </a:r>
+                    </a:p>
+                  </a:txBody>
+                  <a:tcPr/>
+                </a:tc>
+                <a:tc>
+                  <a:txBody>
+                    <a:bodyPr/>
+                    <a:lstStyle/>
+                    <a:p>
+                      <a:pPr marL="0" marR="0" lvl="0" indent="0" algn="ctr" defTabSz="914400" rtl="0" eaLnBrk="1" fontAlgn="auto" latinLnBrk="0" hangingPunct="1">
+                        <a:lnSpc>
+                          <a:spcPct val="100000"/>
+                        </a:lnSpc>
+                        <a:spcBef>
+                          <a:spcPts val="0"/>
+                        </a:spcBef>
+                        <a:spcAft>
+                          <a:spcPts val="0"/>
+                        </a:spcAft>
+                        <a:buClrTx/>
+                        <a:buSzTx/>
+                        <a:buFontTx/>
+                        <a:buNone/>
+                        <a:tabLst/>
+                        <a:defRPr/>
+                      </a:pPr>
+                      <a:r>
+                        <a:rPr lang="it-IT" dirty="0">
+                          <a:solidFill>
+                            <a:srgbClr val="FF0000"/>
+                          </a:solidFill>
+                        </a:rPr>
+                        <a:t>-4,61%</a:t>
+                      </a:r>
+                    </a:p>
+                  </a:txBody>
+                  <a:tcPr/>
+                </a:tc>
+                <a:tc>
+                  <a:txBody>
+                    <a:bodyPr/>
+                    <a:lstStyle/>
+                    <a:p>
+                      <a:pPr algn="ctr"/>
+                      <a:r>
+                        <a:rPr lang="it-IT" u="sng" dirty="0">
+                          <a:solidFill>
+                            <a:srgbClr val="FF0000"/>
+                          </a:solidFill>
+                          <a:effectLst>
+                            <a:outerShdw blurRad="38100" dist="38100" dir="2700000" algn="tl">
+                              <a:srgbClr val="000000">
+                                <a:alpha val="43137"/>
+                              </a:srgbClr>
+                            </a:outerShdw>
+                          </a:effectLst>
+                        </a:rPr>
+                        <a:t>-7.96%</a:t>
+                      </a:r>
+                    </a:p>
+                  </a:txBody>
+                  <a:tcPr/>
+                </a:tc>
+                <a:extLst>
+                  <a:ext uri="{0D108BD9-81ED-4DB2-BD59-A6C34878D82A}">
+                    <a16:rowId xmlns:a16="http://schemas.microsoft.com/office/drawing/2014/main" val="1602882114"/>
+                  </a:ext>
+                </a:extLst>
+              </a:tr>
+              <a:tr h="370840">
+                <a:tc>
+                  <a:txBody>
+                    <a:bodyPr/>
+                    <a:lstStyle/>
+                    <a:p>
+                      <a:r>
+                        <a:rPr lang="it-IT" dirty="0"/>
+                        <a:t>PGD</a:t>
+                      </a:r>
+                    </a:p>
+                  </a:txBody>
+                  <a:tcPr/>
+                </a:tc>
+                <a:tc>
+                  <a:txBody>
+                    <a:bodyPr/>
+                    <a:lstStyle/>
+                    <a:p>
+                      <a:r>
+                        <a:rPr lang="it-IT" dirty="0"/>
+                        <a:t>Baseline</a:t>
+                      </a:r>
+                    </a:p>
+                  </a:txBody>
+                  <a:tcPr/>
+                </a:tc>
+                <a:tc>
+                  <a:txBody>
+                    <a:bodyPr/>
+                    <a:lstStyle/>
+                    <a:p>
+                      <a:pPr algn="ctr"/>
+                      <a:r>
+                        <a:rPr lang="it-IT" dirty="0"/>
+                        <a:t>93.02%</a:t>
+                      </a:r>
+                    </a:p>
+                  </a:txBody>
+                  <a:tcPr/>
+                </a:tc>
+                <a:tc>
+                  <a:txBody>
+                    <a:bodyPr/>
+                    <a:lstStyle/>
+                    <a:p>
+                      <a:pPr algn="ctr"/>
+                      <a:r>
+                        <a:rPr lang="it-IT" dirty="0"/>
+                        <a:t>87.07%</a:t>
+                      </a:r>
+                    </a:p>
+                  </a:txBody>
+                  <a:tcPr/>
+                </a:tc>
+                <a:tc>
+                  <a:txBody>
+                    <a:bodyPr/>
+                    <a:lstStyle/>
+                    <a:p>
+                      <a:pPr algn="ctr"/>
+                      <a:r>
+                        <a:rPr lang="it-IT" dirty="0"/>
+                        <a:t>95.62%</a:t>
+                      </a:r>
+                    </a:p>
+                  </a:txBody>
+                  <a:tcPr/>
+                </a:tc>
+                <a:tc>
+                  <a:txBody>
+                    <a:bodyPr/>
+                    <a:lstStyle/>
+                    <a:p>
+                      <a:pPr algn="ctr"/>
+                      <a:r>
+                        <a:rPr lang="it-IT" dirty="0"/>
+                        <a:t>90.29%</a:t>
+                      </a:r>
+                    </a:p>
+                  </a:txBody>
+                  <a:tcPr/>
+                </a:tc>
+                <a:tc>
+                  <a:txBody>
+                    <a:bodyPr/>
+                    <a:lstStyle/>
+                    <a:p>
+                      <a:pPr algn="ctr"/>
+                      <a:r>
+                        <a:rPr lang="it-IT" dirty="0"/>
+                        <a:t>95.62%</a:t>
+                      </a:r>
+                    </a:p>
+                  </a:txBody>
+                  <a:tcPr/>
+                </a:tc>
+                <a:tc>
+                  <a:txBody>
+                    <a:bodyPr/>
+                    <a:lstStyle/>
+                    <a:p>
+                      <a:pPr algn="ctr"/>
+                      <a:r>
+                        <a:rPr lang="it-IT" u="sng" dirty="0">
+                          <a:effectLst>
+                            <a:outerShdw blurRad="38100" dist="38100" dir="2700000" algn="tl">
+                              <a:srgbClr val="000000">
+                                <a:alpha val="43137"/>
+                              </a:srgbClr>
+                            </a:outerShdw>
+                          </a:effectLst>
+                        </a:rPr>
+                        <a:t>92.32%</a:t>
+                      </a:r>
+                    </a:p>
+                  </a:txBody>
+                  <a:tcPr/>
+                </a:tc>
+                <a:extLst>
+                  <a:ext uri="{0D108BD9-81ED-4DB2-BD59-A6C34878D82A}">
+                    <a16:rowId xmlns:a16="http://schemas.microsoft.com/office/drawing/2014/main" val="416260902"/>
+                  </a:ext>
+                </a:extLst>
+              </a:tr>
+              <a:tr h="370840">
+                <a:tc>
+                  <a:txBody>
+                    <a:bodyPr/>
+                    <a:lstStyle/>
+                    <a:p>
+                      <a:pPr algn="ctr"/>
+                      <a:r>
+                        <a:rPr lang="it-IT" dirty="0"/>
+                        <a:t>-</a:t>
+                      </a:r>
+                    </a:p>
+                  </a:txBody>
+                  <a:tcPr/>
+                </a:tc>
+                <a:tc>
+                  <a:txBody>
+                    <a:bodyPr/>
+                    <a:lstStyle/>
+                    <a:p>
+                      <a:pPr algn="ctr"/>
+                      <a:r>
+                        <a:rPr lang="it-IT" dirty="0"/>
+                        <a:t>-</a:t>
+                      </a:r>
+                    </a:p>
+                  </a:txBody>
+                  <a:tcPr/>
+                </a:tc>
+                <a:tc>
+                  <a:txBody>
+                    <a:bodyPr/>
+                    <a:lstStyle/>
+                    <a:p>
+                      <a:pPr algn="ctr"/>
+                      <a:r>
+                        <a:rPr lang="it-IT" dirty="0">
+                          <a:solidFill>
+                            <a:srgbClr val="FF0000"/>
+                          </a:solidFill>
+                        </a:rPr>
+                        <a:t>-6.80%</a:t>
+                      </a:r>
+                    </a:p>
+                  </a:txBody>
+                  <a:tcPr/>
+                </a:tc>
+                <a:tc>
+                  <a:txBody>
+                    <a:bodyPr/>
+                    <a:lstStyle/>
+                    <a:p>
+                      <a:pPr algn="ctr"/>
+                      <a:r>
+                        <a:rPr lang="it-IT" dirty="0">
+                          <a:solidFill>
+                            <a:srgbClr val="FF0000"/>
+                          </a:solidFill>
+                        </a:rPr>
+                        <a:t>-12.48%</a:t>
+                      </a:r>
+                    </a:p>
+                  </a:txBody>
+                  <a:tcPr/>
+                </a:tc>
+                <a:tc>
+                  <a:txBody>
+                    <a:bodyPr/>
+                    <a:lstStyle/>
+                    <a:p>
+                      <a:pPr algn="ctr"/>
+                      <a:r>
+                        <a:rPr lang="it-IT" dirty="0">
+                          <a:solidFill>
+                            <a:srgbClr val="FF0000"/>
+                          </a:solidFill>
+                        </a:rPr>
+                        <a:t>-4.26%</a:t>
+                      </a:r>
+                    </a:p>
+                  </a:txBody>
+                  <a:tcPr/>
+                </a:tc>
+                <a:tc>
+                  <a:txBody>
+                    <a:bodyPr/>
+                    <a:lstStyle/>
+                    <a:p>
+                      <a:pPr algn="ctr"/>
+                      <a:r>
+                        <a:rPr lang="it-IT" dirty="0">
+                          <a:solidFill>
+                            <a:srgbClr val="FF0000"/>
+                          </a:solidFill>
+                        </a:rPr>
+                        <a:t>9.42%</a:t>
+                      </a:r>
+                    </a:p>
+                  </a:txBody>
+                  <a:tcPr/>
+                </a:tc>
+                <a:tc>
+                  <a:txBody>
+                    <a:bodyPr/>
+                    <a:lstStyle/>
+                    <a:p>
+                      <a:pPr marL="0" marR="0" lvl="0" indent="0" algn="ctr" defTabSz="914400" rtl="0" eaLnBrk="1" fontAlgn="auto" latinLnBrk="0" hangingPunct="1">
+                        <a:lnSpc>
+                          <a:spcPct val="100000"/>
+                        </a:lnSpc>
+                        <a:spcBef>
+                          <a:spcPts val="0"/>
+                        </a:spcBef>
+                        <a:spcAft>
+                          <a:spcPts val="0"/>
+                        </a:spcAft>
+                        <a:buClrTx/>
+                        <a:buSzTx/>
+                        <a:buFontTx/>
+                        <a:buNone/>
+                        <a:tabLst/>
+                        <a:defRPr/>
+                      </a:pPr>
+                      <a:r>
+                        <a:rPr lang="it-IT" dirty="0">
+                          <a:solidFill>
+                            <a:srgbClr val="FF0000"/>
+                          </a:solidFill>
+                        </a:rPr>
+                        <a:t>-4.26%</a:t>
+                      </a:r>
+                    </a:p>
+                  </a:txBody>
+                  <a:tcPr/>
+                </a:tc>
+                <a:tc>
+                  <a:txBody>
+                    <a:bodyPr/>
+                    <a:lstStyle/>
+                    <a:p>
+                      <a:pPr algn="ctr"/>
+                      <a:r>
+                        <a:rPr lang="it-IT" b="1" u="sng" dirty="0">
+                          <a:solidFill>
+                            <a:srgbClr val="FF0000"/>
+                          </a:solidFill>
+                          <a:effectLst>
+                            <a:outerShdw blurRad="38100" dist="38100" dir="2700000" algn="tl">
+                              <a:srgbClr val="000000">
+                                <a:alpha val="43137"/>
+                              </a:srgbClr>
+                            </a:outerShdw>
+                          </a:effectLst>
+                        </a:rPr>
+                        <a:t>-7.44%</a:t>
+                      </a:r>
+                    </a:p>
+                  </a:txBody>
+                  <a:tcPr/>
+                </a:tc>
+                <a:extLst>
+                  <a:ext uri="{0D108BD9-81ED-4DB2-BD59-A6C34878D82A}">
+                    <a16:rowId xmlns:a16="http://schemas.microsoft.com/office/drawing/2014/main" val="3566321427"/>
+                  </a:ext>
+                </a:extLst>
+              </a:tr>
+              <a:tr h="370840">
+                <a:tc>
+                  <a:txBody>
+                    <a:bodyPr/>
+                    <a:lstStyle/>
+                    <a:p>
+                      <a:r>
+                        <a:rPr lang="it-IT" dirty="0"/>
+                        <a:t>PGD</a:t>
+                      </a:r>
+                    </a:p>
+                  </a:txBody>
+                  <a:tcPr/>
+                </a:tc>
+                <a:tc>
+                  <a:txBody>
+                    <a:bodyPr/>
+                    <a:lstStyle/>
+                    <a:p>
+                      <a:pPr marL="0" marR="0" lvl="0" indent="0" algn="l" defTabSz="914400" rtl="0" eaLnBrk="1" fontAlgn="auto" latinLnBrk="0" hangingPunct="1">
+                        <a:lnSpc>
+                          <a:spcPct val="100000"/>
+                        </a:lnSpc>
+                        <a:spcBef>
+                          <a:spcPts val="0"/>
+                        </a:spcBef>
+                        <a:spcAft>
+                          <a:spcPts val="0"/>
+                        </a:spcAft>
+                        <a:buClrTx/>
+                        <a:buSzTx/>
+                        <a:buFontTx/>
+                        <a:buNone/>
+                        <a:tabLst/>
+                        <a:defRPr/>
+                      </a:pPr>
+                      <a:r>
+                        <a:rPr lang="it-IT" dirty="0" err="1"/>
+                        <a:t>Regularized</a:t>
+                      </a:r>
+                      <a:endParaRPr lang="it-IT" dirty="0"/>
+                    </a:p>
+                  </a:txBody>
+                  <a:tcPr/>
+                </a:tc>
+                <a:tc>
+                  <a:txBody>
+                    <a:bodyPr/>
+                    <a:lstStyle/>
+                    <a:p>
+                      <a:pPr algn="ctr"/>
+                      <a:r>
+                        <a:rPr lang="it-IT" dirty="0"/>
+                        <a:t>93.12%</a:t>
+                      </a:r>
+                    </a:p>
+                  </a:txBody>
+                  <a:tcPr/>
+                </a:tc>
+                <a:tc>
+                  <a:txBody>
+                    <a:bodyPr/>
+                    <a:lstStyle/>
+                    <a:p>
+                      <a:pPr algn="ctr"/>
+                      <a:r>
+                        <a:rPr lang="it-IT" dirty="0"/>
+                        <a:t>85.87%</a:t>
+                      </a:r>
+                    </a:p>
+                  </a:txBody>
+                  <a:tcPr/>
+                </a:tc>
+                <a:tc>
+                  <a:txBody>
+                    <a:bodyPr/>
+                    <a:lstStyle/>
+                    <a:p>
+                      <a:pPr algn="ctr"/>
+                      <a:r>
+                        <a:rPr lang="it-IT" dirty="0"/>
+                        <a:t>95.05%</a:t>
+                      </a:r>
+                    </a:p>
+                  </a:txBody>
+                  <a:tcPr/>
+                </a:tc>
+                <a:tc>
+                  <a:txBody>
+                    <a:bodyPr/>
+                    <a:lstStyle/>
+                    <a:p>
+                      <a:pPr algn="ctr"/>
+                      <a:r>
+                        <a:rPr lang="it-IT" dirty="0"/>
+                        <a:t>89.18%</a:t>
+                      </a:r>
+                    </a:p>
+                  </a:txBody>
+                  <a:tcPr/>
+                </a:tc>
+                <a:tc>
+                  <a:txBody>
+                    <a:bodyPr/>
+                    <a:lstStyle/>
+                    <a:p>
+                      <a:pPr algn="ctr"/>
+                      <a:r>
+                        <a:rPr lang="it-IT" dirty="0"/>
+                        <a:t>95.05%</a:t>
+                      </a:r>
+                    </a:p>
+                  </a:txBody>
+                  <a:tcPr/>
+                </a:tc>
+                <a:tc>
+                  <a:txBody>
+                    <a:bodyPr/>
+                    <a:lstStyle/>
+                    <a:p>
+                      <a:pPr algn="ctr"/>
+                      <a:r>
+                        <a:rPr lang="it-IT" u="sng" dirty="0">
+                          <a:effectLst>
+                            <a:outerShdw blurRad="38100" dist="38100" dir="2700000" algn="tl">
+                              <a:srgbClr val="000000">
+                                <a:alpha val="43137"/>
+                              </a:srgbClr>
+                            </a:outerShdw>
+                          </a:effectLst>
+                        </a:rPr>
+                        <a:t>91.65%</a:t>
+                      </a:r>
+                    </a:p>
+                  </a:txBody>
+                  <a:tcPr/>
+                </a:tc>
+                <a:extLst>
+                  <a:ext uri="{0D108BD9-81ED-4DB2-BD59-A6C34878D82A}">
+                    <a16:rowId xmlns:a16="http://schemas.microsoft.com/office/drawing/2014/main" val="1723150831"/>
+                  </a:ext>
+                </a:extLst>
+              </a:tr>
+              <a:tr h="370840">
+                <a:tc>
+                  <a:txBody>
+                    <a:bodyPr/>
+                    <a:lstStyle/>
+                    <a:p>
+                      <a:pPr algn="ctr"/>
+                      <a:r>
+                        <a:rPr lang="it-IT" dirty="0"/>
+                        <a:t>-</a:t>
+                      </a:r>
+                    </a:p>
+                  </a:txBody>
+                  <a:tcPr/>
+                </a:tc>
+                <a:tc>
+                  <a:txBody>
+                    <a:bodyPr/>
+                    <a:lstStyle/>
+                    <a:p>
+                      <a:pPr marL="0" marR="0" lvl="0" indent="0" algn="ctr" defTabSz="914400" rtl="0" eaLnBrk="1" fontAlgn="auto" latinLnBrk="0" hangingPunct="1">
+                        <a:lnSpc>
+                          <a:spcPct val="100000"/>
+                        </a:lnSpc>
+                        <a:spcBef>
+                          <a:spcPts val="0"/>
+                        </a:spcBef>
+                        <a:spcAft>
+                          <a:spcPts val="0"/>
+                        </a:spcAft>
+                        <a:buClrTx/>
+                        <a:buSzTx/>
+                        <a:buFontTx/>
+                        <a:buNone/>
+                        <a:tabLst/>
+                        <a:defRPr/>
+                      </a:pPr>
+                      <a:r>
+                        <a:rPr lang="it-IT" dirty="0"/>
+                        <a:t>-</a:t>
+                      </a:r>
+                    </a:p>
+                  </a:txBody>
+                  <a:tcPr/>
+                </a:tc>
+                <a:tc>
+                  <a:txBody>
+                    <a:bodyPr/>
+                    <a:lstStyle/>
+                    <a:p>
+                      <a:pPr algn="ctr"/>
+                      <a:r>
+                        <a:rPr lang="it-IT" dirty="0">
+                          <a:solidFill>
+                            <a:srgbClr val="FF0000"/>
+                          </a:solidFill>
+                        </a:rPr>
+                        <a:t>-6.67%</a:t>
+                      </a:r>
+                    </a:p>
+                  </a:txBody>
+                  <a:tcPr/>
+                </a:tc>
+                <a:tc>
+                  <a:txBody>
+                    <a:bodyPr/>
+                    <a:lstStyle/>
+                    <a:p>
+                      <a:pPr algn="ctr"/>
+                      <a:r>
+                        <a:rPr lang="it-IT" dirty="0">
+                          <a:solidFill>
+                            <a:srgbClr val="FF0000"/>
+                          </a:solidFill>
+                        </a:rPr>
+                        <a:t>-13.61%</a:t>
+                      </a:r>
+                    </a:p>
+                  </a:txBody>
+                  <a:tcPr/>
+                </a:tc>
+                <a:tc>
+                  <a:txBody>
+                    <a:bodyPr/>
+                    <a:lstStyle/>
+                    <a:p>
+                      <a:pPr algn="ctr"/>
+                      <a:r>
+                        <a:rPr lang="it-IT" dirty="0">
+                          <a:solidFill>
+                            <a:srgbClr val="FF0000"/>
+                          </a:solidFill>
+                        </a:rPr>
+                        <a:t>-4.83%</a:t>
+                      </a:r>
+                    </a:p>
+                  </a:txBody>
+                  <a:tcPr/>
+                </a:tc>
+                <a:tc>
+                  <a:txBody>
+                    <a:bodyPr/>
+                    <a:lstStyle/>
+                    <a:p>
+                      <a:pPr algn="ctr"/>
+                      <a:r>
+                        <a:rPr lang="it-IT" dirty="0">
+                          <a:solidFill>
+                            <a:srgbClr val="FF0000"/>
+                          </a:solidFill>
+                        </a:rPr>
+                        <a:t>-10.53%</a:t>
+                      </a:r>
+                    </a:p>
+                  </a:txBody>
+                  <a:tcPr/>
+                </a:tc>
+                <a:tc>
+                  <a:txBody>
+                    <a:bodyPr/>
+                    <a:lstStyle/>
+                    <a:p>
+                      <a:pPr marL="0" marR="0" lvl="0" indent="0" algn="ctr" defTabSz="914400" rtl="0" eaLnBrk="1" fontAlgn="auto" latinLnBrk="0" hangingPunct="1">
+                        <a:lnSpc>
+                          <a:spcPct val="100000"/>
+                        </a:lnSpc>
+                        <a:spcBef>
+                          <a:spcPts val="0"/>
+                        </a:spcBef>
+                        <a:spcAft>
+                          <a:spcPts val="0"/>
+                        </a:spcAft>
+                        <a:buClrTx/>
+                        <a:buSzTx/>
+                        <a:buFontTx/>
+                        <a:buNone/>
+                        <a:tabLst/>
+                        <a:defRPr/>
+                      </a:pPr>
+                      <a:r>
+                        <a:rPr lang="it-IT" dirty="0">
+                          <a:solidFill>
+                            <a:srgbClr val="FF0000"/>
+                          </a:solidFill>
+                        </a:rPr>
+                        <a:t>-4.83%</a:t>
+                      </a:r>
+                    </a:p>
+                  </a:txBody>
+                  <a:tcPr/>
+                </a:tc>
+                <a:tc>
+                  <a:txBody>
+                    <a:bodyPr/>
+                    <a:lstStyle/>
+                    <a:p>
+                      <a:pPr algn="ctr"/>
+                      <a:r>
+                        <a:rPr lang="it-IT" u="sng" dirty="0">
+                          <a:solidFill>
+                            <a:srgbClr val="FF0000"/>
+                          </a:solidFill>
+                          <a:effectLst>
+                            <a:outerShdw blurRad="38100" dist="38100" dir="2700000" algn="tl">
+                              <a:srgbClr val="000000">
+                                <a:alpha val="43137"/>
+                              </a:srgbClr>
+                            </a:outerShdw>
+                          </a:effectLst>
+                        </a:rPr>
+                        <a:t>-8.09%</a:t>
+                      </a:r>
+                    </a:p>
+                  </a:txBody>
+                  <a:tcPr/>
+                </a:tc>
+                <a:extLst>
+                  <a:ext uri="{0D108BD9-81ED-4DB2-BD59-A6C34878D82A}">
+                    <a16:rowId xmlns:a16="http://schemas.microsoft.com/office/drawing/2014/main" val="525480678"/>
+                  </a:ext>
+                </a:extLst>
+              </a:tr>
+              <a:tr h="370840">
+                <a:tc>
+                  <a:txBody>
+                    <a:bodyPr/>
+                    <a:lstStyle/>
+                    <a:p>
+                      <a:r>
+                        <a:rPr lang="it-IT" dirty="0"/>
+                        <a:t>Patch</a:t>
+                      </a:r>
+                    </a:p>
+                  </a:txBody>
+                  <a:tcPr/>
+                </a:tc>
+                <a:tc>
+                  <a:txBody>
+                    <a:bodyPr/>
+                    <a:lstStyle/>
+                    <a:p>
+                      <a:r>
+                        <a:rPr lang="it-IT" dirty="0"/>
+                        <a:t>Baseline</a:t>
+                      </a:r>
+                    </a:p>
+                  </a:txBody>
+                  <a:tcPr/>
+                </a:tc>
+                <a:tc>
+                  <a:txBody>
+                    <a:bodyPr/>
+                    <a:lstStyle/>
+                    <a:p>
+                      <a:pPr algn="ctr"/>
+                      <a:r>
+                        <a:rPr lang="it-IT" dirty="0"/>
+                        <a:t>93.59%</a:t>
+                      </a:r>
+                    </a:p>
+                  </a:txBody>
+                  <a:tcPr/>
+                </a:tc>
+                <a:tc>
+                  <a:txBody>
+                    <a:bodyPr/>
+                    <a:lstStyle/>
+                    <a:p>
+                      <a:pPr algn="ctr"/>
+                      <a:r>
+                        <a:rPr lang="it-IT" dirty="0"/>
+                        <a:t>87.86%</a:t>
+                      </a:r>
+                    </a:p>
+                  </a:txBody>
+                  <a:tcPr/>
+                </a:tc>
+                <a:tc>
+                  <a:txBody>
+                    <a:bodyPr/>
+                    <a:lstStyle/>
+                    <a:p>
+                      <a:pPr algn="ctr"/>
+                      <a:r>
+                        <a:rPr lang="it-IT" dirty="0"/>
+                        <a:t>95.98%</a:t>
+                      </a:r>
+                    </a:p>
+                  </a:txBody>
+                  <a:tcPr/>
+                </a:tc>
+                <a:tc>
+                  <a:txBody>
+                    <a:bodyPr/>
+                    <a:lstStyle/>
+                    <a:p>
+                      <a:pPr algn="ctr"/>
+                      <a:r>
+                        <a:rPr lang="it-IT" dirty="0"/>
+                        <a:t>91.00%</a:t>
+                      </a:r>
+                    </a:p>
+                  </a:txBody>
+                  <a:tcPr/>
+                </a:tc>
+                <a:tc>
+                  <a:txBody>
+                    <a:bodyPr/>
+                    <a:lstStyle/>
+                    <a:p>
+                      <a:pPr algn="ctr"/>
+                      <a:r>
+                        <a:rPr lang="it-IT" dirty="0"/>
+                        <a:t>95.98%</a:t>
+                      </a:r>
+                    </a:p>
+                  </a:txBody>
+                  <a:tcPr/>
+                </a:tc>
+                <a:tc>
+                  <a:txBody>
+                    <a:bodyPr/>
+                    <a:lstStyle/>
+                    <a:p>
+                      <a:pPr algn="ctr"/>
+                      <a:r>
+                        <a:rPr lang="it-IT" u="sng" dirty="0">
+                          <a:effectLst>
+                            <a:outerShdw blurRad="38100" dist="38100" dir="2700000" algn="tl">
+                              <a:srgbClr val="000000">
+                                <a:alpha val="43137"/>
+                              </a:srgbClr>
+                            </a:outerShdw>
+                          </a:effectLst>
+                        </a:rPr>
+                        <a:t>92.88%</a:t>
+                      </a:r>
+                    </a:p>
+                  </a:txBody>
+                  <a:tcPr/>
+                </a:tc>
+                <a:extLst>
+                  <a:ext uri="{0D108BD9-81ED-4DB2-BD59-A6C34878D82A}">
+                    <a16:rowId xmlns:a16="http://schemas.microsoft.com/office/drawing/2014/main" val="2744983496"/>
+                  </a:ext>
+                </a:extLst>
+              </a:tr>
+              <a:tr h="370840">
+                <a:tc>
+                  <a:txBody>
+                    <a:bodyPr/>
+                    <a:lstStyle/>
+                    <a:p>
+                      <a:pPr algn="ctr"/>
+                      <a:r>
+                        <a:rPr lang="it-IT" dirty="0"/>
+                        <a:t>-</a:t>
+                      </a:r>
+                    </a:p>
+                  </a:txBody>
+                  <a:tcPr/>
+                </a:tc>
+                <a:tc>
+                  <a:txBody>
+                    <a:bodyPr/>
+                    <a:lstStyle/>
+                    <a:p>
+                      <a:pPr algn="ctr"/>
+                      <a:r>
+                        <a:rPr lang="it-IT" dirty="0"/>
+                        <a:t>-</a:t>
+                      </a:r>
+                    </a:p>
+                  </a:txBody>
+                  <a:tcPr/>
+                </a:tc>
+                <a:tc>
+                  <a:txBody>
+                    <a:bodyPr/>
+                    <a:lstStyle/>
+                    <a:p>
+                      <a:pPr algn="ctr"/>
+                      <a:r>
+                        <a:rPr lang="it-IT" dirty="0">
+                          <a:solidFill>
+                            <a:srgbClr val="FF0000"/>
+                          </a:solidFill>
+                        </a:rPr>
+                        <a:t>-6.23%</a:t>
+                      </a:r>
+                    </a:p>
+                  </a:txBody>
+                  <a:tcPr/>
+                </a:tc>
+                <a:tc>
+                  <a:txBody>
+                    <a:bodyPr/>
+                    <a:lstStyle/>
+                    <a:p>
+                      <a:pPr algn="ctr"/>
+                      <a:r>
+                        <a:rPr lang="it-IT" dirty="0">
+                          <a:solidFill>
+                            <a:srgbClr val="FF0000"/>
+                          </a:solidFill>
+                        </a:rPr>
+                        <a:t>-11.69%</a:t>
+                      </a:r>
+                    </a:p>
+                  </a:txBody>
+                  <a:tcPr/>
+                </a:tc>
+                <a:tc>
+                  <a:txBody>
+                    <a:bodyPr/>
+                    <a:lstStyle/>
+                    <a:p>
+                      <a:pPr algn="ctr"/>
+                      <a:r>
+                        <a:rPr lang="it-IT" dirty="0">
+                          <a:solidFill>
+                            <a:srgbClr val="FF0000"/>
+                          </a:solidFill>
+                        </a:rPr>
+                        <a:t>-3.90%</a:t>
+                      </a:r>
+                    </a:p>
+                  </a:txBody>
+                  <a:tcPr/>
+                </a:tc>
+                <a:tc>
+                  <a:txBody>
+                    <a:bodyPr/>
+                    <a:lstStyle/>
+                    <a:p>
+                      <a:pPr algn="ctr"/>
+                      <a:r>
+                        <a:rPr lang="it-IT" dirty="0">
+                          <a:solidFill>
+                            <a:srgbClr val="FF0000"/>
+                          </a:solidFill>
+                        </a:rPr>
+                        <a:t>-8.71%</a:t>
+                      </a:r>
+                    </a:p>
+                  </a:txBody>
+                  <a:tcPr/>
+                </a:tc>
+                <a:tc>
+                  <a:txBody>
+                    <a:bodyPr/>
+                    <a:lstStyle/>
+                    <a:p>
+                      <a:pPr algn="ctr"/>
+                      <a:r>
+                        <a:rPr lang="it-IT" dirty="0">
+                          <a:solidFill>
+                            <a:srgbClr val="FF0000"/>
+                          </a:solidFill>
+                        </a:rPr>
+                        <a:t>-3.90%</a:t>
+                      </a:r>
+                    </a:p>
+                  </a:txBody>
+                  <a:tcPr/>
+                </a:tc>
+                <a:tc>
+                  <a:txBody>
+                    <a:bodyPr/>
+                    <a:lstStyle/>
+                    <a:p>
+                      <a:pPr algn="ctr"/>
+                      <a:r>
+                        <a:rPr lang="it-IT" b="1" u="sng" dirty="0">
+                          <a:solidFill>
+                            <a:srgbClr val="FF0000"/>
+                          </a:solidFill>
+                          <a:effectLst>
+                            <a:outerShdw blurRad="38100" dist="38100" dir="2700000" algn="tl">
+                              <a:srgbClr val="000000">
+                                <a:alpha val="43137"/>
+                              </a:srgbClr>
+                            </a:outerShdw>
+                          </a:effectLst>
+                        </a:rPr>
+                        <a:t>-6.88%</a:t>
+                      </a:r>
+                    </a:p>
+                  </a:txBody>
+                  <a:tcPr/>
+                </a:tc>
+                <a:extLst>
+                  <a:ext uri="{0D108BD9-81ED-4DB2-BD59-A6C34878D82A}">
+                    <a16:rowId xmlns:a16="http://schemas.microsoft.com/office/drawing/2014/main" val="411164780"/>
+                  </a:ext>
+                </a:extLst>
+              </a:tr>
+              <a:tr h="370840">
+                <a:tc>
+                  <a:txBody>
+                    <a:bodyPr/>
+                    <a:lstStyle/>
+                    <a:p>
+                      <a:r>
+                        <a:rPr lang="it-IT" dirty="0"/>
+                        <a:t>Patch</a:t>
+                      </a:r>
+                    </a:p>
+                  </a:txBody>
+                  <a:tcPr/>
+                </a:tc>
+                <a:tc>
+                  <a:txBody>
+                    <a:bodyPr/>
+                    <a:lstStyle/>
+                    <a:p>
+                      <a:pPr marL="0" marR="0" lvl="0" indent="0" algn="l" defTabSz="914400" rtl="0" eaLnBrk="1" fontAlgn="auto" latinLnBrk="0" hangingPunct="1">
+                        <a:lnSpc>
+                          <a:spcPct val="100000"/>
+                        </a:lnSpc>
+                        <a:spcBef>
+                          <a:spcPts val="0"/>
+                        </a:spcBef>
+                        <a:spcAft>
+                          <a:spcPts val="0"/>
+                        </a:spcAft>
+                        <a:buClrTx/>
+                        <a:buSzTx/>
+                        <a:buFontTx/>
+                        <a:buNone/>
+                        <a:tabLst/>
+                        <a:defRPr/>
+                      </a:pPr>
+                      <a:r>
+                        <a:rPr lang="it-IT" dirty="0" err="1"/>
+                        <a:t>Regularized</a:t>
+                      </a:r>
+                      <a:endParaRPr lang="it-IT" dirty="0"/>
+                    </a:p>
+                  </a:txBody>
+                  <a:tcPr/>
+                </a:tc>
+                <a:tc>
+                  <a:txBody>
+                    <a:bodyPr/>
+                    <a:lstStyle/>
+                    <a:p>
+                      <a:pPr algn="ctr"/>
+                      <a:r>
+                        <a:rPr lang="it-IT" dirty="0"/>
+                        <a:t>92.86%</a:t>
+                      </a:r>
+                    </a:p>
+                  </a:txBody>
+                  <a:tcPr/>
+                </a:tc>
+                <a:tc>
+                  <a:txBody>
+                    <a:bodyPr/>
+                    <a:lstStyle/>
+                    <a:p>
+                      <a:pPr algn="ctr"/>
+                      <a:r>
+                        <a:rPr lang="it-IT" dirty="0"/>
+                        <a:t>86.85%</a:t>
+                      </a:r>
+                    </a:p>
+                  </a:txBody>
+                  <a:tcPr/>
+                </a:tc>
+                <a:tc>
+                  <a:txBody>
+                    <a:bodyPr/>
+                    <a:lstStyle/>
+                    <a:p>
+                      <a:pPr algn="ctr"/>
+                      <a:r>
+                        <a:rPr lang="it-IT" dirty="0"/>
+                        <a:t>95.54%</a:t>
+                      </a:r>
+                    </a:p>
+                  </a:txBody>
+                  <a:tcPr/>
+                </a:tc>
+                <a:tc>
+                  <a:txBody>
+                    <a:bodyPr/>
+                    <a:lstStyle/>
+                    <a:p>
+                      <a:pPr algn="ctr"/>
+                      <a:r>
+                        <a:rPr lang="it-IT" dirty="0"/>
+                        <a:t>90.09%</a:t>
+                      </a:r>
+                    </a:p>
+                  </a:txBody>
+                  <a:tcPr/>
+                </a:tc>
+                <a:tc>
+                  <a:txBody>
+                    <a:bodyPr/>
+                    <a:lstStyle/>
+                    <a:p>
+                      <a:pPr algn="ctr"/>
+                      <a:r>
+                        <a:rPr lang="it-IT" dirty="0"/>
+                        <a:t>95.54%</a:t>
+                      </a:r>
+                    </a:p>
+                  </a:txBody>
+                  <a:tcPr/>
+                </a:tc>
+                <a:tc>
+                  <a:txBody>
+                    <a:bodyPr/>
+                    <a:lstStyle/>
+                    <a:p>
+                      <a:pPr algn="ctr"/>
+                      <a:r>
+                        <a:rPr lang="it-IT" u="sng" dirty="0">
+                          <a:effectLst>
+                            <a:outerShdw blurRad="38100" dist="38100" dir="2700000" algn="tl">
+                              <a:srgbClr val="000000">
+                                <a:alpha val="43137"/>
+                              </a:srgbClr>
+                            </a:outerShdw>
+                          </a:effectLst>
+                        </a:rPr>
+                        <a:t>92,17%</a:t>
+                      </a:r>
+                    </a:p>
+                  </a:txBody>
+                  <a:tcPr/>
+                </a:tc>
+                <a:extLst>
+                  <a:ext uri="{0D108BD9-81ED-4DB2-BD59-A6C34878D82A}">
+                    <a16:rowId xmlns:a16="http://schemas.microsoft.com/office/drawing/2014/main" val="2898597429"/>
+                  </a:ext>
+                </a:extLst>
+              </a:tr>
+              <a:tr h="370840">
+                <a:tc>
+                  <a:txBody>
+                    <a:bodyPr/>
+                    <a:lstStyle/>
+                    <a:p>
+                      <a:pPr algn="ctr"/>
+                      <a:r>
+                        <a:rPr lang="it-IT" dirty="0"/>
+                        <a:t>-</a:t>
+                      </a:r>
+                    </a:p>
+                  </a:txBody>
+                  <a:tcPr/>
+                </a:tc>
+                <a:tc>
+                  <a:txBody>
+                    <a:bodyPr/>
+                    <a:lstStyle/>
+                    <a:p>
+                      <a:pPr marL="0" marR="0" lvl="0" indent="0" algn="ctr" defTabSz="914400" rtl="0" eaLnBrk="1" fontAlgn="auto" latinLnBrk="0" hangingPunct="1">
+                        <a:lnSpc>
+                          <a:spcPct val="100000"/>
+                        </a:lnSpc>
+                        <a:spcBef>
+                          <a:spcPts val="0"/>
+                        </a:spcBef>
+                        <a:spcAft>
+                          <a:spcPts val="0"/>
+                        </a:spcAft>
+                        <a:buClrTx/>
+                        <a:buSzTx/>
+                        <a:buFontTx/>
+                        <a:buNone/>
+                        <a:tabLst/>
+                        <a:defRPr/>
+                      </a:pPr>
+                      <a:r>
+                        <a:rPr lang="it-IT" dirty="0"/>
+                        <a:t>-</a:t>
+                      </a:r>
+                    </a:p>
+                  </a:txBody>
+                  <a:tcPr/>
+                </a:tc>
+                <a:tc>
+                  <a:txBody>
+                    <a:bodyPr/>
+                    <a:lstStyle/>
+                    <a:p>
+                      <a:pPr algn="ctr"/>
+                      <a:r>
+                        <a:rPr lang="it-IT" dirty="0">
+                          <a:solidFill>
+                            <a:srgbClr val="FF0000"/>
+                          </a:solidFill>
+                        </a:rPr>
+                        <a:t>-6.96%</a:t>
+                      </a:r>
+                    </a:p>
+                  </a:txBody>
+                  <a:tcPr/>
+                </a:tc>
+                <a:tc>
+                  <a:txBody>
+                    <a:bodyPr/>
+                    <a:lstStyle/>
+                    <a:p>
+                      <a:pPr algn="ctr"/>
+                      <a:r>
+                        <a:rPr lang="it-IT" dirty="0">
+                          <a:solidFill>
+                            <a:srgbClr val="FF0000"/>
+                          </a:solidFill>
+                        </a:rPr>
+                        <a:t>-12.70%</a:t>
+                      </a:r>
+                    </a:p>
+                  </a:txBody>
+                  <a:tcPr/>
+                </a:tc>
+                <a:tc>
+                  <a:txBody>
+                    <a:bodyPr/>
+                    <a:lstStyle/>
+                    <a:p>
+                      <a:pPr algn="ctr"/>
+                      <a:r>
+                        <a:rPr lang="it-IT" dirty="0">
+                          <a:solidFill>
+                            <a:srgbClr val="FF0000"/>
+                          </a:solidFill>
+                        </a:rPr>
+                        <a:t>-4.34%</a:t>
+                      </a:r>
+                    </a:p>
+                  </a:txBody>
+                  <a:tcPr/>
+                </a:tc>
+                <a:tc>
+                  <a:txBody>
+                    <a:bodyPr/>
+                    <a:lstStyle/>
+                    <a:p>
+                      <a:pPr algn="ctr"/>
+                      <a:r>
+                        <a:rPr lang="it-IT" dirty="0">
+                          <a:solidFill>
+                            <a:srgbClr val="FF0000"/>
+                          </a:solidFill>
+                        </a:rPr>
+                        <a:t>-9.62%</a:t>
+                      </a:r>
+                    </a:p>
+                  </a:txBody>
+                  <a:tcPr/>
+                </a:tc>
+                <a:tc>
+                  <a:txBody>
+                    <a:bodyPr/>
+                    <a:lstStyle/>
+                    <a:p>
+                      <a:pPr marL="0" marR="0" lvl="0" indent="0" algn="ctr" defTabSz="914400" rtl="0" eaLnBrk="1" fontAlgn="auto" latinLnBrk="0" hangingPunct="1">
+                        <a:lnSpc>
+                          <a:spcPct val="100000"/>
+                        </a:lnSpc>
+                        <a:spcBef>
+                          <a:spcPts val="0"/>
+                        </a:spcBef>
+                        <a:spcAft>
+                          <a:spcPts val="0"/>
+                        </a:spcAft>
+                        <a:buClrTx/>
+                        <a:buSzTx/>
+                        <a:buFontTx/>
+                        <a:buNone/>
+                        <a:tabLst/>
+                        <a:defRPr/>
+                      </a:pPr>
+                      <a:r>
+                        <a:rPr lang="it-IT" dirty="0">
+                          <a:solidFill>
+                            <a:srgbClr val="FF0000"/>
+                          </a:solidFill>
+                        </a:rPr>
+                        <a:t>-4.34%</a:t>
+                      </a:r>
+                    </a:p>
+                  </a:txBody>
+                  <a:tcPr/>
+                </a:tc>
+                <a:tc>
+                  <a:txBody>
+                    <a:bodyPr/>
+                    <a:lstStyle/>
+                    <a:p>
+                      <a:pPr algn="ctr"/>
+                      <a:r>
+                        <a:rPr lang="it-IT" u="sng" dirty="0">
+                          <a:solidFill>
+                            <a:srgbClr val="FF0000"/>
+                          </a:solidFill>
+                          <a:effectLst>
+                            <a:outerShdw blurRad="38100" dist="38100" dir="2700000" algn="tl">
+                              <a:srgbClr val="000000">
+                                <a:alpha val="43137"/>
+                              </a:srgbClr>
+                            </a:outerShdw>
+                          </a:effectLst>
+                        </a:rPr>
+                        <a:t>-7.59%</a:t>
+                      </a:r>
+                    </a:p>
+                  </a:txBody>
+                  <a:tcPr/>
+                </a:tc>
+                <a:extLst>
+                  <a:ext uri="{0D108BD9-81ED-4DB2-BD59-A6C34878D82A}">
+                    <a16:rowId xmlns:a16="http://schemas.microsoft.com/office/drawing/2014/main" val="3996238645"/>
+                  </a:ext>
+                </a:extLst>
+              </a:tr>
+            </a:tbl>
           </a:graphicData>
         </a:graphic>
       </p:graphicFrame>
     </p:spTree>
     <p:extLst>
       <p:ext uri="{BB962C8B-B14F-4D97-AF65-F5344CB8AC3E}">
-        <p14:creationId xmlns:p14="http://schemas.microsoft.com/office/powerpoint/2010/main" val="10052412"/>
+        <p14:creationId xmlns:p14="http://schemas.microsoft.com/office/powerpoint/2010/main" val="3734281923"/>
       </p:ext>
     </p:extLst>
   </p:cSld>
@@ -22131,6 +26089,996 @@
               <a:buAutoNum type="arabicPeriod"/>
             </a:pPr>
             <a:r>
+              <a:rPr lang="en-US" sz="2800" dirty="0"/>
+              <a:t>Conclusion and Future Works</a:t>
+            </a:r>
+          </a:p>
+          <a:p>
+            <a:pPr marL="342900" indent="-342900">
+              <a:buFont typeface="+mj-lt"/>
+              <a:buAutoNum type="arabicPeriod"/>
+            </a:pPr>
+            <a:r>
+              <a:rPr lang="en-US" sz="2800" dirty="0">
+                <a:solidFill>
+                  <a:schemeClr val="tx1">
+                    <a:lumMod val="50000"/>
+                  </a:schemeClr>
+                </a:solidFill>
+              </a:rPr>
+              <a:t>References</a:t>
+            </a:r>
+            <a:endParaRPr lang="it-IT" sz="2800" dirty="0">
+              <a:solidFill>
+                <a:schemeClr val="tx1">
+                  <a:lumMod val="50000"/>
+                </a:schemeClr>
+              </a:solidFill>
+            </a:endParaRPr>
+          </a:p>
+          <a:p>
+            <a:pPr marL="342900" indent="-342900">
+              <a:buFont typeface="+mj-lt"/>
+              <a:buAutoNum type="arabicPeriod"/>
+            </a:pPr>
+            <a:endParaRPr lang="it-IT" sz="2800" dirty="0">
+              <a:solidFill>
+                <a:schemeClr val="tx1">
+                  <a:lumMod val="50000"/>
+                </a:schemeClr>
+              </a:solidFill>
+            </a:endParaRPr>
+          </a:p>
+        </p:txBody>
+      </p:sp>
+      <p:sp>
+        <p:nvSpPr>
+          <p:cNvPr id="6" name="Segnaposto data 5">
+            <a:extLst>
+              <a:ext uri="{FF2B5EF4-FFF2-40B4-BE49-F238E27FC236}">
+                <a16:creationId xmlns:a16="http://schemas.microsoft.com/office/drawing/2014/main" id="{E85DBCD9-C2D5-6088-F49E-26290E834943}"/>
+              </a:ext>
+            </a:extLst>
+          </p:cNvPr>
+          <p:cNvSpPr>
+            <a:spLocks noGrp="1"/>
+          </p:cNvSpPr>
+          <p:nvPr>
+            <p:ph type="dt" sz="half" idx="10"/>
+          </p:nvPr>
+        </p:nvSpPr>
+        <p:spPr/>
+        <p:txBody>
+          <a:bodyPr/>
+          <a:lstStyle/>
+          <a:p>
+            <a:fld id="{F0665785-E4AC-49D4-85FE-49B29F04C024}" type="datetime1">
+              <a:rPr lang="en-US" smtClean="0"/>
+              <a:t>6/15/2025</a:t>
+            </a:fld>
+            <a:endParaRPr lang="en-US"/>
+          </a:p>
+        </p:txBody>
+      </p:sp>
+      <p:sp>
+        <p:nvSpPr>
+          <p:cNvPr id="7" name="Segnaposto numero diapositiva 6">
+            <a:extLst>
+              <a:ext uri="{FF2B5EF4-FFF2-40B4-BE49-F238E27FC236}">
+                <a16:creationId xmlns:a16="http://schemas.microsoft.com/office/drawing/2014/main" id="{1E78D750-386A-3E15-0A41-C5363CDD6BED}"/>
+              </a:ext>
+            </a:extLst>
+          </p:cNvPr>
+          <p:cNvSpPr>
+            <a:spLocks noGrp="1"/>
+          </p:cNvSpPr>
+          <p:nvPr>
+            <p:ph type="sldNum" sz="quarter" idx="12"/>
+          </p:nvPr>
+        </p:nvSpPr>
+        <p:spPr>
+          <a:xfrm>
+            <a:off x="10919012" y="6356350"/>
+            <a:ext cx="1080276" cy="365125"/>
+          </a:xfrm>
+        </p:spPr>
+        <p:txBody>
+          <a:bodyPr/>
+          <a:lstStyle/>
+          <a:p>
+            <a:fld id="{87E7843D-FF13-4365-9478-9625B70A2705}" type="slidenum">
+              <a:rPr lang="en-US" smtClean="0"/>
+              <a:t>21</a:t>
+            </a:fld>
+            <a:r>
+              <a:rPr lang="en-US" dirty="0"/>
+              <a:t>/24</a:t>
+            </a:r>
+          </a:p>
+        </p:txBody>
+      </p:sp>
+    </p:spTree>
+    <p:extLst>
+      <p:ext uri="{BB962C8B-B14F-4D97-AF65-F5344CB8AC3E}">
+        <p14:creationId xmlns:p14="http://schemas.microsoft.com/office/powerpoint/2010/main" val="476678252"/>
+      </p:ext>
+    </p:extLst>
+  </p:cSld>
+  <p:clrMapOvr>
+    <a:overrideClrMapping bg1="dk1" tx1="lt1" bg2="dk2" tx2="lt2" accent1="accent1" accent2="accent2" accent3="accent3" accent4="accent4" accent5="accent5" accent6="accent6" hlink="hlink" folHlink="folHlink"/>
+  </p:clrMapOvr>
+  <mc:AlternateContent xmlns:mc="http://schemas.openxmlformats.org/markup-compatibility/2006" xmlns:p159="http://schemas.microsoft.com/office/powerpoint/2015/09/main">
+    <mc:Choice Requires="p159">
+      <p:transition xmlns:p14="http://schemas.microsoft.com/office/powerpoint/2010/main" spd="slow" p14:dur="2000">
+        <p159:morph option="byObject"/>
+      </p:transition>
+    </mc:Choice>
+    <mc:Fallback xmlns="">
+      <p:transition spd="slow">
+        <p:fade/>
+      </p:transition>
+    </mc:Fallback>
+  </mc:AlternateContent>
+</p:sld>
+</file>
+
+<file path=ppt/slides/slide22.xml><?xml version="1.0" encoding="utf-8"?>
+<p:sld xmlns:a="http://schemas.openxmlformats.org/drawingml/2006/main" xmlns:r="http://schemas.openxmlformats.org/officeDocument/2006/relationships" xmlns:p="http://schemas.openxmlformats.org/presentationml/2006/main">
+  <p:cSld>
+    <p:bg>
+      <p:bgPr>
+        <a:solidFill>
+          <a:schemeClr val="bg1"/>
+        </a:solidFill>
+        <a:effectLst/>
+      </p:bgPr>
+    </p:bg>
+    <p:spTree>
+      <p:nvGrpSpPr>
+        <p:cNvPr id="1" name=""/>
+        <p:cNvGrpSpPr/>
+        <p:nvPr/>
+      </p:nvGrpSpPr>
+      <p:grpSpPr>
+        <a:xfrm>
+          <a:off x="0" y="0"/>
+          <a:ext cx="0" cy="0"/>
+          <a:chOff x="0" y="0"/>
+          <a:chExt cx="0" cy="0"/>
+        </a:xfrm>
+      </p:grpSpPr>
+      <p:sp useBgFill="1">
+        <p:nvSpPr>
+          <p:cNvPr id="11" name="Rectangle 10">
+            <a:extLst>
+              <a:ext uri="{FF2B5EF4-FFF2-40B4-BE49-F238E27FC236}">
+                <a16:creationId xmlns:a16="http://schemas.microsoft.com/office/drawing/2014/main" id="{F68B2C62-7648-4430-90D5-AE0F252AF113}"/>
+              </a:ext>
+              <a:ext uri="{C183D7F6-B498-43B3-948B-1728B52AA6E4}">
+                <adec:decorative xmlns:adec="http://schemas.microsoft.com/office/drawing/2017/decorative" val="1"/>
+              </a:ext>
+            </a:extLst>
+          </p:cNvPr>
+          <p:cNvSpPr>
+            <a:spLocks noGrp="1" noRot="1" noChangeAspect="1" noMove="1" noResize="1" noEditPoints="1" noAdjustHandles="1" noChangeArrowheads="1" noChangeShapeType="1" noTextEdit="1"/>
+          </p:cNvSpPr>
+          <p:nvPr>
+            <p:extLst>
+              <p:ext uri="{386F3935-93C4-4BCD-93E2-E3B085C9AB24}">
+                <p16:designElem xmlns:p16="http://schemas.microsoft.com/office/powerpoint/2015/main" val="1"/>
+              </p:ext>
+            </p:extLst>
+          </p:nvPr>
+        </p:nvSpPr>
+        <p:spPr>
+          <a:xfrm>
+            <a:off x="0" y="0"/>
+            <a:ext cx="12192000" cy="6858000"/>
+          </a:xfrm>
+          <a:prstGeom prst="rect">
+            <a:avLst/>
+          </a:prstGeom>
+          <a:ln w="12700" cap="flat" cmpd="sng" algn="ctr">
+            <a:noFill/>
+            <a:prstDash val="solid"/>
+            <a:miter lim="800000"/>
+          </a:ln>
+          <a:effectLst/>
+          <a:extLst>
+            <a:ext uri="{91240B29-F687-4F45-9708-019B960494DF}">
+              <a14:hiddenLine xmlns:a14="http://schemas.microsoft.com/office/drawing/2010/main" w="12700" cap="flat" cmpd="sng" algn="ctr">
+                <a:solidFill>
+                  <a:schemeClr val="accent1">
+                    <a:shade val="50000"/>
+                  </a:schemeClr>
+                </a:solidFill>
+                <a:prstDash val="solid"/>
+                <a:miter lim="800000"/>
+              </a14:hiddenLine>
+            </a:ext>
+          </a:extLst>
+        </p:spPr>
+        <p:style>
+          <a:lnRef idx="2">
+            <a:schemeClr val="accent1">
+              <a:shade val="50000"/>
+            </a:schemeClr>
+          </a:lnRef>
+          <a:fillRef idx="1">
+            <a:schemeClr val="accent1"/>
+          </a:fillRef>
+          <a:effectRef idx="0">
+            <a:schemeClr val="accent1"/>
+          </a:effectRef>
+          <a:fontRef idx="minor">
+            <a:schemeClr val="lt1"/>
+          </a:fontRef>
+        </p:style>
+        <p:txBody>
+          <a:bodyPr rtlCol="0" anchor="ctr"/>
+          <a:lstStyle/>
+          <a:p>
+            <a:pPr algn="ctr"/>
+            <a:endParaRPr lang="en-US"/>
+          </a:p>
+        </p:txBody>
+      </p:sp>
+      <p:sp>
+        <p:nvSpPr>
+          <p:cNvPr id="2" name="Titolo 1">
+            <a:extLst>
+              <a:ext uri="{FF2B5EF4-FFF2-40B4-BE49-F238E27FC236}">
+                <a16:creationId xmlns:a16="http://schemas.microsoft.com/office/drawing/2014/main" id="{8A0DF8CE-2811-0C50-4F57-C110B74F1766}"/>
+              </a:ext>
+            </a:extLst>
+          </p:cNvPr>
+          <p:cNvSpPr>
+            <a:spLocks noGrp="1"/>
+          </p:cNvSpPr>
+          <p:nvPr>
+            <p:ph type="title"/>
+          </p:nvPr>
+        </p:nvSpPr>
+        <p:spPr>
+          <a:xfrm>
+            <a:off x="655011" y="123914"/>
+            <a:ext cx="10691813" cy="1155618"/>
+          </a:xfrm>
+        </p:spPr>
+        <p:txBody>
+          <a:bodyPr>
+            <a:normAutofit/>
+          </a:bodyPr>
+          <a:lstStyle/>
+          <a:p>
+            <a:r>
+              <a:rPr lang="it-IT" dirty="0" err="1"/>
+              <a:t>Conclusions</a:t>
+            </a:r>
+            <a:r>
+              <a:rPr lang="it-IT" dirty="0"/>
+              <a:t> and future works</a:t>
+            </a:r>
+          </a:p>
+        </p:txBody>
+      </p:sp>
+      <p:cxnSp>
+        <p:nvCxnSpPr>
+          <p:cNvPr id="13" name="Straight Connector 12">
+            <a:extLst>
+              <a:ext uri="{FF2B5EF4-FFF2-40B4-BE49-F238E27FC236}">
+                <a16:creationId xmlns:a16="http://schemas.microsoft.com/office/drawing/2014/main" id="{AAD0195E-7F27-4D06-9427-0C121D721A14}"/>
+              </a:ext>
+              <a:ext uri="{C183D7F6-B498-43B3-948B-1728B52AA6E4}">
+                <adec:decorative xmlns:adec="http://schemas.microsoft.com/office/drawing/2017/decorative" val="1"/>
+              </a:ext>
+            </a:extLst>
+          </p:cNvPr>
+          <p:cNvCxnSpPr>
+            <a:cxnSpLocks noGrp="1" noRot="1" noChangeAspect="1" noMove="1" noResize="1" noEditPoints="1" noAdjustHandles="1" noChangeArrowheads="1" noChangeShapeType="1"/>
+          </p:cNvCxnSpPr>
+          <p:nvPr>
+            <p:extLst>
+              <p:ext uri="{386F3935-93C4-4BCD-93E2-E3B085C9AB24}">
+                <p16:designElem xmlns:p16="http://schemas.microsoft.com/office/powerpoint/2015/main" val="1"/>
+              </p:ext>
+            </p:extLst>
+          </p:nvPr>
+        </p:nvCxnSpPr>
+        <p:spPr>
+          <a:xfrm>
+            <a:off x="800100" y="723900"/>
+            <a:ext cx="10591800" cy="0"/>
+          </a:xfrm>
+          <a:prstGeom prst="line">
+            <a:avLst/>
+          </a:prstGeom>
+          <a:ln w="44450">
+            <a:solidFill>
+              <a:schemeClr val="tx1"/>
+            </a:solidFill>
+          </a:ln>
+        </p:spPr>
+        <p:style>
+          <a:lnRef idx="1">
+            <a:schemeClr val="accent1"/>
+          </a:lnRef>
+          <a:fillRef idx="0">
+            <a:schemeClr val="accent1"/>
+          </a:fillRef>
+          <a:effectRef idx="0">
+            <a:schemeClr val="accent1"/>
+          </a:effectRef>
+          <a:fontRef idx="minor">
+            <a:schemeClr val="tx1"/>
+          </a:fontRef>
+        </p:style>
+      </p:cxnSp>
+      <p:cxnSp>
+        <p:nvCxnSpPr>
+          <p:cNvPr id="15" name="Straight Connector 14">
+            <a:extLst>
+              <a:ext uri="{FF2B5EF4-FFF2-40B4-BE49-F238E27FC236}">
+                <a16:creationId xmlns:a16="http://schemas.microsoft.com/office/drawing/2014/main" id="{9D74C2FC-3228-4FC1-B97B-87AD35508D91}"/>
+              </a:ext>
+              <a:ext uri="{C183D7F6-B498-43B3-948B-1728B52AA6E4}">
+                <adec:decorative xmlns:adec="http://schemas.microsoft.com/office/drawing/2017/decorative" val="1"/>
+              </a:ext>
+            </a:extLst>
+          </p:cNvPr>
+          <p:cNvCxnSpPr>
+            <a:cxnSpLocks noGrp="1" noRot="1" noChangeAspect="1" noMove="1" noResize="1" noEditPoints="1" noAdjustHandles="1" noChangeArrowheads="1" noChangeShapeType="1"/>
+          </p:cNvCxnSpPr>
+          <p:nvPr>
+            <p:extLst>
+              <p:ext uri="{386F3935-93C4-4BCD-93E2-E3B085C9AB24}">
+                <p16:designElem xmlns:p16="http://schemas.microsoft.com/office/powerpoint/2015/main" val="1"/>
+              </p:ext>
+            </p:extLst>
+          </p:nvPr>
+        </p:nvCxnSpPr>
+        <p:spPr>
+          <a:xfrm>
+            <a:off x="800100" y="6142781"/>
+            <a:ext cx="10591800" cy="0"/>
+          </a:xfrm>
+          <a:prstGeom prst="line">
+            <a:avLst/>
+          </a:prstGeom>
+          <a:ln w="12700">
+            <a:solidFill>
+              <a:schemeClr val="tx1"/>
+            </a:solidFill>
+          </a:ln>
+        </p:spPr>
+        <p:style>
+          <a:lnRef idx="1">
+            <a:schemeClr val="accent1"/>
+          </a:lnRef>
+          <a:fillRef idx="0">
+            <a:schemeClr val="accent1"/>
+          </a:fillRef>
+          <a:effectRef idx="0">
+            <a:schemeClr val="accent1"/>
+          </a:effectRef>
+          <a:fontRef idx="minor">
+            <a:schemeClr val="tx1"/>
+          </a:fontRef>
+        </p:style>
+      </p:cxnSp>
+      <p:sp>
+        <p:nvSpPr>
+          <p:cNvPr id="4" name="Segnaposto data 3">
+            <a:extLst>
+              <a:ext uri="{FF2B5EF4-FFF2-40B4-BE49-F238E27FC236}">
+                <a16:creationId xmlns:a16="http://schemas.microsoft.com/office/drawing/2014/main" id="{0A3209E1-6E26-C4A7-23CB-AC6A7BD29C54}"/>
+              </a:ext>
+            </a:extLst>
+          </p:cNvPr>
+          <p:cNvSpPr>
+            <a:spLocks noGrp="1"/>
+          </p:cNvSpPr>
+          <p:nvPr>
+            <p:ph type="dt" sz="half" idx="10"/>
+          </p:nvPr>
+        </p:nvSpPr>
+        <p:spPr>
+          <a:xfrm>
+            <a:off x="8369448" y="6356350"/>
+            <a:ext cx="2549564" cy="365125"/>
+          </a:xfrm>
+        </p:spPr>
+        <p:txBody>
+          <a:bodyPr>
+            <a:normAutofit/>
+          </a:bodyPr>
+          <a:lstStyle/>
+          <a:p>
+            <a:pPr>
+              <a:spcAft>
+                <a:spcPts val="600"/>
+              </a:spcAft>
+            </a:pPr>
+            <a:fld id="{309156DC-8F84-4EB4-BF6C-9DBAC7A68A8D}" type="datetime1">
+              <a:rPr lang="en-US" smtClean="0"/>
+              <a:t>6/15/2025</a:t>
+            </a:fld>
+            <a:endParaRPr lang="en-US"/>
+          </a:p>
+        </p:txBody>
+      </p:sp>
+      <p:sp>
+        <p:nvSpPr>
+          <p:cNvPr id="5" name="Segnaposto numero diapositiva 4">
+            <a:extLst>
+              <a:ext uri="{FF2B5EF4-FFF2-40B4-BE49-F238E27FC236}">
+                <a16:creationId xmlns:a16="http://schemas.microsoft.com/office/drawing/2014/main" id="{173A580D-15DC-1751-0722-AFB2A415BF2E}"/>
+              </a:ext>
+            </a:extLst>
+          </p:cNvPr>
+          <p:cNvSpPr>
+            <a:spLocks noGrp="1"/>
+          </p:cNvSpPr>
+          <p:nvPr>
+            <p:ph type="sldNum" sz="quarter" idx="12"/>
+          </p:nvPr>
+        </p:nvSpPr>
+        <p:spPr>
+          <a:xfrm>
+            <a:off x="10919012" y="6356350"/>
+            <a:ext cx="815788" cy="365125"/>
+          </a:xfrm>
+        </p:spPr>
+        <p:txBody>
+          <a:bodyPr>
+            <a:normAutofit/>
+          </a:bodyPr>
+          <a:lstStyle/>
+          <a:p>
+            <a:pPr>
+              <a:lnSpc>
+                <a:spcPct val="90000"/>
+              </a:lnSpc>
+              <a:spcAft>
+                <a:spcPts val="600"/>
+              </a:spcAft>
+            </a:pPr>
+            <a:fld id="{87E7843D-FF13-4365-9478-9625B70A2705}" type="slidenum">
+              <a:rPr lang="en-US" smtClean="0"/>
+              <a:pPr>
+                <a:lnSpc>
+                  <a:spcPct val="90000"/>
+                </a:lnSpc>
+                <a:spcAft>
+                  <a:spcPts val="600"/>
+                </a:spcAft>
+              </a:pPr>
+              <a:t>22</a:t>
+            </a:fld>
+            <a:r>
+              <a:rPr lang="en-US" dirty="0"/>
+              <a:t>/24</a:t>
+            </a:r>
+          </a:p>
+        </p:txBody>
+      </p:sp>
+      <p:graphicFrame>
+        <p:nvGraphicFramePr>
+          <p:cNvPr id="7" name="Segnaposto contenuto 2">
+            <a:extLst>
+              <a:ext uri="{FF2B5EF4-FFF2-40B4-BE49-F238E27FC236}">
+                <a16:creationId xmlns:a16="http://schemas.microsoft.com/office/drawing/2014/main" id="{1B090C82-6A90-EAB4-4EFA-14C2430EDF80}"/>
+              </a:ext>
+            </a:extLst>
+          </p:cNvPr>
+          <p:cNvGraphicFramePr>
+            <a:graphicFrameLocks noGrp="1"/>
+          </p:cNvGraphicFramePr>
+          <p:nvPr>
+            <p:ph idx="1"/>
+            <p:extLst>
+              <p:ext uri="{D42A27DB-BD31-4B8C-83A1-F6EECF244321}">
+                <p14:modId xmlns:p14="http://schemas.microsoft.com/office/powerpoint/2010/main" val="3230359783"/>
+              </p:ext>
+            </p:extLst>
+          </p:nvPr>
+        </p:nvGraphicFramePr>
+        <p:xfrm>
+          <a:off x="563377" y="1447801"/>
+          <a:ext cx="10691812" cy="3740150"/>
+        </p:xfrm>
+        <a:graphic>
+          <a:graphicData uri="http://schemas.openxmlformats.org/drawingml/2006/diagram">
+            <dgm:relIds xmlns:dgm="http://schemas.openxmlformats.org/drawingml/2006/diagram" xmlns:r="http://schemas.openxmlformats.org/officeDocument/2006/relationships" r:dm="rId2" r:lo="rId3" r:qs="rId4" r:cs="rId5"/>
+          </a:graphicData>
+        </a:graphic>
+      </p:graphicFrame>
+    </p:spTree>
+    <p:extLst>
+      <p:ext uri="{BB962C8B-B14F-4D97-AF65-F5344CB8AC3E}">
+        <p14:creationId xmlns:p14="http://schemas.microsoft.com/office/powerpoint/2010/main" val="10052412"/>
+      </p:ext>
+    </p:extLst>
+  </p:cSld>
+  <p:clrMapOvr>
+    <a:masterClrMapping/>
+  </p:clrMapOvr>
+  <mc:AlternateContent xmlns:mc="http://schemas.openxmlformats.org/markup-compatibility/2006" xmlns:p159="http://schemas.microsoft.com/office/powerpoint/2015/09/main">
+    <mc:Choice Requires="p159">
+      <p:transition xmlns:p14="http://schemas.microsoft.com/office/powerpoint/2010/main" spd="slow" p14:dur="2000">
+        <p159:morph option="byObject"/>
+      </p:transition>
+    </mc:Choice>
+    <mc:Fallback xmlns="">
+      <p:transition spd="slow">
+        <p:fade/>
+      </p:transition>
+    </mc:Fallback>
+  </mc:AlternateContent>
+</p:sld>
+</file>
+
+<file path=ppt/slides/slide23.xml><?xml version="1.0" encoding="utf-8"?>
+<p:sld xmlns:a="http://schemas.openxmlformats.org/drawingml/2006/main" xmlns:r="http://schemas.openxmlformats.org/officeDocument/2006/relationships" xmlns:p="http://schemas.openxmlformats.org/presentationml/2006/main">
+  <p:cSld>
+    <p:bg>
+      <p:bgPr>
+        <a:solidFill>
+          <a:schemeClr val="bg1"/>
+        </a:solidFill>
+        <a:effectLst/>
+      </p:bgPr>
+    </p:bg>
+    <p:spTree>
+      <p:nvGrpSpPr>
+        <p:cNvPr id="1" name=""/>
+        <p:cNvGrpSpPr/>
+        <p:nvPr/>
+      </p:nvGrpSpPr>
+      <p:grpSpPr>
+        <a:xfrm>
+          <a:off x="0" y="0"/>
+          <a:ext cx="0" cy="0"/>
+          <a:chOff x="0" y="0"/>
+          <a:chExt cx="0" cy="0"/>
+        </a:xfrm>
+      </p:grpSpPr>
+      <p:cxnSp>
+        <p:nvCxnSpPr>
+          <p:cNvPr id="8" name="Straight Connector 7">
+            <a:extLst>
+              <a:ext uri="{FF2B5EF4-FFF2-40B4-BE49-F238E27FC236}">
+                <a16:creationId xmlns:a16="http://schemas.microsoft.com/office/drawing/2014/main" id="{F64F9B95-9045-48D2-B9F3-2927E98F54AA}"/>
+              </a:ext>
+              <a:ext uri="{C183D7F6-B498-43B3-948B-1728B52AA6E4}">
+                <adec:decorative xmlns:adec="http://schemas.microsoft.com/office/drawing/2017/decorative" val="1"/>
+              </a:ext>
+            </a:extLst>
+          </p:cNvPr>
+          <p:cNvCxnSpPr>
+            <a:cxnSpLocks noGrp="1" noRot="1" noChangeAspect="1" noMove="1" noResize="1" noEditPoints="1" noAdjustHandles="1" noChangeArrowheads="1" noChangeShapeType="1"/>
+          </p:cNvCxnSpPr>
+          <p:nvPr>
+            <p:extLst>
+              <p:ext uri="{386F3935-93C4-4BCD-93E2-E3B085C9AB24}">
+                <p16:designElem xmlns:p16="http://schemas.microsoft.com/office/powerpoint/2015/main" val="1"/>
+              </p:ext>
+            </p:extLst>
+          </p:nvPr>
+        </p:nvCxnSpPr>
+        <p:spPr>
+          <a:xfrm>
+            <a:off x="800100" y="723900"/>
+            <a:ext cx="10591800" cy="0"/>
+          </a:xfrm>
+          <a:prstGeom prst="line">
+            <a:avLst/>
+          </a:prstGeom>
+          <a:ln w="44450">
+            <a:solidFill>
+              <a:schemeClr val="tx1"/>
+            </a:solidFill>
+          </a:ln>
+        </p:spPr>
+        <p:style>
+          <a:lnRef idx="1">
+            <a:schemeClr val="accent1"/>
+          </a:lnRef>
+          <a:fillRef idx="0">
+            <a:schemeClr val="accent1"/>
+          </a:fillRef>
+          <a:effectRef idx="0">
+            <a:schemeClr val="accent1"/>
+          </a:effectRef>
+          <a:fontRef idx="minor">
+            <a:schemeClr val="tx1"/>
+          </a:fontRef>
+        </p:style>
+      </p:cxnSp>
+      <p:cxnSp>
+        <p:nvCxnSpPr>
+          <p:cNvPr id="10" name="Straight Connector 9">
+            <a:extLst>
+              <a:ext uri="{FF2B5EF4-FFF2-40B4-BE49-F238E27FC236}">
+                <a16:creationId xmlns:a16="http://schemas.microsoft.com/office/drawing/2014/main" id="{085AA86F-6A4D-4BCB-A045-D992CDC2959B}"/>
+              </a:ext>
+              <a:ext uri="{C183D7F6-B498-43B3-948B-1728B52AA6E4}">
+                <adec:decorative xmlns:adec="http://schemas.microsoft.com/office/drawing/2017/decorative" val="1"/>
+              </a:ext>
+            </a:extLst>
+          </p:cNvPr>
+          <p:cNvCxnSpPr>
+            <a:cxnSpLocks noGrp="1" noRot="1" noChangeAspect="1" noMove="1" noResize="1" noEditPoints="1" noAdjustHandles="1" noChangeArrowheads="1" noChangeShapeType="1"/>
+          </p:cNvCxnSpPr>
+          <p:nvPr>
+            <p:extLst>
+              <p:ext uri="{386F3935-93C4-4BCD-93E2-E3B085C9AB24}">
+                <p16:designElem xmlns:p16="http://schemas.microsoft.com/office/powerpoint/2015/main" val="1"/>
+              </p:ext>
+            </p:extLst>
+          </p:nvPr>
+        </p:nvCxnSpPr>
+        <p:spPr>
+          <a:xfrm>
+            <a:off x="800100" y="6142781"/>
+            <a:ext cx="10591800" cy="0"/>
+          </a:xfrm>
+          <a:prstGeom prst="line">
+            <a:avLst/>
+          </a:prstGeom>
+          <a:ln w="12700">
+            <a:solidFill>
+              <a:schemeClr val="tx1"/>
+            </a:solidFill>
+          </a:ln>
+        </p:spPr>
+        <p:style>
+          <a:lnRef idx="1">
+            <a:schemeClr val="accent1"/>
+          </a:lnRef>
+          <a:fillRef idx="0">
+            <a:schemeClr val="accent1"/>
+          </a:fillRef>
+          <a:effectRef idx="0">
+            <a:schemeClr val="accent1"/>
+          </a:effectRef>
+          <a:fontRef idx="minor">
+            <a:schemeClr val="tx1"/>
+          </a:fontRef>
+        </p:style>
+      </p:cxnSp>
+      <p:sp useBgFill="1">
+        <p:nvSpPr>
+          <p:cNvPr id="12" name="Rectangle 11">
+            <a:extLst>
+              <a:ext uri="{FF2B5EF4-FFF2-40B4-BE49-F238E27FC236}">
+                <a16:creationId xmlns:a16="http://schemas.microsoft.com/office/drawing/2014/main" id="{DEF92653-5D6D-47E6-8744-0DAF76E049C4}"/>
+              </a:ext>
+              <a:ext uri="{C183D7F6-B498-43B3-948B-1728B52AA6E4}">
+                <adec:decorative xmlns:adec="http://schemas.microsoft.com/office/drawing/2017/decorative" val="1"/>
+              </a:ext>
+            </a:extLst>
+          </p:cNvPr>
+          <p:cNvSpPr>
+            <a:spLocks noGrp="1" noRot="1" noChangeAspect="1" noMove="1" noResize="1" noEditPoints="1" noAdjustHandles="1" noChangeArrowheads="1" noChangeShapeType="1" noTextEdit="1"/>
+          </p:cNvSpPr>
+          <p:nvPr>
+            <p:extLst>
+              <p:ext uri="{386F3935-93C4-4BCD-93E2-E3B085C9AB24}">
+                <p16:designElem xmlns:p16="http://schemas.microsoft.com/office/powerpoint/2015/main" val="1"/>
+              </p:ext>
+            </p:extLst>
+          </p:nvPr>
+        </p:nvSpPr>
+        <p:spPr>
+          <a:xfrm>
+            <a:off x="0" y="0"/>
+            <a:ext cx="12192000" cy="6858000"/>
+          </a:xfrm>
+          <a:prstGeom prst="rect">
+            <a:avLst/>
+          </a:prstGeom>
+          <a:ln w="12700" cap="flat" cmpd="sng" algn="ctr">
+            <a:noFill/>
+            <a:prstDash val="solid"/>
+            <a:miter lim="800000"/>
+          </a:ln>
+          <a:effectLst/>
+        </p:spPr>
+        <p:style>
+          <a:lnRef idx="2">
+            <a:schemeClr val="accent1">
+              <a:shade val="50000"/>
+            </a:schemeClr>
+          </a:lnRef>
+          <a:fillRef idx="1">
+            <a:schemeClr val="accent1"/>
+          </a:fillRef>
+          <a:effectRef idx="0">
+            <a:schemeClr val="accent1"/>
+          </a:effectRef>
+          <a:fontRef idx="minor">
+            <a:schemeClr val="lt1"/>
+          </a:fontRef>
+        </p:style>
+        <p:txBody>
+          <a:bodyPr rtlCol="0" anchor="ctr"/>
+          <a:lstStyle/>
+          <a:p>
+            <a:pPr algn="ctr"/>
+            <a:endParaRPr lang="en-US"/>
+          </a:p>
+        </p:txBody>
+      </p:sp>
+      <p:sp>
+        <p:nvSpPr>
+          <p:cNvPr id="2" name="Titolo 1">
+            <a:extLst>
+              <a:ext uri="{FF2B5EF4-FFF2-40B4-BE49-F238E27FC236}">
+                <a16:creationId xmlns:a16="http://schemas.microsoft.com/office/drawing/2014/main" id="{4065EE87-6213-BC48-8C72-DF1AB3B5C4FF}"/>
+              </a:ext>
+            </a:extLst>
+          </p:cNvPr>
+          <p:cNvSpPr>
+            <a:spLocks noGrp="1"/>
+          </p:cNvSpPr>
+          <p:nvPr>
+            <p:ph type="title"/>
+          </p:nvPr>
+        </p:nvSpPr>
+        <p:spPr>
+          <a:xfrm>
+            <a:off x="754107" y="140239"/>
+            <a:ext cx="2060939" cy="640284"/>
+          </a:xfrm>
+        </p:spPr>
+        <p:txBody>
+          <a:bodyPr vert="horz" lIns="91440" tIns="45720" rIns="91440" bIns="45720" rtlCol="0" anchor="t">
+            <a:normAutofit fontScale="90000"/>
+          </a:bodyPr>
+          <a:lstStyle/>
+          <a:p>
+            <a:r>
+              <a:rPr lang="en-US" dirty="0"/>
+              <a:t>Outline</a:t>
+            </a:r>
+          </a:p>
+        </p:txBody>
+      </p:sp>
+      <p:cxnSp>
+        <p:nvCxnSpPr>
+          <p:cNvPr id="14" name="Straight Connector 13">
+            <a:extLst>
+              <a:ext uri="{FF2B5EF4-FFF2-40B4-BE49-F238E27FC236}">
+                <a16:creationId xmlns:a16="http://schemas.microsoft.com/office/drawing/2014/main" id="{9CA98CE3-81A7-4FFE-A047-9AA65998D877}"/>
+              </a:ext>
+              <a:ext uri="{C183D7F6-B498-43B3-948B-1728B52AA6E4}">
+                <adec:decorative xmlns:adec="http://schemas.microsoft.com/office/drawing/2017/decorative" val="1"/>
+              </a:ext>
+            </a:extLst>
+          </p:cNvPr>
+          <p:cNvCxnSpPr>
+            <a:cxnSpLocks noGrp="1" noRot="1" noChangeAspect="1" noMove="1" noResize="1" noEditPoints="1" noAdjustHandles="1" noChangeArrowheads="1" noChangeShapeType="1"/>
+          </p:cNvCxnSpPr>
+          <p:nvPr>
+            <p:extLst>
+              <p:ext uri="{386F3935-93C4-4BCD-93E2-E3B085C9AB24}">
+                <p16:designElem xmlns:p16="http://schemas.microsoft.com/office/powerpoint/2015/main" val="1"/>
+              </p:ext>
+            </p:extLst>
+          </p:nvPr>
+        </p:nvCxnSpPr>
+        <p:spPr>
+          <a:xfrm>
+            <a:off x="800100" y="723900"/>
+            <a:ext cx="10591800" cy="0"/>
+          </a:xfrm>
+          <a:prstGeom prst="line">
+            <a:avLst/>
+          </a:prstGeom>
+          <a:ln w="44450">
+            <a:solidFill>
+              <a:schemeClr val="tx1"/>
+            </a:solidFill>
+          </a:ln>
+        </p:spPr>
+        <p:style>
+          <a:lnRef idx="1">
+            <a:schemeClr val="accent1"/>
+          </a:lnRef>
+          <a:fillRef idx="0">
+            <a:schemeClr val="accent1"/>
+          </a:fillRef>
+          <a:effectRef idx="0">
+            <a:schemeClr val="accent1"/>
+          </a:effectRef>
+          <a:fontRef idx="minor">
+            <a:schemeClr val="tx1"/>
+          </a:fontRef>
+        </p:style>
+      </p:cxnSp>
+      <p:cxnSp>
+        <p:nvCxnSpPr>
+          <p:cNvPr id="16" name="Straight Connector 15">
+            <a:extLst>
+              <a:ext uri="{FF2B5EF4-FFF2-40B4-BE49-F238E27FC236}">
+                <a16:creationId xmlns:a16="http://schemas.microsoft.com/office/drawing/2014/main" id="{18D91C2B-BDB9-49BE-9C44-E0CFE597ABFE}"/>
+              </a:ext>
+              <a:ext uri="{C183D7F6-B498-43B3-948B-1728B52AA6E4}">
+                <adec:decorative xmlns:adec="http://schemas.microsoft.com/office/drawing/2017/decorative" val="1"/>
+              </a:ext>
+            </a:extLst>
+          </p:cNvPr>
+          <p:cNvCxnSpPr>
+            <a:cxnSpLocks noGrp="1" noRot="1" noChangeAspect="1" noMove="1" noResize="1" noEditPoints="1" noAdjustHandles="1" noChangeArrowheads="1" noChangeShapeType="1"/>
+          </p:cNvCxnSpPr>
+          <p:nvPr>
+            <p:extLst>
+              <p:ext uri="{386F3935-93C4-4BCD-93E2-E3B085C9AB24}">
+                <p16:designElem xmlns:p16="http://schemas.microsoft.com/office/powerpoint/2015/main" val="1"/>
+              </p:ext>
+            </p:extLst>
+          </p:nvPr>
+        </p:nvCxnSpPr>
+        <p:spPr>
+          <a:xfrm>
+            <a:off x="800100" y="6134100"/>
+            <a:ext cx="10591800" cy="0"/>
+          </a:xfrm>
+          <a:prstGeom prst="line">
+            <a:avLst/>
+          </a:prstGeom>
+          <a:ln w="12700">
+            <a:solidFill>
+              <a:schemeClr val="tx1"/>
+            </a:solidFill>
+          </a:ln>
+        </p:spPr>
+        <p:style>
+          <a:lnRef idx="1">
+            <a:schemeClr val="accent1"/>
+          </a:lnRef>
+          <a:fillRef idx="0">
+            <a:schemeClr val="accent1"/>
+          </a:fillRef>
+          <a:effectRef idx="0">
+            <a:schemeClr val="accent1"/>
+          </a:effectRef>
+          <a:fontRef idx="minor">
+            <a:schemeClr val="tx1"/>
+          </a:fontRef>
+        </p:style>
+      </p:cxnSp>
+      <p:sp>
+        <p:nvSpPr>
+          <p:cNvPr id="5" name="CasellaDiTesto 4">
+            <a:extLst>
+              <a:ext uri="{FF2B5EF4-FFF2-40B4-BE49-F238E27FC236}">
+                <a16:creationId xmlns:a16="http://schemas.microsoft.com/office/drawing/2014/main" id="{277C55CB-69A4-E1BE-6DA3-FD57E9BB6225}"/>
+              </a:ext>
+            </a:extLst>
+          </p:cNvPr>
+          <p:cNvSpPr txBox="1"/>
+          <p:nvPr/>
+        </p:nvSpPr>
+        <p:spPr>
+          <a:xfrm>
+            <a:off x="800100" y="908501"/>
+            <a:ext cx="10591800" cy="3539430"/>
+          </a:xfrm>
+          <a:prstGeom prst="rect">
+            <a:avLst/>
+          </a:prstGeom>
+          <a:noFill/>
+        </p:spPr>
+        <p:txBody>
+          <a:bodyPr wrap="square" rtlCol="0">
+            <a:spAutoFit/>
+          </a:bodyPr>
+          <a:lstStyle/>
+          <a:p>
+            <a:pPr marL="342900" indent="-342900">
+              <a:buFont typeface="+mj-lt"/>
+              <a:buAutoNum type="arabicPeriod"/>
+            </a:pPr>
+            <a:r>
+              <a:rPr lang="it-IT" sz="2800" dirty="0" err="1">
+                <a:solidFill>
+                  <a:schemeClr val="tx1">
+                    <a:lumMod val="50000"/>
+                  </a:schemeClr>
+                </a:solidFill>
+              </a:rPr>
+              <a:t>Introduction</a:t>
+            </a:r>
+            <a:endParaRPr lang="it-IT" sz="2800" dirty="0">
+              <a:solidFill>
+                <a:schemeClr val="tx1">
+                  <a:lumMod val="50000"/>
+                </a:schemeClr>
+              </a:solidFill>
+            </a:endParaRPr>
+          </a:p>
+          <a:p>
+            <a:pPr marL="342900" indent="-342900">
+              <a:buFont typeface="+mj-lt"/>
+              <a:buAutoNum type="arabicPeriod"/>
+            </a:pPr>
+            <a:r>
+              <a:rPr lang="it-IT" sz="2800" dirty="0" err="1">
+                <a:solidFill>
+                  <a:schemeClr val="tx1">
+                    <a:lumMod val="50000"/>
+                  </a:schemeClr>
+                </a:solidFill>
+              </a:rPr>
+              <a:t>Related</a:t>
+            </a:r>
+            <a:r>
+              <a:rPr lang="it-IT" sz="2800" dirty="0">
+                <a:solidFill>
+                  <a:schemeClr val="tx1">
+                    <a:lumMod val="50000"/>
+                  </a:schemeClr>
+                </a:solidFill>
+              </a:rPr>
+              <a:t> Works</a:t>
+            </a:r>
+          </a:p>
+          <a:p>
+            <a:pPr marL="342900" indent="-342900">
+              <a:buFont typeface="+mj-lt"/>
+              <a:buAutoNum type="arabicPeriod"/>
+            </a:pPr>
+            <a:r>
+              <a:rPr lang="en-US" sz="2800" dirty="0">
+                <a:solidFill>
+                  <a:schemeClr val="tx1">
+                    <a:lumMod val="50000"/>
+                  </a:schemeClr>
+                </a:solidFill>
+              </a:rPr>
+              <a:t>Proposed method</a:t>
+            </a:r>
+          </a:p>
+          <a:p>
+            <a:pPr marL="342900" indent="-342900">
+              <a:buFont typeface="+mj-lt"/>
+              <a:buAutoNum type="arabicPeriod"/>
+            </a:pPr>
+            <a:r>
+              <a:rPr lang="en-US" sz="2800" dirty="0">
+                <a:solidFill>
+                  <a:schemeClr val="tx1">
+                    <a:lumMod val="50000"/>
+                  </a:schemeClr>
+                </a:solidFill>
+              </a:rPr>
+              <a:t>Datasets and Metrics</a:t>
+            </a:r>
+          </a:p>
+          <a:p>
+            <a:pPr marL="342900" indent="-342900">
+              <a:buFont typeface="+mj-lt"/>
+              <a:buAutoNum type="arabicPeriod"/>
+            </a:pPr>
+            <a:r>
+              <a:rPr lang="en-US" sz="2800" dirty="0">
+                <a:solidFill>
+                  <a:schemeClr val="tx1">
+                    <a:lumMod val="50000"/>
+                  </a:schemeClr>
+                </a:solidFill>
+              </a:rPr>
+              <a:t>Experimental results</a:t>
+            </a:r>
+          </a:p>
+          <a:p>
+            <a:pPr marL="342900" indent="-342900">
+              <a:buFont typeface="+mj-lt"/>
+              <a:buAutoNum type="arabicPeriod"/>
+            </a:pPr>
+            <a:r>
               <a:rPr lang="en-US" sz="2800" dirty="0">
                 <a:solidFill>
                   <a:schemeClr val="tx1">
@@ -22190,7 +27138,7 @@
           <a:p>
             <a:fld id="{96A729D4-23F6-46B6-9B0B-2A3F46D27F45}" type="datetime1">
               <a:rPr lang="en-US" smtClean="0"/>
-              <a:t>6/6/2025</a:t>
+              <a:t>6/15/2025</a:t>
             </a:fld>
             <a:endParaRPr lang="en-US"/>
           </a:p>
@@ -22224,11 +27172,11 @@
           <a:p>
             <a:fld id="{87E7843D-FF13-4365-9478-9625B70A2705}" type="slidenum">
               <a:rPr lang="en-US" smtClean="0"/>
-              <a:t>21</a:t>
+              <a:t>23</a:t>
             </a:fld>
             <a:r>
               <a:rPr lang="en-US" dirty="0"/>
-              <a:t>/23</a:t>
+              <a:t>/24</a:t>
             </a:r>
           </a:p>
         </p:txBody>
@@ -22243,13 +27191,13 @@
   <p:clrMapOvr>
     <a:overrideClrMapping bg1="dk1" tx1="lt1" bg2="dk2" tx2="lt2" accent1="accent1" accent2="accent2" accent3="accent3" accent4="accent4" accent5="accent5" accent6="accent6" hlink="hlink" folHlink="folHlink"/>
   </p:clrMapOvr>
-  <mc:AlternateContent xmlns:mc="http://schemas.openxmlformats.org/markup-compatibility/2006">
-    <mc:Choice xmlns:p159="http://schemas.microsoft.com/office/powerpoint/2015/09/main" Requires="p159">
+  <mc:AlternateContent xmlns:mc="http://schemas.openxmlformats.org/markup-compatibility/2006" xmlns:p159="http://schemas.microsoft.com/office/powerpoint/2015/09/main">
+    <mc:Choice Requires="p159">
       <p:transition xmlns:p14="http://schemas.microsoft.com/office/powerpoint/2010/main" spd="slow" p14:dur="2000">
         <p159:morph option="byObject"/>
       </p:transition>
     </mc:Choice>
-    <mc:Fallback>
+    <mc:Fallback xmlns="">
       <p:transition spd="slow">
         <p:fade/>
       </p:transition>
@@ -22258,7 +27206,7 @@
 </p:sld>
 </file>
 
-<file path=ppt/slides/slide22.xml><?xml version="1.0" encoding="utf-8"?>
+<file path=ppt/slides/slide24.xml><?xml version="1.0" encoding="utf-8"?>
 <p:sld xmlns:a="http://schemas.openxmlformats.org/drawingml/2006/main" xmlns:r="http://schemas.openxmlformats.org/officeDocument/2006/relationships" xmlns:p="http://schemas.openxmlformats.org/presentationml/2006/main">
   <p:cSld>
     <p:spTree>
@@ -22685,7 +27633,7 @@
                 </a:solidFill>
                 <a:effectLst/>
               </a:rPr>
-              <a:t>238</a:t>
+              <a:t>248</a:t>
             </a:r>
             <a:r>
               <a:rPr lang="it-IT" sz="1400" b="0" i="0" dirty="0">
@@ -23629,7 +28577,7 @@
           <a:p>
             <a:fld id="{E3E75ED5-B33B-4610-BD29-7DB38B363520}" type="datetime1">
               <a:rPr lang="en-US" smtClean="0"/>
-              <a:t>6/6/2025</a:t>
+              <a:t>6/15/2025</a:t>
             </a:fld>
             <a:endParaRPr lang="en-US"/>
           </a:p>
@@ -23663,11 +28611,11 @@
           <a:p>
             <a:fld id="{87E7843D-FF13-4365-9478-9625B70A2705}" type="slidenum">
               <a:rPr lang="en-US" smtClean="0"/>
-              <a:t>22</a:t>
+              <a:t>24</a:t>
             </a:fld>
             <a:r>
               <a:rPr lang="en-US" dirty="0"/>
-              <a:t>/23</a:t>
+              <a:t>/24</a:t>
             </a:r>
           </a:p>
         </p:txBody>
@@ -23682,13 +28630,13 @@
   <p:clrMapOvr>
     <a:masterClrMapping/>
   </p:clrMapOvr>
-  <mc:AlternateContent xmlns:mc="http://schemas.openxmlformats.org/markup-compatibility/2006">
-    <mc:Choice xmlns:p159="http://schemas.microsoft.com/office/powerpoint/2015/09/main" Requires="p159">
+  <mc:AlternateContent xmlns:mc="http://schemas.openxmlformats.org/markup-compatibility/2006" xmlns:p159="http://schemas.microsoft.com/office/powerpoint/2015/09/main">
+    <mc:Choice Requires="p159">
       <p:transition xmlns:p14="http://schemas.microsoft.com/office/powerpoint/2010/main" spd="slow" p14:dur="2000">
         <p159:morph option="byObject"/>
       </p:transition>
     </mc:Choice>
-    <mc:Fallback>
+    <mc:Fallback xmlns="">
       <p:transition spd="slow">
         <p:fade/>
       </p:transition>
@@ -23697,7 +28645,7 @@
 </p:sld>
 </file>
 
-<file path=ppt/slides/slide23.xml><?xml version="1.0" encoding="utf-8"?>
+<file path=ppt/slides/slide25.xml><?xml version="1.0" encoding="utf-8"?>
 <p:sld xmlns:a="http://schemas.openxmlformats.org/drawingml/2006/main" xmlns:r="http://schemas.openxmlformats.org/officeDocument/2006/relationships" xmlns:p="http://schemas.openxmlformats.org/presentationml/2006/main">
   <p:cSld>
     <p:bg>
@@ -23999,7 +28947,7 @@
             </a:pPr>
             <a:fld id="{9332FD69-C29D-4C32-93A4-D5E40D863A6F}" type="datetime1">
               <a:rPr lang="en-US" smtClean="0"/>
-              <a:t>6/6/2025</a:t>
+              <a:t>6/15/2025</a:t>
             </a:fld>
             <a:endParaRPr lang="en-US"/>
           </a:p>
@@ -24051,11 +28999,11 @@
                   <a:spcPts val="600"/>
                 </a:spcAft>
               </a:pPr>
-              <a:t>23</a:t>
+              <a:t>25</a:t>
             </a:fld>
             <a:r>
               <a:rPr lang="en-US" dirty="0"/>
-              <a:t>/23</a:t>
+              <a:t>/25</a:t>
             </a:r>
           </a:p>
         </p:txBody>
@@ -24174,13 +29122,13 @@
   <p:clrMapOvr>
     <a:overrideClrMapping bg1="dk1" tx1="lt1" bg2="dk2" tx2="lt2" accent1="accent1" accent2="accent2" accent3="accent3" accent4="accent4" accent5="accent5" accent6="accent6" hlink="hlink" folHlink="folHlink"/>
   </p:clrMapOvr>
-  <mc:AlternateContent xmlns:mc="http://schemas.openxmlformats.org/markup-compatibility/2006">
-    <mc:Choice xmlns:p159="http://schemas.microsoft.com/office/powerpoint/2015/09/main" Requires="p159">
+  <mc:AlternateContent xmlns:mc="http://schemas.openxmlformats.org/markup-compatibility/2006" xmlns:p159="http://schemas.microsoft.com/office/powerpoint/2015/09/main">
+    <mc:Choice Requires="p159">
       <p:transition xmlns:p14="http://schemas.microsoft.com/office/powerpoint/2010/main" spd="slow" p14:dur="2000">
         <p159:morph option="byObject"/>
       </p:transition>
     </mc:Choice>
-    <mc:Fallback>
+    <mc:Fallback xmlns="">
       <p:transition spd="slow">
         <p:fade/>
       </p:transition>
@@ -24465,7 +29413,7 @@
             </a:pPr>
             <a:fld id="{55D784B2-0DE4-4109-8C5F-63D2354B8EF0}" type="datetime1">
               <a:rPr lang="en-US" smtClean="0"/>
-              <a:t>6/6/2025</a:t>
+              <a:t>6/15/2025</a:t>
             </a:fld>
             <a:endParaRPr lang="en-US"/>
           </a:p>
@@ -24521,7 +29469,7 @@
             </a:fld>
             <a:r>
               <a:rPr lang="en-US" dirty="0"/>
-              <a:t>/23</a:t>
+              <a:t>/25</a:t>
             </a:r>
           </a:p>
         </p:txBody>
@@ -24567,13 +29515,13 @@
   <p:clrMapOvr>
     <a:masterClrMapping/>
   </p:clrMapOvr>
-  <mc:AlternateContent xmlns:mc="http://schemas.openxmlformats.org/markup-compatibility/2006">
-    <mc:Choice xmlns:p159="http://schemas.microsoft.com/office/powerpoint/2015/09/main" Requires="p159">
+  <mc:AlternateContent xmlns:mc="http://schemas.openxmlformats.org/markup-compatibility/2006" xmlns:p159="http://schemas.microsoft.com/office/powerpoint/2015/09/main">
+    <mc:Choice Requires="p159">
       <p:transition xmlns:p14="http://schemas.microsoft.com/office/powerpoint/2010/main" spd="slow" p14:dur="2000">
         <p159:morph option="byObject"/>
       </p:transition>
     </mc:Choice>
-    <mc:Fallback>
+    <mc:Fallback xmlns="">
       <p:transition spd="slow">
         <p:fade/>
       </p:transition>
@@ -25102,7 +30050,7 @@
           <a:p>
             <a:fld id="{2B8A3729-C208-47AD-97E6-881C2F999B1C}" type="datetime1">
               <a:rPr lang="en-US" smtClean="0"/>
-              <a:t>6/6/2025</a:t>
+              <a:t>6/15/2025</a:t>
             </a:fld>
             <a:endParaRPr lang="en-US"/>
           </a:p>
@@ -25140,7 +30088,7 @@
             </a:fld>
             <a:r>
               <a:rPr lang="en-US" dirty="0"/>
-              <a:t>/23</a:t>
+              <a:t>/25</a:t>
             </a:r>
           </a:p>
         </p:txBody>
@@ -25155,13 +30103,13 @@
   <p:clrMapOvr>
     <a:overrideClrMapping bg1="dk1" tx1="lt1" bg2="dk2" tx2="lt2" accent1="accent1" accent2="accent2" accent3="accent3" accent4="accent4" accent5="accent5" accent6="accent6" hlink="hlink" folHlink="folHlink"/>
   </p:clrMapOvr>
-  <mc:AlternateContent xmlns:mc="http://schemas.openxmlformats.org/markup-compatibility/2006">
-    <mc:Choice xmlns:p159="http://schemas.microsoft.com/office/powerpoint/2015/09/main" Requires="p159">
+  <mc:AlternateContent xmlns:mc="http://schemas.openxmlformats.org/markup-compatibility/2006" xmlns:p159="http://schemas.microsoft.com/office/powerpoint/2015/09/main">
+    <mc:Choice Requires="p159">
       <p:transition xmlns:p14="http://schemas.microsoft.com/office/powerpoint/2010/main" spd="slow" p14:dur="2000">
         <p159:morph option="byObject"/>
       </p:transition>
     </mc:Choice>
-    <mc:Fallback>
+    <mc:Fallback xmlns="">
       <p:transition spd="slow">
         <p:fade/>
       </p:transition>
@@ -25367,7 +30315,7 @@
           <a:p>
             <a:fld id="{F24D2959-1581-40DF-B163-F32113850AB4}" type="datetime1">
               <a:rPr lang="en-US" smtClean="0"/>
-              <a:t>6/6/2025</a:t>
+              <a:t>6/15/2025</a:t>
             </a:fld>
             <a:endParaRPr lang="en-US"/>
           </a:p>
@@ -25400,7 +30348,7 @@
             </a:fld>
             <a:r>
               <a:rPr lang="en-US" dirty="0"/>
-              <a:t>/23</a:t>
+              <a:t>/25</a:t>
             </a:r>
           </a:p>
         </p:txBody>
@@ -25541,13 +30489,13 @@
   <p:clrMapOvr>
     <a:masterClrMapping/>
   </p:clrMapOvr>
-  <mc:AlternateContent xmlns:mc="http://schemas.openxmlformats.org/markup-compatibility/2006">
-    <mc:Choice xmlns:p159="http://schemas.microsoft.com/office/powerpoint/2015/09/main" Requires="p159">
+  <mc:AlternateContent xmlns:mc="http://schemas.openxmlformats.org/markup-compatibility/2006" xmlns:p159="http://schemas.microsoft.com/office/powerpoint/2015/09/main">
+    <mc:Choice Requires="p159">
       <p:transition xmlns:p14="http://schemas.microsoft.com/office/powerpoint/2010/main" spd="slow" p14:dur="2000">
         <p159:morph option="byObject"/>
       </p:transition>
     </mc:Choice>
-    <mc:Fallback>
+    <mc:Fallback xmlns="">
       <p:transition spd="slow">
         <p:fade/>
       </p:transition>
@@ -26082,7 +31030,7 @@
           <a:p>
             <a:fld id="{BAB0B40A-9EC8-470A-868E-E806769FDC85}" type="datetime1">
               <a:rPr lang="en-US" smtClean="0"/>
-              <a:t>6/6/2025</a:t>
+              <a:t>6/15/2025</a:t>
             </a:fld>
             <a:endParaRPr lang="en-US"/>
           </a:p>
@@ -26120,7 +31068,7 @@
             </a:fld>
             <a:r>
               <a:rPr lang="en-US" dirty="0"/>
-              <a:t>/23</a:t>
+              <a:t>/25</a:t>
             </a:r>
           </a:p>
         </p:txBody>
@@ -26135,13 +31083,13 @@
   <p:clrMapOvr>
     <a:overrideClrMapping bg1="dk1" tx1="lt1" bg2="dk2" tx2="lt2" accent1="accent1" accent2="accent2" accent3="accent3" accent4="accent4" accent5="accent5" accent6="accent6" hlink="hlink" folHlink="folHlink"/>
   </p:clrMapOvr>
-  <mc:AlternateContent xmlns:mc="http://schemas.openxmlformats.org/markup-compatibility/2006">
-    <mc:Choice xmlns:p159="http://schemas.microsoft.com/office/powerpoint/2015/09/main" Requires="p159">
+  <mc:AlternateContent xmlns:mc="http://schemas.openxmlformats.org/markup-compatibility/2006" xmlns:p159="http://schemas.microsoft.com/office/powerpoint/2015/09/main">
+    <mc:Choice Requires="p159">
       <p:transition xmlns:p14="http://schemas.microsoft.com/office/powerpoint/2010/main" spd="slow" p14:dur="2000">
         <p159:morph option="byObject"/>
       </p:transition>
     </mc:Choice>
-    <mc:Fallback>
+    <mc:Fallback xmlns="">
       <p:transition spd="slow">
         <p:fade/>
       </p:transition>
@@ -26371,7 +31319,7 @@
           <a:p>
             <a:fld id="{45B8BE40-FA93-44CB-8C3B-9FF680E37532}" type="datetime1">
               <a:rPr lang="en-US" smtClean="0"/>
-              <a:t>6/6/2025</a:t>
+              <a:t>6/15/2025</a:t>
             </a:fld>
             <a:endParaRPr lang="en-US"/>
           </a:p>
@@ -26404,7 +31352,7 @@
             </a:fld>
             <a:r>
               <a:rPr lang="en-US" dirty="0"/>
-              <a:t>/23</a:t>
+              <a:t>/25</a:t>
             </a:r>
           </a:p>
         </p:txBody>
@@ -26471,7 +31419,7 @@
             </a:r>
             <a:r>
               <a:rPr lang="it-IT" dirty="0"/>
-              <a:t> </a:t>
+              <a:t> Block </a:t>
             </a:r>
             <a:r>
               <a:rPr lang="it-IT" dirty="0" err="1"/>
@@ -26479,7 +31427,7 @@
             </a:r>
             <a:r>
               <a:rPr lang="it-IT" dirty="0"/>
-              <a:t> Block </a:t>
+              <a:t> </a:t>
             </a:r>
             <a:r>
               <a:rPr lang="it-IT" dirty="0" err="1"/>
@@ -26650,13 +31598,13 @@
   <p:clrMapOvr>
     <a:masterClrMapping/>
   </p:clrMapOvr>
-  <mc:AlternateContent xmlns:mc="http://schemas.openxmlformats.org/markup-compatibility/2006">
-    <mc:Choice xmlns:p159="http://schemas.microsoft.com/office/powerpoint/2015/09/main" Requires="p159">
+  <mc:AlternateContent xmlns:mc="http://schemas.openxmlformats.org/markup-compatibility/2006" xmlns:p159="http://schemas.microsoft.com/office/powerpoint/2015/09/main">
+    <mc:Choice Requires="p159">
       <p:transition xmlns:p14="http://schemas.microsoft.com/office/powerpoint/2010/main" spd="slow" p14:dur="2000">
         <p159:morph option="byObject"/>
       </p:transition>
     </mc:Choice>
-    <mc:Fallback>
+    <mc:Fallback xmlns="">
       <p:transition spd="slow">
         <p:fade/>
       </p:transition>
@@ -27564,7 +32512,7 @@
                   <a:srgbClr val="242424"/>
                 </a:solidFill>
               </a:rPr>
-              <a:t> and </a:t>
+              <a:t> and CBAM-MB </a:t>
             </a:r>
             <a:r>
               <a:rPr lang="it-IT" dirty="0" err="1">
@@ -27572,7 +32520,7 @@
                   <a:srgbClr val="242424"/>
                 </a:solidFill>
               </a:rPr>
-              <a:t>MBConv</a:t>
+              <a:t>Convolutional</a:t>
             </a:r>
             <a:r>
               <a:rPr lang="it-IT" dirty="0">
@@ -27630,7 +32578,7 @@
           <a:p>
             <a:fld id="{EF792202-18D4-477E-98E8-A6272FBF0D49}" type="datetime1">
               <a:rPr lang="en-US" smtClean="0"/>
-              <a:t>6/6/2025</a:t>
+              <a:t>6/15/2025</a:t>
             </a:fld>
             <a:endParaRPr lang="en-US"/>
           </a:p>
@@ -27663,7 +32611,7 @@
             </a:fld>
             <a:r>
               <a:rPr lang="en-US" dirty="0"/>
-              <a:t>/23</a:t>
+              <a:t>/25</a:t>
             </a:r>
           </a:p>
         </p:txBody>
@@ -27678,13 +32626,13 @@
   <p:clrMapOvr>
     <a:masterClrMapping/>
   </p:clrMapOvr>
-  <mc:AlternateContent xmlns:mc="http://schemas.openxmlformats.org/markup-compatibility/2006">
-    <mc:Choice xmlns:p159="http://schemas.microsoft.com/office/powerpoint/2015/09/main" Requires="p159">
+  <mc:AlternateContent xmlns:mc="http://schemas.openxmlformats.org/markup-compatibility/2006" xmlns:p159="http://schemas.microsoft.com/office/powerpoint/2015/09/main">
+    <mc:Choice Requires="p159">
       <p:transition xmlns:p14="http://schemas.microsoft.com/office/powerpoint/2010/main" spd="slow" p14:dur="2000">
         <p159:morph option="byObject"/>
       </p:transition>
     </mc:Choice>
-    <mc:Fallback>
+    <mc:Fallback xmlns="">
       <p:transition spd="slow">
         <p:fade/>
       </p:transition>
@@ -28219,7 +33167,7 @@
           <a:p>
             <a:fld id="{A909CE35-02C4-49DC-9DB7-9DC5FED7EA14}" type="datetime1">
               <a:rPr lang="en-US" smtClean="0"/>
-              <a:t>6/6/2025</a:t>
+              <a:t>6/15/2025</a:t>
             </a:fld>
             <a:endParaRPr lang="en-US"/>
           </a:p>
@@ -28257,7 +33205,7 @@
             </a:fld>
             <a:r>
               <a:rPr lang="en-US" dirty="0"/>
-              <a:t>/23</a:t>
+              <a:t>/25</a:t>
             </a:r>
           </a:p>
         </p:txBody>
@@ -28272,13 +33220,13 @@
   <p:clrMapOvr>
     <a:overrideClrMapping bg1="dk1" tx1="lt1" bg2="dk2" tx2="lt2" accent1="accent1" accent2="accent2" accent3="accent3" accent4="accent4" accent5="accent5" accent6="accent6" hlink="hlink" folHlink="folHlink"/>
   </p:clrMapOvr>
-  <mc:AlternateContent xmlns:mc="http://schemas.openxmlformats.org/markup-compatibility/2006">
-    <mc:Choice xmlns:p159="http://schemas.microsoft.com/office/powerpoint/2015/09/main" Requires="p159">
+  <mc:AlternateContent xmlns:mc="http://schemas.openxmlformats.org/markup-compatibility/2006" xmlns:p159="http://schemas.microsoft.com/office/powerpoint/2015/09/main">
+    <mc:Choice Requires="p159">
       <p:transition xmlns:p14="http://schemas.microsoft.com/office/powerpoint/2010/main" spd="slow" p14:dur="2000">
         <p159:morph option="byObject"/>
       </p:transition>
     </mc:Choice>
-    <mc:Fallback>
+    <mc:Fallback xmlns="">
       <p:transition spd="slow">
         <p:fade/>
       </p:transition>

--- a/Improving Robustness of Deepfake Detectors through Gradient Regularization.pptx
+++ b/Improving Robustness of Deepfake Detectors through Gradient Regularization.pptx
@@ -3499,7 +3499,7 @@
 <dgm:dataModel xmlns:dgm="http://schemas.openxmlformats.org/drawingml/2006/diagram" xmlns:a="http://schemas.openxmlformats.org/drawingml/2006/main">
   <dgm:ptLst>
     <dgm:pt modelId="{0E3F68D9-BF01-4EC4-8011-5F7A42A33055}" type="doc">
-      <dgm:prSet loTypeId="urn:microsoft.com/office/officeart/2005/8/layout/hierarchy1" loCatId="hierarchy" qsTypeId="urn:microsoft.com/office/officeart/2005/8/quickstyle/simple1" qsCatId="simple" csTypeId="urn:microsoft.com/office/officeart/2005/8/colors/colorful2" csCatId="colorful"/>
+      <dgm:prSet loTypeId="urn:microsoft.com/office/officeart/2005/8/layout/hierarchy1" loCatId="hierarchy" qsTypeId="urn:microsoft.com/office/officeart/2005/8/quickstyle/simple1" qsCatId="simple" csTypeId="urn:microsoft.com/office/officeart/2005/8/colors/colorful2" csCatId="colorful" phldr="1"/>
       <dgm:spPr/>
       <dgm:t>
         <a:bodyPr/>
@@ -3695,15 +3695,15 @@
           </a:r>
           <a:r>
             <a:rPr lang="it-IT" dirty="0" err="1"/>
-            <a:t>simplier</a:t>
+            <a:t>adversarial</a:t>
           </a:r>
           <a:r>
             <a:rPr lang="it-IT" dirty="0"/>
-            <a:t> models, </a:t>
+            <a:t> training and </a:t>
           </a:r>
           <a:r>
             <a:rPr lang="it-IT" dirty="0" err="1"/>
-            <a:t>possibly</a:t>
+            <a:t>harsher</a:t>
           </a:r>
           <a:r>
             <a:rPr lang="it-IT" dirty="0"/>
@@ -3711,23 +3711,7 @@
           </a:r>
           <a:r>
             <a:rPr lang="it-IT" dirty="0" err="1"/>
-            <a:t>without</a:t>
-          </a:r>
-          <a:r>
-            <a:rPr lang="it-IT" dirty="0"/>
-            <a:t> </a:t>
-          </a:r>
-          <a:r>
-            <a:rPr lang="it-IT" dirty="0" err="1"/>
-            <a:t>attention</a:t>
-          </a:r>
-          <a:r>
-            <a:rPr lang="it-IT" dirty="0"/>
-            <a:t> </a:t>
-          </a:r>
-          <a:r>
-            <a:rPr lang="it-IT" dirty="0" err="1"/>
-            <a:t>mechanisms</a:t>
+            <a:t>attacks</a:t>
           </a:r>
           <a:r>
             <a:rPr lang="it-IT" dirty="0"/>
@@ -3792,6 +3776,22 @@
           <a:r>
             <a:rPr lang="it-IT" dirty="0" err="1"/>
             <a:t>robustness</a:t>
+          </a:r>
+          <a:r>
+            <a:rPr lang="it-IT" dirty="0"/>
+            <a:t>, in </a:t>
+          </a:r>
+          <a:r>
+            <a:rPr lang="it-IT" dirty="0" err="1"/>
+            <a:t>those</a:t>
+          </a:r>
+          <a:r>
+            <a:rPr lang="it-IT" dirty="0"/>
+            <a:t> </a:t>
+          </a:r>
+          <a:r>
+            <a:rPr lang="it-IT" dirty="0" err="1"/>
+            <a:t>cases</a:t>
           </a:r>
           <a:r>
             <a:rPr lang="it-IT" dirty="0"/>
@@ -5801,15 +5801,15 @@
           </a:r>
           <a:r>
             <a:rPr lang="it-IT" sz="2700" kern="1200" dirty="0" err="1"/>
-            <a:t>simplier</a:t>
+            <a:t>adversarial</a:t>
           </a:r>
           <a:r>
             <a:rPr lang="it-IT" sz="2700" kern="1200" dirty="0"/>
-            <a:t> models, </a:t>
+            <a:t> training and </a:t>
           </a:r>
           <a:r>
             <a:rPr lang="it-IT" sz="2700" kern="1200" dirty="0" err="1"/>
-            <a:t>possibly</a:t>
+            <a:t>harsher</a:t>
           </a:r>
           <a:r>
             <a:rPr lang="it-IT" sz="2700" kern="1200" dirty="0"/>
@@ -5817,23 +5817,7 @@
           </a:r>
           <a:r>
             <a:rPr lang="it-IT" sz="2700" kern="1200" dirty="0" err="1"/>
-            <a:t>without</a:t>
-          </a:r>
-          <a:r>
-            <a:rPr lang="it-IT" sz="2700" kern="1200" dirty="0"/>
-            <a:t> </a:t>
-          </a:r>
-          <a:r>
-            <a:rPr lang="it-IT" sz="2700" kern="1200" dirty="0" err="1"/>
-            <a:t>attention</a:t>
-          </a:r>
-          <a:r>
-            <a:rPr lang="it-IT" sz="2700" kern="1200" dirty="0"/>
-            <a:t> </a:t>
-          </a:r>
-          <a:r>
-            <a:rPr lang="it-IT" sz="2700" kern="1200" dirty="0" err="1"/>
-            <a:t>mechanisms</a:t>
+            <a:t>attacks</a:t>
           </a:r>
           <a:r>
             <a:rPr lang="it-IT" sz="2700" kern="1200" dirty="0"/>
@@ -5898,6 +5882,22 @@
           <a:r>
             <a:rPr lang="it-IT" sz="2700" kern="1200" dirty="0" err="1"/>
             <a:t>robustness</a:t>
+          </a:r>
+          <a:r>
+            <a:rPr lang="it-IT" sz="2700" kern="1200" dirty="0"/>
+            <a:t>, in </a:t>
+          </a:r>
+          <a:r>
+            <a:rPr lang="it-IT" sz="2700" kern="1200" dirty="0" err="1"/>
+            <a:t>those</a:t>
+          </a:r>
+          <a:r>
+            <a:rPr lang="it-IT" sz="2700" kern="1200" dirty="0"/>
+            <a:t> </a:t>
+          </a:r>
+          <a:r>
+            <a:rPr lang="it-IT" sz="2700" kern="1200" dirty="0" err="1"/>
+            <a:t>cases</a:t>
           </a:r>
           <a:r>
             <a:rPr lang="it-IT" sz="2700" kern="1200" dirty="0"/>
@@ -10452,7 +10452,7 @@
           <a:p>
             <a:fld id="{141175B9-E39C-42E0-B6CC-63D1DFA43D1A}" type="datetimeFigureOut">
               <a:rPr lang="it-IT" smtClean="0"/>
-              <a:t>15/06/2025</a:t>
+              <a:t>18/06/2025</a:t>
             </a:fld>
             <a:endParaRPr lang="it-IT"/>
           </a:p>
@@ -10630,7 +10630,7 @@
           <a:p>
             <a:fld id="{1BEDFC1C-1464-4AA7-ADC8-617BBF2A616C}" type="datetimeFigureOut">
               <a:rPr lang="it-IT" smtClean="0"/>
-              <a:t>15/06/2025</a:t>
+              <a:t>18/06/2025</a:t>
             </a:fld>
             <a:endParaRPr lang="it-IT"/>
           </a:p>
@@ -11051,7 +11051,7 @@
           <a:p>
             <a:fld id="{0A7AEB39-4EB4-46F0-B79B-9651DB25992F}" type="datetime1">
               <a:rPr lang="en-US" smtClean="0"/>
-              <a:t>6/15/2025</a:t>
+              <a:t>6/18/2025</a:t>
             </a:fld>
             <a:endParaRPr lang="en-US"/>
           </a:p>
@@ -11255,7 +11255,7 @@
           <a:p>
             <a:fld id="{FE675B69-AE4C-4B96-9681-0657EA256625}" type="datetime1">
               <a:rPr lang="en-US" smtClean="0"/>
-              <a:t>6/15/2025</a:t>
+              <a:t>6/18/2025</a:t>
             </a:fld>
             <a:endParaRPr lang="en-US"/>
           </a:p>
@@ -11469,7 +11469,7 @@
           <a:p>
             <a:fld id="{FA42949B-2980-4851-BE50-25F06AAEB566}" type="datetime1">
               <a:rPr lang="en-US" smtClean="0"/>
-              <a:t>6/15/2025</a:t>
+              <a:t>6/18/2025</a:t>
             </a:fld>
             <a:endParaRPr lang="en-US"/>
           </a:p>
@@ -11673,7 +11673,7 @@
           <a:p>
             <a:fld id="{7E496969-8FFB-47C7-98ED-8020C88DA1F4}" type="datetime1">
               <a:rPr lang="en-US" smtClean="0"/>
-              <a:t>6/15/2025</a:t>
+              <a:t>6/18/2025</a:t>
             </a:fld>
             <a:endParaRPr lang="en-US"/>
           </a:p>
@@ -11953,7 +11953,7 @@
           <a:p>
             <a:fld id="{4FC415DA-4CD7-43F8-AB7E-6B07B8EDDB2E}" type="datetime1">
               <a:rPr lang="en-US" smtClean="0"/>
-              <a:t>6/15/2025</a:t>
+              <a:t>6/18/2025</a:t>
             </a:fld>
             <a:endParaRPr lang="en-US"/>
           </a:p>
@@ -12230,7 +12230,7 @@
           <a:p>
             <a:fld id="{CE643685-F7F2-43E1-8738-3F7457DAD190}" type="datetime1">
               <a:rPr lang="en-US" smtClean="0"/>
-              <a:t>6/15/2025</a:t>
+              <a:t>6/18/2025</a:t>
             </a:fld>
             <a:endParaRPr lang="en-US"/>
           </a:p>
@@ -12657,7 +12657,7 @@
           <a:p>
             <a:fld id="{498249C0-2FBE-44CA-AB33-93582E56C3C9}" type="datetime1">
               <a:rPr lang="en-US" smtClean="0"/>
-              <a:t>6/15/2025</a:t>
+              <a:t>6/18/2025</a:t>
             </a:fld>
             <a:endParaRPr lang="en-US"/>
           </a:p>
@@ -12803,7 +12803,7 @@
           <a:p>
             <a:fld id="{5FED4A6F-BB0E-4C05-93B9-19FAB61675C3}" type="datetime1">
               <a:rPr lang="en-US" smtClean="0"/>
-              <a:t>6/15/2025</a:t>
+              <a:t>6/18/2025</a:t>
             </a:fld>
             <a:endParaRPr lang="en-US"/>
           </a:p>
@@ -12920,7 +12920,7 @@
           <a:p>
             <a:fld id="{B6816B11-EFD1-4D0C-9A19-30F20645F13E}" type="datetime1">
               <a:rPr lang="en-US" smtClean="0"/>
-              <a:t>6/15/2025</a:t>
+              <a:t>6/18/2025</a:t>
             </a:fld>
             <a:endParaRPr lang="en-US"/>
           </a:p>
@@ -13237,7 +13237,7 @@
           <a:p>
             <a:fld id="{A2036CB5-4D95-40B9-AF7D-B6CDD5CCED9E}" type="datetime1">
               <a:rPr lang="en-US" smtClean="0"/>
-              <a:t>6/15/2025</a:t>
+              <a:t>6/18/2025</a:t>
             </a:fld>
             <a:endParaRPr lang="en-US"/>
           </a:p>
@@ -13534,7 +13534,7 @@
           <a:p>
             <a:fld id="{92BADFE3-3BBD-4F8A-B281-F3964790ED24}" type="datetime1">
               <a:rPr lang="en-US" smtClean="0"/>
-              <a:t>6/15/2025</a:t>
+              <a:t>6/18/2025</a:t>
             </a:fld>
             <a:endParaRPr lang="en-US"/>
           </a:p>
@@ -13780,7 +13780,7 @@
           <a:p>
             <a:fld id="{E66BC92C-3647-4C36-8FE9-00548F749DC6}" type="datetime1">
               <a:rPr lang="en-US" smtClean="0"/>
-              <a:t>6/15/2025</a:t>
+              <a:t>6/18/2025</a:t>
             </a:fld>
             <a:endParaRPr lang="en-US"/>
           </a:p>
@@ -14943,7 +14943,7 @@
           <a:p>
             <a:fld id="{E60DFD16-E4D7-4412-B907-19110A779FCF}" type="datetime1">
               <a:rPr lang="en-US" smtClean="0"/>
-              <a:t>6/15/2025</a:t>
+              <a:t>6/18/2025</a:t>
             </a:fld>
             <a:endParaRPr lang="en-US"/>
           </a:p>
@@ -16051,7 +16051,7 @@
           <a:p>
             <a:fld id="{E39A02F0-65E1-4A48-AD77-3F2D8D8A42A6}" type="datetime1">
               <a:rPr lang="en-US" smtClean="0"/>
-              <a:t>6/15/2025</a:t>
+              <a:t>6/18/2025</a:t>
             </a:fld>
             <a:endParaRPr lang="en-US"/>
           </a:p>
@@ -16645,7 +16645,7 @@
           <a:p>
             <a:fld id="{5441DF33-5F1C-47A9-944A-BF70FB300044}" type="datetime1">
               <a:rPr lang="en-US" smtClean="0"/>
-              <a:t>6/15/2025</a:t>
+              <a:t>6/18/2025</a:t>
             </a:fld>
             <a:endParaRPr lang="en-US"/>
           </a:p>
@@ -16901,7 +16901,7 @@
           <a:p>
             <a:fld id="{C6643A0F-00E4-4F0B-9B3D-25390A6762A7}" type="datetime1">
               <a:rPr lang="en-US" smtClean="0"/>
-              <a:t>6/15/2025</a:t>
+              <a:t>6/18/2025</a:t>
             </a:fld>
             <a:endParaRPr lang="en-US"/>
           </a:p>
@@ -17622,7 +17622,7 @@
             </a:pPr>
             <a:fld id="{3B5D4BD4-7206-4BA0-A1B6-26EDEA6935C8}" type="datetime1">
               <a:rPr lang="en-US" smtClean="0"/>
-              <a:t>6/15/2025</a:t>
+              <a:t>6/18/2025</a:t>
             </a:fld>
             <a:endParaRPr lang="en-US"/>
           </a:p>
@@ -17857,7 +17857,7 @@
           <a:p>
             <a:fld id="{61A2C637-3E11-486B-AB52-A94D6BCE90E0}" type="datetime1">
               <a:rPr lang="en-US" smtClean="0"/>
-              <a:t>6/15/2025</a:t>
+              <a:t>6/18/2025</a:t>
             </a:fld>
             <a:endParaRPr lang="en-US"/>
           </a:p>
@@ -18832,7 +18832,7 @@
           <a:p>
             <a:fld id="{4647E414-724E-4E15-8DE6-25177C62C6CE}" type="datetime1">
               <a:rPr lang="en-US" smtClean="0"/>
-              <a:t>6/15/2025</a:t>
+              <a:t>6/18/2025</a:t>
             </a:fld>
             <a:endParaRPr lang="en-US"/>
           </a:p>
@@ -19590,7 +19590,7 @@
           <a:p>
             <a:fld id="{D2B87A15-681E-424D-80F3-D1732F8861C7}" type="datetime1">
               <a:rPr lang="en-US" smtClean="0"/>
-              <a:t>6/15/2025</a:t>
+              <a:t>6/18/2025</a:t>
             </a:fld>
             <a:endParaRPr lang="en-US"/>
           </a:p>
@@ -19828,7 +19828,7 @@
           <a:p>
             <a:fld id="{5BB1D6AD-68FB-4B69-890D-0762D504BB10}" type="datetime1">
               <a:rPr lang="en-US" smtClean="0"/>
-              <a:t>6/15/2025</a:t>
+              <a:t>6/18/2025</a:t>
             </a:fld>
             <a:endParaRPr lang="en-US"/>
           </a:p>
@@ -22105,7 +22105,7 @@
           <a:p>
             <a:fld id="{5BB1D6AD-68FB-4B69-890D-0762D504BB10}" type="datetime1">
               <a:rPr lang="en-US" smtClean="0"/>
-              <a:t>6/16/2025</a:t>
+              <a:t>6/18/2025</a:t>
             </a:fld>
             <a:endParaRPr lang="en-US"/>
           </a:p>
@@ -22773,13 +22773,13 @@
   <p:clrMapOvr>
     <a:masterClrMapping/>
   </p:clrMapOvr>
-  <mc:AlternateContent xmlns:mc="http://schemas.openxmlformats.org/markup-compatibility/2006">
-    <mc:Choice xmlns:p159="http://schemas.microsoft.com/office/powerpoint/2015/09/main" Requires="p159">
+  <mc:AlternateContent xmlns:mc="http://schemas.openxmlformats.org/markup-compatibility/2006" xmlns:p159="http://schemas.microsoft.com/office/powerpoint/2015/09/main">
+    <mc:Choice Requires="p159">
       <p:transition xmlns:p14="http://schemas.microsoft.com/office/powerpoint/2010/main" spd="slow" p14:dur="2000">
         <p159:morph option="byObject"/>
       </p:transition>
     </mc:Choice>
-    <mc:Fallback>
+    <mc:Fallback xmlns="">
       <p:transition spd="slow">
         <p:fade/>
       </p:transition>
@@ -23311,7 +23311,7 @@
           <a:p>
             <a:fld id="{5BCA5869-AE93-4751-B4BA-4F2934821A8D}" type="datetime1">
               <a:rPr lang="en-US" smtClean="0"/>
-              <a:t>6/15/2025</a:t>
+              <a:t>6/18/2025</a:t>
             </a:fld>
             <a:endParaRPr lang="en-US"/>
           </a:p>
@@ -23524,7 +23524,7 @@
           <a:p>
             <a:fld id="{5BB1D6AD-68FB-4B69-890D-0762D504BB10}" type="datetime1">
               <a:rPr lang="en-US" smtClean="0"/>
-              <a:t>6/16/2025</a:t>
+              <a:t>6/18/2025</a:t>
             </a:fld>
             <a:endParaRPr lang="en-US"/>
           </a:p>
@@ -25613,13 +25613,13 @@
   <p:clrMapOvr>
     <a:masterClrMapping/>
   </p:clrMapOvr>
-  <mc:AlternateContent xmlns:mc="http://schemas.openxmlformats.org/markup-compatibility/2006">
-    <mc:Choice xmlns:p159="http://schemas.microsoft.com/office/powerpoint/2015/09/main" Requires="p159">
+  <mc:AlternateContent xmlns:mc="http://schemas.openxmlformats.org/markup-compatibility/2006" xmlns:p159="http://schemas.microsoft.com/office/powerpoint/2015/09/main">
+    <mc:Choice Requires="p159">
       <p:transition xmlns:p14="http://schemas.microsoft.com/office/powerpoint/2010/main" spd="slow" p14:dur="2000">
         <p159:morph option="byObject"/>
       </p:transition>
     </mc:Choice>
-    <mc:Fallback>
+    <mc:Fallback xmlns="">
       <p:transition spd="slow">
         <p:fade/>
       </p:transition>
@@ -26154,7 +26154,7 @@
           <a:p>
             <a:fld id="{F0665785-E4AC-49D4-85FE-49B29F04C024}" type="datetime1">
               <a:rPr lang="en-US" smtClean="0"/>
-              <a:t>6/15/2025</a:t>
+              <a:t>6/18/2025</a:t>
             </a:fld>
             <a:endParaRPr lang="en-US"/>
           </a:p>
@@ -26501,7 +26501,7 @@
             </a:pPr>
             <a:fld id="{309156DC-8F84-4EB4-BF6C-9DBAC7A68A8D}" type="datetime1">
               <a:rPr lang="en-US" smtClean="0"/>
-              <a:t>6/15/2025</a:t>
+              <a:t>6/18/2025</a:t>
             </a:fld>
             <a:endParaRPr lang="en-US"/>
           </a:p>
@@ -26578,7 +26578,7 @@
             <p:ph idx="1"/>
             <p:extLst>
               <p:ext uri="{D42A27DB-BD31-4B8C-83A1-F6EECF244321}">
-                <p14:modId xmlns:p14="http://schemas.microsoft.com/office/powerpoint/2010/main" val="3230359783"/>
+                <p14:modId xmlns:p14="http://schemas.microsoft.com/office/powerpoint/2010/main" val="4063700943"/>
               </p:ext>
             </p:extLst>
           </p:nvPr>
@@ -27138,7 +27138,7 @@
           <a:p>
             <a:fld id="{96A729D4-23F6-46B6-9B0B-2A3F46D27F45}" type="datetime1">
               <a:rPr lang="en-US" smtClean="0"/>
-              <a:t>6/15/2025</a:t>
+              <a:t>6/18/2025</a:t>
             </a:fld>
             <a:endParaRPr lang="en-US"/>
           </a:p>
@@ -28577,7 +28577,7 @@
           <a:p>
             <a:fld id="{E3E75ED5-B33B-4610-BD29-7DB38B363520}" type="datetime1">
               <a:rPr lang="en-US" smtClean="0"/>
-              <a:t>6/15/2025</a:t>
+              <a:t>6/18/2025</a:t>
             </a:fld>
             <a:endParaRPr lang="en-US"/>
           </a:p>
@@ -28947,7 +28947,7 @@
             </a:pPr>
             <a:fld id="{9332FD69-C29D-4C32-93A4-D5E40D863A6F}" type="datetime1">
               <a:rPr lang="en-US" smtClean="0"/>
-              <a:t>6/15/2025</a:t>
+              <a:t>6/18/2025</a:t>
             </a:fld>
             <a:endParaRPr lang="en-US"/>
           </a:p>
@@ -29413,7 +29413,7 @@
             </a:pPr>
             <a:fld id="{55D784B2-0DE4-4109-8C5F-63D2354B8EF0}" type="datetime1">
               <a:rPr lang="en-US" smtClean="0"/>
-              <a:t>6/15/2025</a:t>
+              <a:t>6/18/2025</a:t>
             </a:fld>
             <a:endParaRPr lang="en-US"/>
           </a:p>
@@ -30050,7 +30050,7 @@
           <a:p>
             <a:fld id="{2B8A3729-C208-47AD-97E6-881C2F999B1C}" type="datetime1">
               <a:rPr lang="en-US" smtClean="0"/>
-              <a:t>6/15/2025</a:t>
+              <a:t>6/18/2025</a:t>
             </a:fld>
             <a:endParaRPr lang="en-US"/>
           </a:p>
@@ -30315,7 +30315,7 @@
           <a:p>
             <a:fld id="{F24D2959-1581-40DF-B163-F32113850AB4}" type="datetime1">
               <a:rPr lang="en-US" smtClean="0"/>
-              <a:t>6/15/2025</a:t>
+              <a:t>6/18/2025</a:t>
             </a:fld>
             <a:endParaRPr lang="en-US"/>
           </a:p>
@@ -31030,7 +31030,7 @@
           <a:p>
             <a:fld id="{BAB0B40A-9EC8-470A-868E-E806769FDC85}" type="datetime1">
               <a:rPr lang="en-US" smtClean="0"/>
-              <a:t>6/15/2025</a:t>
+              <a:t>6/18/2025</a:t>
             </a:fld>
             <a:endParaRPr lang="en-US"/>
           </a:p>
@@ -31319,7 +31319,7 @@
           <a:p>
             <a:fld id="{45B8BE40-FA93-44CB-8C3B-9FF680E37532}" type="datetime1">
               <a:rPr lang="en-US" smtClean="0"/>
-              <a:t>6/15/2025</a:t>
+              <a:t>6/18/2025</a:t>
             </a:fld>
             <a:endParaRPr lang="en-US"/>
           </a:p>
@@ -32578,7 +32578,7 @@
           <a:p>
             <a:fld id="{EF792202-18D4-477E-98E8-A6272FBF0D49}" type="datetime1">
               <a:rPr lang="en-US" smtClean="0"/>
-              <a:t>6/15/2025</a:t>
+              <a:t>6/18/2025</a:t>
             </a:fld>
             <a:endParaRPr lang="en-US"/>
           </a:p>
@@ -33167,7 +33167,7 @@
           <a:p>
             <a:fld id="{A909CE35-02C4-49DC-9DB7-9DC5FED7EA14}" type="datetime1">
               <a:rPr lang="en-US" smtClean="0"/>
-              <a:t>6/15/2025</a:t>
+              <a:t>6/18/2025</a:t>
             </a:fld>
             <a:endParaRPr lang="en-US"/>
           </a:p>
